--- a/课件/题集刷题导航/第1章-绪论/第1章-绪论.pptx
+++ b/课件/题集刷题导航/第1章-绪论/第1章-绪论.pptx
@@ -1,24 +1,24 @@
 
 <file path=ppt/presentation.xml><?xml version="1.0" encoding="utf-8"?>
-<p:presentation xmlns:a="http://schemas.openxmlformats.org/drawingml/2006/main" xmlns:r="http://schemas.openxmlformats.org/officeDocument/2006/relationships" xmlns:p="http://schemas.openxmlformats.org/presentationml/2006/main" autoCompressPictures="0">
+<p:presentation xmlns:a="http://schemas.openxmlformats.org/drawingml/2006/main" xmlns:r="http://schemas.openxmlformats.org/officeDocument/2006/relationships" xmlns:p="http://schemas.openxmlformats.org/presentationml/2006/main" saveSubsetFonts="1" autoCompressPictures="0">
   <p:sldMasterIdLst>
     <p:sldMasterId id="2147483648" r:id="rId1"/>
   </p:sldMasterIdLst>
+  <p:sldIdLst>
+    <p:sldId id="256" r:id="rId2"/>
+    <p:sldId id="257" r:id="rId3"/>
+    <p:sldId id="258" r:id="rId4"/>
+    <p:sldId id="259" r:id="rId5"/>
+    <p:sldId id="260" r:id="rId6"/>
+    <p:sldId id="261" r:id="rId7"/>
+    <p:sldId id="262" r:id="rId8"/>
+    <p:sldId id="263" r:id="rId9"/>
+  </p:sldIdLst>
   <p:notesMasterIdLst>
-    <p:notesMasterId r:id="rId4"/>
+    <p:notesMasterId r:id="rId10"/>
   </p:notesMasterIdLst>
-  <p:sldIdLst>
-    <p:sldId id="256" r:id="rId3"/>
-    <p:sldId id="257" r:id="rId5"/>
-    <p:sldId id="258" r:id="rId6"/>
-    <p:sldId id="259" r:id="rId7"/>
-    <p:sldId id="260" r:id="rId8"/>
-    <p:sldId id="262" r:id="rId9"/>
-    <p:sldId id="261" r:id="rId10"/>
-    <p:sldId id="263" r:id="rId11"/>
-  </p:sldIdLst>
-  <p:sldSz cx="12191365" cy="6858000"/>
-  <p:notesSz cx="6858000" cy="12191365"/>
+  <p:sldSz cx="12191695" cy="6858000"/>
+  <p:notesSz cx="6858000" cy="12191695"/>
   <p:defaultTextStyle>
     <a:lvl1pPr marL="0" algn="l" defTabSz="914400" rtl="0" eaLnBrk="1" latinLnBrk="0" hangingPunct="1">
       <a:defRPr sz="1800" kern="1200">
@@ -196,6 +196,7 @@
           <a:p>
             <a:fld id="{5282F153-3F37-0F45-9E97-73ACFA13230C}" type="datetimeFigureOut">
               <a:rPr lang="en-US"/>
+              <a:t>7/23/19</a:t>
             </a:fld>
             <a:endParaRPr lang="en-US"/>
           </a:p>
@@ -262,7 +263,6 @@
               <a:rPr lang="en-US"/>
               <a:t>Click to edit Master text styles</a:t>
             </a:r>
-            <a:endParaRPr lang="en-US"/>
           </a:p>
           <a:p>
             <a:pPr lvl="1"/>
@@ -270,7 +270,6 @@
               <a:rPr lang="en-US"/>
               <a:t>Second level</a:t>
             </a:r>
-            <a:endParaRPr lang="en-US"/>
           </a:p>
           <a:p>
             <a:pPr lvl="2"/>
@@ -278,7 +277,6 @@
               <a:rPr lang="en-US"/>
               <a:t>Third level</a:t>
             </a:r>
-            <a:endParaRPr lang="en-US"/>
           </a:p>
           <a:p>
             <a:pPr lvl="3"/>
@@ -286,7 +284,6 @@
               <a:rPr lang="en-US"/>
               <a:t>Fourth level</a:t>
             </a:r>
-            <a:endParaRPr lang="en-US"/>
           </a:p>
           <a:p>
             <a:pPr lvl="4"/>
@@ -294,7 +291,6 @@
               <a:rPr lang="en-US"/>
               <a:t>Fifth level</a:t>
             </a:r>
-            <a:endParaRPr lang="en-US"/>
           </a:p>
         </p:txBody>
       </p:sp>
@@ -358,12 +354,18 @@
           <a:p>
             <a:fld id="{CE5E9CC1-C706-0F49-92D6-E571CC5EEA8F}" type="slidenum">
               <a:rPr lang="en-US"/>
+              <a:t>‹#›</a:t>
             </a:fld>
             <a:endParaRPr lang="en-US"/>
           </a:p>
         </p:txBody>
       </p:sp>
     </p:spTree>
+    <p:extLst>
+      <p:ext uri="{BB962C8B-B14F-4D97-AF65-F5344CB8AC3E}">
+        <p14:creationId xmlns:p14="http://schemas.microsoft.com/office/powerpoint/2010/main" val="1024086991"/>
+      </p:ext>
+    </p:extLst>
   </p:cSld>
   <p:clrMap bg1="lt1" tx1="dk1" bg2="lt2" tx2="dk2" accent1="accent1" accent2="accent2" accent3="accent3" accent4="accent4" accent5="accent5" accent6="accent6" hlink="hlink" folHlink="folHlink"/>
   <p:notesStyle>
@@ -505,6 +507,10 @@
           <a:bodyPr/>
           <a:lstStyle/>
           <a:p>
+            <a:r>
+              <a:rPr lang="en-US" dirty="0"/>
+              <a:t/>
+            </a:r>
             <a:endParaRPr lang="en-US" dirty="0"/>
           </a:p>
         </p:txBody>
@@ -526,12 +532,18 @@
           <a:p>
             <a:fld id="{F7021451-1387-4CA6-816F-3879F97B5CBC}" type="slidenum">
               <a:rPr lang="en-US"/>
+              <a:t>1</a:t>
             </a:fld>
             <a:endParaRPr lang="en-US"/>
           </a:p>
         </p:txBody>
       </p:sp>
     </p:spTree>
+    <p:extLst>
+      <p:ext uri="{BB962C8B-B14F-4D97-AF65-F5344CB8AC3E}">
+        <p14:creationId xmlns:p14="http://schemas.microsoft.com/office/powerpoint/2010/main" val="1024086991"/>
+      </p:ext>
+    </p:extLst>
   </p:cSld>
   <p:clrMapOvr>
     <a:masterClrMapping/>
@@ -583,6 +595,10 @@
           <a:bodyPr/>
           <a:lstStyle/>
           <a:p>
+            <a:r>
+              <a:rPr lang="en-US" dirty="0"/>
+              <a:t/>
+            </a:r>
             <a:endParaRPr lang="en-US" dirty="0"/>
           </a:p>
         </p:txBody>
@@ -604,12 +620,18 @@
           <a:p>
             <a:fld id="{F7021451-1387-4CA6-816F-3879F97B5CBC}" type="slidenum">
               <a:rPr lang="en-US"/>
+              <a:t>2</a:t>
             </a:fld>
             <a:endParaRPr lang="en-US"/>
           </a:p>
         </p:txBody>
       </p:sp>
     </p:spTree>
+    <p:extLst>
+      <p:ext uri="{BB962C8B-B14F-4D97-AF65-F5344CB8AC3E}">
+        <p14:creationId xmlns:p14="http://schemas.microsoft.com/office/powerpoint/2010/main" val="1024086991"/>
+      </p:ext>
+    </p:extLst>
   </p:cSld>
   <p:clrMapOvr>
     <a:masterClrMapping/>
@@ -661,6 +683,10 @@
           <a:bodyPr/>
           <a:lstStyle/>
           <a:p>
+            <a:r>
+              <a:rPr lang="en-US" dirty="0"/>
+              <a:t/>
+            </a:r>
             <a:endParaRPr lang="en-US" dirty="0"/>
           </a:p>
         </p:txBody>
@@ -682,12 +708,18 @@
           <a:p>
             <a:fld id="{F7021451-1387-4CA6-816F-3879F97B5CBC}" type="slidenum">
               <a:rPr lang="en-US"/>
+              <a:t>3</a:t>
             </a:fld>
             <a:endParaRPr lang="en-US"/>
           </a:p>
         </p:txBody>
       </p:sp>
     </p:spTree>
+    <p:extLst>
+      <p:ext uri="{BB962C8B-B14F-4D97-AF65-F5344CB8AC3E}">
+        <p14:creationId xmlns:p14="http://schemas.microsoft.com/office/powerpoint/2010/main" val="1024086991"/>
+      </p:ext>
+    </p:extLst>
   </p:cSld>
   <p:clrMapOvr>
     <a:masterClrMapping/>
@@ -739,6 +771,10 @@
           <a:bodyPr/>
           <a:lstStyle/>
           <a:p>
+            <a:r>
+              <a:rPr lang="en-US" dirty="0"/>
+              <a:t/>
+            </a:r>
             <a:endParaRPr lang="en-US" dirty="0"/>
           </a:p>
         </p:txBody>
@@ -760,12 +796,18 @@
           <a:p>
             <a:fld id="{F7021451-1387-4CA6-816F-3879F97B5CBC}" type="slidenum">
               <a:rPr lang="en-US"/>
+              <a:t>4</a:t>
             </a:fld>
             <a:endParaRPr lang="en-US"/>
           </a:p>
         </p:txBody>
       </p:sp>
     </p:spTree>
+    <p:extLst>
+      <p:ext uri="{BB962C8B-B14F-4D97-AF65-F5344CB8AC3E}">
+        <p14:creationId xmlns:p14="http://schemas.microsoft.com/office/powerpoint/2010/main" val="1024086991"/>
+      </p:ext>
+    </p:extLst>
   </p:cSld>
   <p:clrMapOvr>
     <a:masterClrMapping/>
@@ -817,6 +859,10 @@
           <a:bodyPr/>
           <a:lstStyle/>
           <a:p>
+            <a:r>
+              <a:rPr lang="en-US" dirty="0"/>
+              <a:t/>
+            </a:r>
             <a:endParaRPr lang="en-US" dirty="0"/>
           </a:p>
         </p:txBody>
@@ -838,12 +884,18 @@
           <a:p>
             <a:fld id="{F7021451-1387-4CA6-816F-3879F97B5CBC}" type="slidenum">
               <a:rPr lang="en-US"/>
+              <a:t>5</a:t>
             </a:fld>
             <a:endParaRPr lang="en-US"/>
           </a:p>
         </p:txBody>
       </p:sp>
     </p:spTree>
+    <p:extLst>
+      <p:ext uri="{BB962C8B-B14F-4D97-AF65-F5344CB8AC3E}">
+        <p14:creationId xmlns:p14="http://schemas.microsoft.com/office/powerpoint/2010/main" val="1024086991"/>
+      </p:ext>
+    </p:extLst>
   </p:cSld>
   <p:clrMapOvr>
     <a:masterClrMapping/>
@@ -895,6 +947,10 @@
           <a:bodyPr/>
           <a:lstStyle/>
           <a:p>
+            <a:r>
+              <a:rPr lang="en-US" dirty="0"/>
+              <a:t/>
+            </a:r>
             <a:endParaRPr lang="en-US" dirty="0"/>
           </a:p>
         </p:txBody>
@@ -916,12 +972,18 @@
           <a:p>
             <a:fld id="{F7021451-1387-4CA6-816F-3879F97B5CBC}" type="slidenum">
               <a:rPr lang="en-US"/>
+              <a:t>6</a:t>
             </a:fld>
             <a:endParaRPr lang="en-US"/>
           </a:p>
         </p:txBody>
       </p:sp>
     </p:spTree>
+    <p:extLst>
+      <p:ext uri="{BB962C8B-B14F-4D97-AF65-F5344CB8AC3E}">
+        <p14:creationId xmlns:p14="http://schemas.microsoft.com/office/powerpoint/2010/main" val="1024086991"/>
+      </p:ext>
+    </p:extLst>
   </p:cSld>
   <p:clrMapOvr>
     <a:masterClrMapping/>
@@ -973,6 +1035,10 @@
           <a:bodyPr/>
           <a:lstStyle/>
           <a:p>
+            <a:r>
+              <a:rPr lang="en-US" dirty="0"/>
+              <a:t/>
+            </a:r>
             <a:endParaRPr lang="en-US" dirty="0"/>
           </a:p>
         </p:txBody>
@@ -994,12 +1060,18 @@
           <a:p>
             <a:fld id="{F7021451-1387-4CA6-816F-3879F97B5CBC}" type="slidenum">
               <a:rPr lang="en-US"/>
+              <a:t>7</a:t>
             </a:fld>
             <a:endParaRPr lang="en-US"/>
           </a:p>
         </p:txBody>
       </p:sp>
     </p:spTree>
+    <p:extLst>
+      <p:ext uri="{BB962C8B-B14F-4D97-AF65-F5344CB8AC3E}">
+        <p14:creationId xmlns:p14="http://schemas.microsoft.com/office/powerpoint/2010/main" val="1024086991"/>
+      </p:ext>
+    </p:extLst>
   </p:cSld>
   <p:clrMapOvr>
     <a:masterClrMapping/>
@@ -1051,6 +1123,10 @@
           <a:bodyPr/>
           <a:lstStyle/>
           <a:p>
+            <a:r>
+              <a:rPr lang="en-US" dirty="0"/>
+              <a:t/>
+            </a:r>
             <a:endParaRPr lang="en-US" dirty="0"/>
           </a:p>
         </p:txBody>
@@ -1072,12 +1148,18 @@
           <a:p>
             <a:fld id="{F7021451-1387-4CA6-816F-3879F97B5CBC}" type="slidenum">
               <a:rPr lang="en-US"/>
+              <a:t>8</a:t>
             </a:fld>
             <a:endParaRPr lang="en-US"/>
           </a:p>
         </p:txBody>
       </p:sp>
     </p:spTree>
+    <p:extLst>
+      <p:ext uri="{BB962C8B-B14F-4D97-AF65-F5344CB8AC3E}">
+        <p14:creationId xmlns:p14="http://schemas.microsoft.com/office/powerpoint/2010/main" val="1024086991"/>
+      </p:ext>
+    </p:extLst>
   </p:cSld>
   <p:clrMapOvr>
     <a:masterClrMapping/>
@@ -1118,11 +1200,6 @@
 <file path=ppt/slideMasters/slideMaster1.xml><?xml version="1.0" encoding="utf-8"?>
 <p:sldMaster xmlns:a="http://schemas.openxmlformats.org/drawingml/2006/main" xmlns:r="http://schemas.openxmlformats.org/officeDocument/2006/relationships" xmlns:p="http://schemas.openxmlformats.org/presentationml/2006/main">
   <p:cSld>
-    <p:bg>
-      <p:bgRef idx="1001">
-        <a:schemeClr val="bg1"/>
-      </p:bgRef>
-    </p:bg>
     <p:spTree>
       <p:nvGrpSpPr>
         <p:cNvPr id="1" name=""/>
@@ -1166,7 +1243,7 @@
         <a:spcBef>
           <a:spcPct val="20000"/>
         </a:spcBef>
-        <a:buFont typeface="Arial" panose="020B0604020202020204" pitchFamily="34" charset="0"/>
+        <a:buFont typeface="Arial" pitchFamily="34" charset="0"/>
         <a:buChar char="•"/>
         <a:defRPr sz="3200" kern="1200">
           <a:solidFill>
@@ -1181,7 +1258,7 @@
         <a:spcBef>
           <a:spcPct val="20000"/>
         </a:spcBef>
-        <a:buFont typeface="Arial" panose="020B0604020202020204" pitchFamily="34" charset="0"/>
+        <a:buFont typeface="Arial" pitchFamily="34" charset="0"/>
         <a:buChar char="–"/>
         <a:defRPr sz="2800" kern="1200">
           <a:solidFill>
@@ -1196,7 +1273,7 @@
         <a:spcBef>
           <a:spcPct val="20000"/>
         </a:spcBef>
-        <a:buFont typeface="Arial" panose="020B0604020202020204" pitchFamily="34" charset="0"/>
+        <a:buFont typeface="Arial" pitchFamily="34" charset="0"/>
         <a:buChar char="•"/>
         <a:defRPr sz="2400" kern="1200">
           <a:solidFill>
@@ -1211,7 +1288,7 @@
         <a:spcBef>
           <a:spcPct val="20000"/>
         </a:spcBef>
-        <a:buFont typeface="Arial" panose="020B0604020202020204" pitchFamily="34" charset="0"/>
+        <a:buFont typeface="Arial" pitchFamily="34" charset="0"/>
         <a:buChar char="–"/>
         <a:defRPr sz="2000" kern="1200">
           <a:solidFill>
@@ -1226,7 +1303,7 @@
         <a:spcBef>
           <a:spcPct val="20000"/>
         </a:spcBef>
-        <a:buFont typeface="Arial" panose="020B0604020202020204" pitchFamily="34" charset="0"/>
+        <a:buFont typeface="Arial" pitchFamily="34" charset="0"/>
         <a:buChar char="»"/>
         <a:defRPr sz="2000" kern="1200">
           <a:solidFill>
@@ -1241,7 +1318,7 @@
         <a:spcBef>
           <a:spcPct val="20000"/>
         </a:spcBef>
-        <a:buFont typeface="Arial" panose="020B0604020202020204" pitchFamily="34" charset="0"/>
+        <a:buFont typeface="Arial" pitchFamily="34" charset="0"/>
         <a:buChar char="•"/>
         <a:defRPr sz="2000" kern="1200">
           <a:solidFill>
@@ -1256,7 +1333,7 @@
         <a:spcBef>
           <a:spcPct val="20000"/>
         </a:spcBef>
-        <a:buFont typeface="Arial" panose="020B0604020202020204" pitchFamily="34" charset="0"/>
+        <a:buFont typeface="Arial" pitchFamily="34" charset="0"/>
         <a:buChar char="•"/>
         <a:defRPr sz="2000" kern="1200">
           <a:solidFill>
@@ -1271,7 +1348,7 @@
         <a:spcBef>
           <a:spcPct val="20000"/>
         </a:spcBef>
-        <a:buFont typeface="Arial" panose="020B0604020202020204" pitchFamily="34" charset="0"/>
+        <a:buFont typeface="Arial" pitchFamily="34" charset="0"/>
         <a:buChar char="•"/>
         <a:defRPr sz="2000" kern="1200">
           <a:solidFill>
@@ -1286,7 +1363,7 @@
         <a:spcBef>
           <a:spcPct val="20000"/>
         </a:spcBef>
-        <a:buFont typeface="Arial" panose="020B0604020202020204" pitchFamily="34" charset="0"/>
+        <a:buFont typeface="Arial" pitchFamily="34" charset="0"/>
         <a:buChar char="•"/>
         <a:defRPr sz="2000" kern="1200">
           <a:solidFill>
@@ -1399,7 +1476,7 @@
 
 <file path=ppt/slides/slide1.xml><?xml version="1.0" encoding="utf-8"?>
 <p:sld xmlns:a="http://schemas.openxmlformats.org/drawingml/2006/main" xmlns:r="http://schemas.openxmlformats.org/officeDocument/2006/relationships" xmlns:p="http://schemas.openxmlformats.org/presentationml/2006/main">
-  <p:cSld>
+  <p:cSld name="Slide 1">
     <p:bg>
       <p:bgPr>
         <a:blipFill dpi="0" rotWithShape="1">
@@ -1443,12 +1520,13 @@
             <a:avLst/>
           </a:prstGeom>
           <a:noFill/>
+          <a:ln/>
         </p:spPr>
         <p:txBody>
           <a:bodyPr wrap="square" rtlCol="0" anchor="ctr"/>
           <a:lstStyle/>
           <a:p>
-            <a:pPr marL="0" indent="0" algn="r">
+            <a:pPr algn="r" indent="0" marL="0">
               <a:buNone/>
             </a:pPr>
             <a:r>
@@ -1456,9 +1534,9 @@
                 <a:solidFill>
                   <a:srgbClr val="8A9099"/>
                 </a:solidFill>
-                <a:latin typeface="微软雅黑" panose="020B0503020204020204" pitchFamily="34" charset="-122"/>
-                <a:ea typeface="微软雅黑" panose="020B0503020204020204" pitchFamily="34" charset="-122"/>
-                <a:cs typeface="微软雅黑" panose="020B0503020204020204" pitchFamily="34" charset="-120"/>
+                <a:latin typeface="微软雅黑" pitchFamily="34" charset="0"/>
+                <a:ea typeface="微软雅黑" pitchFamily="34" charset="-122"/>
+                <a:cs typeface="微软雅黑" pitchFamily="34" charset="-120"/>
               </a:rPr>
               <a:t>1 / 8</a:t>
             </a:r>
@@ -1481,12 +1559,13 @@
             <a:avLst/>
           </a:prstGeom>
           <a:noFill/>
+          <a:ln/>
         </p:spPr>
         <p:txBody>
           <a:bodyPr wrap="square" rtlCol="0" anchor="ctr"/>
           <a:lstStyle/>
           <a:p>
-            <a:pPr marL="0" indent="0" algn="ctr">
+            <a:pPr algn="ctr" indent="0" marL="0">
               <a:buNone/>
             </a:pPr>
             <a:r>
@@ -1494,9 +1573,9 @@
                 <a:solidFill>
                   <a:srgbClr val="1F4E9C"/>
                 </a:solidFill>
-                <a:latin typeface="微软雅黑" panose="020B0503020204020204" pitchFamily="34" charset="-122"/>
-                <a:ea typeface="微软雅黑" panose="020B0503020204020204" pitchFamily="34" charset="-122"/>
-                <a:cs typeface="微软雅黑" panose="020B0503020204020204" pitchFamily="34" charset="-120"/>
+                <a:latin typeface="微软雅黑" pitchFamily="34" charset="0"/>
+                <a:ea typeface="微软雅黑" pitchFamily="34" charset="-122"/>
+                <a:cs typeface="微软雅黑" pitchFamily="34" charset="-120"/>
               </a:rPr>
               <a:t>重邮考研802 数据结构</a:t>
             </a:r>
@@ -1519,12 +1598,13 @@
             <a:avLst/>
           </a:prstGeom>
           <a:noFill/>
+          <a:ln/>
         </p:spPr>
         <p:txBody>
           <a:bodyPr wrap="square" rtlCol="0" anchor="ctr"/>
           <a:lstStyle/>
           <a:p>
-            <a:pPr marL="0" indent="0" algn="ctr">
+            <a:pPr algn="ctr" indent="0" marL="0">
               <a:buNone/>
             </a:pPr>
             <a:r>
@@ -1532,9 +1612,9 @@
                 <a:solidFill>
                   <a:srgbClr val="1F2329"/>
                 </a:solidFill>
-                <a:latin typeface="微软雅黑" panose="020B0503020204020204" pitchFamily="34" charset="-122"/>
-                <a:ea typeface="微软雅黑" panose="020B0503020204020204" pitchFamily="34" charset="-122"/>
-                <a:cs typeface="微软雅黑" panose="020B0503020204020204" pitchFamily="34" charset="-120"/>
+                <a:latin typeface="微软雅黑" pitchFamily="34" charset="0"/>
+                <a:ea typeface="微软雅黑" pitchFamily="34" charset="-122"/>
+                <a:cs typeface="微软雅黑" pitchFamily="34" charset="-120"/>
               </a:rPr>
               <a:t>习题集题目勾画 · 第1章 绪论</a:t>
             </a:r>
@@ -1557,12 +1637,13 @@
             <a:avLst/>
           </a:prstGeom>
           <a:noFill/>
+          <a:ln/>
         </p:spPr>
         <p:txBody>
           <a:bodyPr wrap="square" rtlCol="0" anchor="ctr"/>
           <a:lstStyle/>
           <a:p>
-            <a:pPr marL="0" indent="0" algn="ctr">
+            <a:pPr algn="ctr" indent="0" marL="0">
               <a:buNone/>
             </a:pPr>
             <a:r>
@@ -1570,9 +1651,9 @@
                 <a:solidFill>
                   <a:srgbClr val="1F2329"/>
                 </a:solidFill>
-                <a:latin typeface="微软雅黑" panose="020B0503020204020204" pitchFamily="34" charset="-122"/>
-                <a:ea typeface="微软雅黑" panose="020B0503020204020204" pitchFamily="34" charset="-122"/>
-                <a:cs typeface="微软雅黑" panose="020B0503020204020204" pitchFamily="34" charset="-120"/>
+                <a:latin typeface="微软雅黑" pitchFamily="34" charset="0"/>
+                <a:ea typeface="微软雅黑" pitchFamily="34" charset="-122"/>
+                <a:cs typeface="微软雅黑" pitchFamily="34" charset="-120"/>
               </a:rPr>
               <a:t>严蔚敏《数据结构题集（第2版）》</a:t>
             </a:r>
@@ -1595,12 +1676,13 @@
             <a:avLst/>
           </a:prstGeom>
           <a:noFill/>
+          <a:ln/>
         </p:spPr>
         <p:txBody>
           <a:bodyPr wrap="square" rtlCol="0" anchor="ctr"/>
           <a:lstStyle/>
           <a:p>
-            <a:pPr marL="0" indent="0" algn="ctr">
+            <a:pPr algn="ctr" indent="0" marL="0">
               <a:buNone/>
             </a:pPr>
             <a:r>
@@ -1608,9 +1690,9 @@
                 <a:solidFill>
                   <a:srgbClr val="8A9099"/>
                 </a:solidFill>
-                <a:latin typeface="微软雅黑" panose="020B0503020204020204" pitchFamily="34" charset="-122"/>
-                <a:ea typeface="微软雅黑" panose="020B0503020204020204" pitchFamily="34" charset="-122"/>
-                <a:cs typeface="微软雅黑" panose="020B0503020204020204" pitchFamily="34" charset="-120"/>
+                <a:latin typeface="微软雅黑" pitchFamily="34" charset="0"/>
+                <a:ea typeface="微软雅黑" pitchFamily="34" charset="-122"/>
+                <a:cs typeface="微软雅黑" pitchFamily="34" charset="-120"/>
               </a:rPr>
               <a:t>依据：802考情与2020—2026真题 · 主讲：牙膏学长</a:t>
             </a:r>
@@ -1628,7 +1710,7 @@
 
 <file path=ppt/slides/slide2.xml><?xml version="1.0" encoding="utf-8"?>
 <p:sld xmlns:a="http://schemas.openxmlformats.org/drawingml/2006/main" xmlns:r="http://schemas.openxmlformats.org/officeDocument/2006/relationships" xmlns:p="http://schemas.openxmlformats.org/presentationml/2006/main">
-  <p:cSld>
+  <p:cSld name="Slide 2">
     <p:bg>
       <p:bgPr>
         <a:blipFill dpi="0" rotWithShape="1">
@@ -1672,12 +1754,13 @@
             <a:avLst/>
           </a:prstGeom>
           <a:noFill/>
+          <a:ln/>
         </p:spPr>
         <p:txBody>
           <a:bodyPr wrap="square" rtlCol="0" anchor="ctr"/>
           <a:lstStyle/>
           <a:p>
-            <a:pPr marL="0" indent="0" algn="r">
+            <a:pPr algn="r" indent="0" marL="0">
               <a:buNone/>
             </a:pPr>
             <a:r>
@@ -1685,9 +1768,9 @@
                 <a:solidFill>
                   <a:srgbClr val="8A9099"/>
                 </a:solidFill>
-                <a:latin typeface="微软雅黑" panose="020B0503020204020204" pitchFamily="34" charset="-122"/>
-                <a:ea typeface="微软雅黑" panose="020B0503020204020204" pitchFamily="34" charset="-122"/>
-                <a:cs typeface="微软雅黑" panose="020B0503020204020204" pitchFamily="34" charset="-120"/>
+                <a:latin typeface="微软雅黑" pitchFamily="34" charset="0"/>
+                <a:ea typeface="微软雅黑" pitchFamily="34" charset="-122"/>
+                <a:cs typeface="微软雅黑" pitchFamily="34" charset="-120"/>
               </a:rPr>
               <a:t>2 / 8</a:t>
             </a:r>
@@ -1710,12 +1793,13 @@
             <a:avLst/>
           </a:prstGeom>
           <a:noFill/>
+          <a:ln/>
         </p:spPr>
         <p:txBody>
           <a:bodyPr wrap="square" rtlCol="0" anchor="ctr"/>
           <a:lstStyle/>
           <a:p>
-            <a:pPr marL="0" indent="0" algn="l">
+            <a:pPr algn="l" indent="0" marL="0">
               <a:buNone/>
             </a:pPr>
             <a:r>
@@ -1723,9 +1807,9 @@
                 <a:solidFill>
                   <a:srgbClr val="1F4E9C"/>
                 </a:solidFill>
-                <a:latin typeface="微软雅黑" panose="020B0503020204020204" pitchFamily="34" charset="-122"/>
-                <a:ea typeface="微软雅黑" panose="020B0503020204020204" pitchFamily="34" charset="-122"/>
-                <a:cs typeface="微软雅黑" panose="020B0503020204020204" pitchFamily="34" charset="-120"/>
+                <a:latin typeface="微软雅黑" pitchFamily="34" charset="0"/>
+                <a:ea typeface="微软雅黑" pitchFamily="34" charset="-122"/>
+                <a:cs typeface="微软雅黑" pitchFamily="34" charset="-120"/>
               </a:rPr>
               <a:t>本章勾画总览</a:t>
             </a:r>
@@ -1748,12 +1832,13 @@
             <a:avLst/>
           </a:prstGeom>
           <a:noFill/>
+          <a:ln/>
         </p:spPr>
         <p:txBody>
           <a:bodyPr wrap="square" rtlCol="0" anchor="ctr"/>
           <a:lstStyle/>
           <a:p>
-            <a:pPr marL="0" indent="0" algn="l">
+            <a:pPr algn="l" indent="0" marL="0">
               <a:buNone/>
             </a:pPr>
             <a:r>
@@ -1761,9 +1846,9 @@
                 <a:solidFill>
                   <a:srgbClr val="1F2329"/>
                 </a:solidFill>
-                <a:latin typeface="微软雅黑" panose="020B0503020204020204" pitchFamily="34" charset="-122"/>
-                <a:ea typeface="微软雅黑" panose="020B0503020204020204" pitchFamily="34" charset="-122"/>
-                <a:cs typeface="微软雅黑" panose="020B0503020204020204" pitchFamily="34" charset="-120"/>
+                <a:latin typeface="微软雅黑" pitchFamily="34" charset="0"/>
+                <a:ea typeface="微软雅黑" pitchFamily="34" charset="-122"/>
+                <a:cs typeface="微软雅黑" pitchFamily="34" charset="-120"/>
               </a:rPr>
               <a:t>第1章三档题量与用法</a:t>
             </a:r>
@@ -1773,15 +1858,21 @@
       </p:sp>
       <p:graphicFrame>
         <p:nvGraphicFramePr>
-          <p:cNvPr id="5" name="Table 0"/>
+          <p:cNvPr id="3" name="Table 0"/>
           <p:cNvGraphicFramePr>
             <a:graphicFrameLocks noGrp="1"/>
           </p:cNvGraphicFramePr>
-          <p:nvPr/>
+          <p:nvPr>
+            <p:extLst>
+              <p:ext uri="{D42A27DB-BD31-4B8C-83A1-F6EECF244321}">
+                <p14:modId xmlns:p14="http://schemas.microsoft.com/office/powerpoint/2010/main" val="1579011935"/>
+              </p:ext>
+            </p:extLst>
+          </p:nvPr>
         </p:nvGraphicFramePr>
         <p:xfrm>
           <a:off x="822960" y="2395728"/>
-          <a:ext cx="10545776" cy="1682496"/>
+          <a:ext cx="10545775" cy="914400"/>
         </p:xfrm>
         <a:graphic>
           <a:graphicData uri="http://schemas.openxmlformats.org/drawingml/2006/table">
@@ -1799,7 +1890,7 @@
                     <a:bodyPr/>
                     <a:lstStyle/>
                     <a:p>
-                      <a:pPr marL="0" indent="0" algn="ctr">
+                      <a:pPr algn="ctr" indent="0" marL="0">
                         <a:buNone/>
                       </a:pPr>
                       <a:r>
@@ -1807,20 +1898,20 @@
                           <a:solidFill>
                             <a:srgbClr val="1F4E9C"/>
                           </a:solidFill>
-                          <a:latin typeface="微软雅黑" panose="020B0503020204020204" pitchFamily="34" charset="-122"/>
-                          <a:ea typeface="微软雅黑" panose="020B0503020204020204" pitchFamily="34" charset="-122"/>
-                          <a:cs typeface="微软雅黑" panose="020B0503020204020204" pitchFamily="34" charset="-120"/>
+                          <a:latin typeface="微软雅黑" pitchFamily="34" charset="0"/>
+                          <a:ea typeface="微软雅黑" pitchFamily="34" charset="-122"/>
+                          <a:cs typeface="微软雅黑" pitchFamily="34" charset="-120"/>
                         </a:rPr>
                         <a:t>方向</a:t>
                       </a:r>
                       <a:endParaRPr lang="en-US" sz="1500" dirty="0">
-                        <a:latin typeface="微软雅黑" panose="020B0503020204020204" pitchFamily="34" charset="-122"/>
-                        <a:ea typeface="微软雅黑" panose="020B0503020204020204" pitchFamily="34" charset="-122"/>
-                        <a:cs typeface="微软雅黑" panose="020B0503020204020204" pitchFamily="34" charset="-122"/>
+                        <a:latin typeface="微软雅黑" charset="0"/>
+                        <a:ea typeface="微软雅黑" charset="0"/>
+                        <a:cs typeface="微软雅黑" charset="0"/>
                       </a:endParaRPr>
                     </a:p>
                   </a:txBody>
-                  <a:tcPr anchor="ctr">
+                  <a:tcPr marL="91440" marR="91440" marT="45720" marB="45720" anchor="ctr">
                     <a:lnL w="9525" cap="flat" cmpd="sng" algn="ctr">
                       <a:solidFill>
                         <a:srgbClr val="D8DBE0"/>
@@ -1867,7 +1958,7 @@
                     <a:bodyPr/>
                     <a:lstStyle/>
                     <a:p>
-                      <a:pPr marL="0" indent="0" algn="ctr">
+                      <a:pPr algn="ctr" indent="0" marL="0">
                         <a:buNone/>
                       </a:pPr>
                       <a:r>
@@ -1875,20 +1966,20 @@
                           <a:solidFill>
                             <a:srgbClr val="1F4E9C"/>
                           </a:solidFill>
-                          <a:latin typeface="微软雅黑" panose="020B0503020204020204" pitchFamily="34" charset="-122"/>
-                          <a:ea typeface="微软雅黑" panose="020B0503020204020204" pitchFamily="34" charset="-122"/>
-                          <a:cs typeface="微软雅黑" panose="020B0503020204020204" pitchFamily="34" charset="-120"/>
+                          <a:latin typeface="微软雅黑" pitchFamily="34" charset="0"/>
+                          <a:ea typeface="微软雅黑" pitchFamily="34" charset="-122"/>
+                          <a:cs typeface="微软雅黑" pitchFamily="34" charset="-120"/>
                         </a:rPr>
                         <a:t>题数</a:t>
                       </a:r>
                       <a:endParaRPr lang="en-US" sz="1500" dirty="0">
-                        <a:latin typeface="微软雅黑" panose="020B0503020204020204" pitchFamily="34" charset="-122"/>
-                        <a:ea typeface="微软雅黑" panose="020B0503020204020204" pitchFamily="34" charset="-122"/>
-                        <a:cs typeface="微软雅黑" panose="020B0503020204020204" pitchFamily="34" charset="-122"/>
+                        <a:latin typeface="微软雅黑" charset="0"/>
+                        <a:ea typeface="微软雅黑" charset="0"/>
+                        <a:cs typeface="微软雅黑" charset="0"/>
                       </a:endParaRPr>
                     </a:p>
                   </a:txBody>
-                  <a:tcPr anchor="ctr">
+                  <a:tcPr marL="91440" marR="91440" marT="45720" marB="45720" anchor="ctr">
                     <a:lnL w="9525" cap="flat" cmpd="sng" algn="ctr">
                       <a:solidFill>
                         <a:srgbClr val="D8DBE0"/>
@@ -1935,7 +2026,7 @@
                     <a:bodyPr/>
                     <a:lstStyle/>
                     <a:p>
-                      <a:pPr marL="0" indent="0" algn="ctr">
+                      <a:pPr algn="ctr" indent="0" marL="0">
                         <a:buNone/>
                       </a:pPr>
                       <a:r>
@@ -1943,20 +2034,20 @@
                           <a:solidFill>
                             <a:srgbClr val="1F4E9C"/>
                           </a:solidFill>
-                          <a:latin typeface="微软雅黑" panose="020B0503020204020204" pitchFamily="34" charset="-122"/>
-                          <a:ea typeface="微软雅黑" panose="020B0503020204020204" pitchFamily="34" charset="-122"/>
-                          <a:cs typeface="微软雅黑" panose="020B0503020204020204" pitchFamily="34" charset="-120"/>
+                          <a:latin typeface="微软雅黑" pitchFamily="34" charset="0"/>
+                          <a:ea typeface="微软雅黑" pitchFamily="34" charset="-122"/>
+                          <a:cs typeface="微软雅黑" pitchFamily="34" charset="-120"/>
                         </a:rPr>
                         <a:t>占比</a:t>
                       </a:r>
                       <a:endParaRPr lang="en-US" sz="1500" dirty="0">
-                        <a:latin typeface="微软雅黑" panose="020B0503020204020204" pitchFamily="34" charset="-122"/>
-                        <a:ea typeface="微软雅黑" panose="020B0503020204020204" pitchFamily="34" charset="-122"/>
-                        <a:cs typeface="微软雅黑" panose="020B0503020204020204" pitchFamily="34" charset="-122"/>
+                        <a:latin typeface="微软雅黑" charset="0"/>
+                        <a:ea typeface="微软雅黑" charset="0"/>
+                        <a:cs typeface="微软雅黑" charset="0"/>
                       </a:endParaRPr>
                     </a:p>
                   </a:txBody>
-                  <a:tcPr anchor="ctr">
+                  <a:tcPr marL="91440" marR="91440" marT="45720" marB="45720" anchor="ctr">
                     <a:lnL w="9525" cap="flat" cmpd="sng" algn="ctr">
                       <a:solidFill>
                         <a:srgbClr val="D8DBE0"/>
@@ -2003,7 +2094,7 @@
                     <a:bodyPr/>
                     <a:lstStyle/>
                     <a:p>
-                      <a:pPr marL="0" indent="0" algn="ctr">
+                      <a:pPr algn="ctr" indent="0" marL="0">
                         <a:buNone/>
                       </a:pPr>
                       <a:r>
@@ -2011,20 +2102,20 @@
                           <a:solidFill>
                             <a:srgbClr val="1F4E9C"/>
                           </a:solidFill>
-                          <a:latin typeface="微软雅黑" panose="020B0503020204020204" pitchFamily="34" charset="-122"/>
-                          <a:ea typeface="微软雅黑" panose="020B0503020204020204" pitchFamily="34" charset="-122"/>
-                          <a:cs typeface="微软雅黑" panose="020B0503020204020204" pitchFamily="34" charset="-120"/>
+                          <a:latin typeface="微软雅黑" pitchFamily="34" charset="0"/>
+                          <a:ea typeface="微软雅黑" pitchFamily="34" charset="-122"/>
+                          <a:cs typeface="微软雅黑" pitchFamily="34" charset="-120"/>
                         </a:rPr>
                         <a:t>定位</a:t>
                       </a:r>
                       <a:endParaRPr lang="en-US" sz="1500" dirty="0">
-                        <a:latin typeface="微软雅黑" panose="020B0503020204020204" pitchFamily="34" charset="-122"/>
-                        <a:ea typeface="微软雅黑" panose="020B0503020204020204" pitchFamily="34" charset="-122"/>
-                        <a:cs typeface="微软雅黑" panose="020B0503020204020204" pitchFamily="34" charset="-122"/>
+                        <a:latin typeface="微软雅黑" charset="0"/>
+                        <a:ea typeface="微软雅黑" charset="0"/>
+                        <a:cs typeface="微软雅黑" charset="0"/>
                       </a:endParaRPr>
                     </a:p>
                   </a:txBody>
-                  <a:tcPr anchor="ctr">
+                  <a:tcPr marL="91440" marR="91440" marT="45720" marB="45720" anchor="ctr">
                     <a:lnL w="9525" cap="flat" cmpd="sng" algn="ctr">
                       <a:solidFill>
                         <a:srgbClr val="D8DBE0"/>
@@ -2073,7 +2164,7 @@
                     <a:bodyPr/>
                     <a:lstStyle/>
                     <a:p>
-                      <a:pPr marL="0" indent="0" algn="ctr">
+                      <a:pPr algn="ctr" indent="0" marL="0">
                         <a:buNone/>
                       </a:pPr>
                       <a:r>
@@ -2081,20 +2172,20 @@
                           <a:solidFill>
                             <a:srgbClr val="1F2329"/>
                           </a:solidFill>
-                          <a:latin typeface="微软雅黑" panose="020B0503020204020204" pitchFamily="34" charset="-122"/>
-                          <a:ea typeface="微软雅黑" panose="020B0503020204020204" pitchFamily="34" charset="-122"/>
-                          <a:cs typeface="微软雅黑" panose="020B0503020204020204" pitchFamily="34" charset="-120"/>
+                          <a:latin typeface="微软雅黑" pitchFamily="34" charset="0"/>
+                          <a:ea typeface="微软雅黑" pitchFamily="34" charset="-122"/>
+                          <a:cs typeface="微软雅黑" pitchFamily="34" charset="-120"/>
                         </a:rPr>
                         <a:t>有价值必做</a:t>
                       </a:r>
                       <a:endParaRPr lang="en-US" sz="1500" dirty="0">
-                        <a:latin typeface="微软雅黑" panose="020B0503020204020204" pitchFamily="34" charset="-122"/>
-                        <a:ea typeface="微软雅黑" panose="020B0503020204020204" pitchFamily="34" charset="-122"/>
-                        <a:cs typeface="微软雅黑" panose="020B0503020204020204" pitchFamily="34" charset="-122"/>
+                        <a:latin typeface="微软雅黑" charset="0"/>
+                        <a:ea typeface="微软雅黑" charset="0"/>
+                        <a:cs typeface="微软雅黑" charset="0"/>
                       </a:endParaRPr>
                     </a:p>
                   </a:txBody>
-                  <a:tcPr anchor="ctr">
+                  <a:tcPr marL="91440" marR="91440" marT="45720" marB="45720" anchor="ctr">
                     <a:lnL w="9525" cap="flat" cmpd="sng" algn="ctr">
                       <a:solidFill>
                         <a:srgbClr val="D8DBE0"/>
@@ -2141,7 +2232,7 @@
                     <a:bodyPr/>
                     <a:lstStyle/>
                     <a:p>
-                      <a:pPr marL="0" indent="0" algn="ctr">
+                      <a:pPr algn="ctr" indent="0" marL="0">
                         <a:buNone/>
                       </a:pPr>
                       <a:r>
@@ -2149,20 +2240,20 @@
                           <a:solidFill>
                             <a:srgbClr val="1F2329"/>
                           </a:solidFill>
-                          <a:latin typeface="微软雅黑" panose="020B0503020204020204" pitchFamily="34" charset="-122"/>
-                          <a:ea typeface="微软雅黑" panose="020B0503020204020204" pitchFamily="34" charset="-122"/>
-                          <a:cs typeface="微软雅黑" panose="020B0503020204020204" pitchFamily="34" charset="-120"/>
+                          <a:latin typeface="微软雅黑" pitchFamily="34" charset="0"/>
+                          <a:ea typeface="微软雅黑" pitchFamily="34" charset="-122"/>
+                          <a:cs typeface="微软雅黑" pitchFamily="34" charset="-120"/>
                         </a:rPr>
                         <a:t>13</a:t>
                       </a:r>
                       <a:endParaRPr lang="en-US" sz="1500" dirty="0">
-                        <a:latin typeface="微软雅黑" panose="020B0503020204020204" pitchFamily="34" charset="-122"/>
-                        <a:ea typeface="微软雅黑" panose="020B0503020204020204" pitchFamily="34" charset="-122"/>
-                        <a:cs typeface="微软雅黑" panose="020B0503020204020204" pitchFamily="34" charset="-122"/>
+                        <a:latin typeface="微软雅黑" charset="0"/>
+                        <a:ea typeface="微软雅黑" charset="0"/>
+                        <a:cs typeface="微软雅黑" charset="0"/>
                       </a:endParaRPr>
                     </a:p>
                   </a:txBody>
-                  <a:tcPr anchor="ctr">
+                  <a:tcPr marL="91440" marR="91440" marT="45720" marB="45720" anchor="ctr">
                     <a:lnL w="9525" cap="flat" cmpd="sng" algn="ctr">
                       <a:solidFill>
                         <a:srgbClr val="D8DBE0"/>
@@ -2209,7 +2300,7 @@
                     <a:bodyPr/>
                     <a:lstStyle/>
                     <a:p>
-                      <a:pPr marL="0" indent="0" algn="ctr">
+                      <a:pPr algn="ctr" indent="0" marL="0">
                         <a:buNone/>
                       </a:pPr>
                       <a:r>
@@ -2217,20 +2308,20 @@
                           <a:solidFill>
                             <a:srgbClr val="1F2329"/>
                           </a:solidFill>
-                          <a:latin typeface="微软雅黑" panose="020B0503020204020204" pitchFamily="34" charset="-122"/>
-                          <a:ea typeface="微软雅黑" panose="020B0503020204020204" pitchFamily="34" charset="-122"/>
-                          <a:cs typeface="微软雅黑" panose="020B0503020204020204" pitchFamily="34" charset="-120"/>
+                          <a:latin typeface="微软雅黑" pitchFamily="34" charset="0"/>
+                          <a:ea typeface="微软雅黑" pitchFamily="34" charset="-122"/>
+                          <a:cs typeface="微软雅黑" pitchFamily="34" charset="-120"/>
                         </a:rPr>
                         <a:t>28%</a:t>
                       </a:r>
                       <a:endParaRPr lang="en-US" sz="1500" dirty="0">
-                        <a:latin typeface="微软雅黑" panose="020B0503020204020204" pitchFamily="34" charset="-122"/>
-                        <a:ea typeface="微软雅黑" panose="020B0503020204020204" pitchFamily="34" charset="-122"/>
-                        <a:cs typeface="微软雅黑" panose="020B0503020204020204" pitchFamily="34" charset="-122"/>
+                        <a:latin typeface="微软雅黑" charset="0"/>
+                        <a:ea typeface="微软雅黑" charset="0"/>
+                        <a:cs typeface="微软雅黑" charset="0"/>
                       </a:endParaRPr>
                     </a:p>
                   </a:txBody>
-                  <a:tcPr anchor="ctr">
+                  <a:tcPr marL="91440" marR="91440" marT="45720" marB="45720" anchor="ctr">
                     <a:lnL w="9525" cap="flat" cmpd="sng" algn="ctr">
                       <a:solidFill>
                         <a:srgbClr val="D8DBE0"/>
@@ -2277,7 +2368,7 @@
                     <a:bodyPr/>
                     <a:lstStyle/>
                     <a:p>
-                      <a:pPr marL="0" indent="0" algn="ctr">
+                      <a:pPr algn="ctr" indent="0" marL="0">
                         <a:buNone/>
                       </a:pPr>
                       <a:r>
@@ -2285,20 +2376,20 @@
                           <a:solidFill>
                             <a:srgbClr val="1F2329"/>
                           </a:solidFill>
-                          <a:latin typeface="微软雅黑" panose="020B0503020204020204" pitchFamily="34" charset="-122"/>
-                          <a:ea typeface="微软雅黑" panose="020B0503020204020204" pitchFamily="34" charset="-122"/>
-                          <a:cs typeface="微软雅黑" panose="020B0503020204020204" pitchFamily="34" charset="-120"/>
+                          <a:latin typeface="微软雅黑" pitchFamily="34" charset="0"/>
+                          <a:ea typeface="微软雅黑" pitchFamily="34" charset="-122"/>
+                          <a:cs typeface="微软雅黑" pitchFamily="34" charset="-120"/>
                         </a:rPr>
                         <a:t>对应真题题型，逐题精做</a:t>
                       </a:r>
                       <a:endParaRPr lang="en-US" sz="1500" dirty="0">
-                        <a:latin typeface="微软雅黑" panose="020B0503020204020204" pitchFamily="34" charset="-122"/>
-                        <a:ea typeface="微软雅黑" panose="020B0503020204020204" pitchFamily="34" charset="-122"/>
-                        <a:cs typeface="微软雅黑" panose="020B0503020204020204" pitchFamily="34" charset="-122"/>
+                        <a:latin typeface="微软雅黑" charset="0"/>
+                        <a:ea typeface="微软雅黑" charset="0"/>
+                        <a:cs typeface="微软雅黑" charset="0"/>
                       </a:endParaRPr>
                     </a:p>
                   </a:txBody>
-                  <a:tcPr anchor="ctr">
+                  <a:tcPr marL="91440" marR="91440" marT="45720" marB="45720" anchor="ctr">
                     <a:lnL w="9525" cap="flat" cmpd="sng" algn="ctr">
                       <a:solidFill>
                         <a:srgbClr val="D8DBE0"/>
@@ -2347,7 +2438,7 @@
                     <a:bodyPr/>
                     <a:lstStyle/>
                     <a:p>
-                      <a:pPr marL="0" indent="0" algn="ctr">
+                      <a:pPr algn="ctr" indent="0" marL="0">
                         <a:buNone/>
                       </a:pPr>
                       <a:r>
@@ -2355,20 +2446,20 @@
                           <a:solidFill>
                             <a:srgbClr val="1F2329"/>
                           </a:solidFill>
-                          <a:latin typeface="微软雅黑" panose="020B0503020204020204" pitchFamily="34" charset="-122"/>
-                          <a:ea typeface="微软雅黑" panose="020B0503020204020204" pitchFamily="34" charset="-122"/>
-                          <a:cs typeface="微软雅黑" panose="020B0503020204020204" pitchFamily="34" charset="-120"/>
+                          <a:latin typeface="微软雅黑" pitchFamily="34" charset="0"/>
+                          <a:ea typeface="微软雅黑" pitchFamily="34" charset="-122"/>
+                          <a:cs typeface="微软雅黑" pitchFamily="34" charset="-120"/>
                         </a:rPr>
                         <a:t>可做可不做</a:t>
                       </a:r>
                       <a:endParaRPr lang="en-US" sz="1500" dirty="0">
-                        <a:latin typeface="微软雅黑" panose="020B0503020204020204" pitchFamily="34" charset="-122"/>
-                        <a:ea typeface="微软雅黑" panose="020B0503020204020204" pitchFamily="34" charset="-122"/>
-                        <a:cs typeface="微软雅黑" panose="020B0503020204020204" pitchFamily="34" charset="-122"/>
+                        <a:latin typeface="微软雅黑" charset="0"/>
+                        <a:ea typeface="微软雅黑" charset="0"/>
+                        <a:cs typeface="微软雅黑" charset="0"/>
                       </a:endParaRPr>
                     </a:p>
                   </a:txBody>
-                  <a:tcPr anchor="ctr">
+                  <a:tcPr marL="91440" marR="91440" marT="45720" marB="45720" anchor="ctr">
                     <a:lnL w="9525" cap="flat" cmpd="sng" algn="ctr">
                       <a:solidFill>
                         <a:srgbClr val="D8DBE0"/>
@@ -2415,7 +2506,7 @@
                     <a:bodyPr/>
                     <a:lstStyle/>
                     <a:p>
-                      <a:pPr marL="0" indent="0" algn="ctr">
+                      <a:pPr algn="ctr" indent="0" marL="0">
                         <a:buNone/>
                       </a:pPr>
                       <a:r>
@@ -2423,20 +2514,20 @@
                           <a:solidFill>
                             <a:srgbClr val="1F2329"/>
                           </a:solidFill>
-                          <a:latin typeface="微软雅黑" panose="020B0503020204020204" pitchFamily="34" charset="-122"/>
-                          <a:ea typeface="微软雅黑" panose="020B0503020204020204" pitchFamily="34" charset="-122"/>
-                          <a:cs typeface="微软雅黑" panose="020B0503020204020204" pitchFamily="34" charset="-120"/>
+                          <a:latin typeface="微软雅黑" pitchFamily="34" charset="0"/>
+                          <a:ea typeface="微软雅黑" pitchFamily="34" charset="-122"/>
+                          <a:cs typeface="微软雅黑" pitchFamily="34" charset="-120"/>
                         </a:rPr>
                         <a:t>29</a:t>
                       </a:r>
                       <a:endParaRPr lang="en-US" sz="1500" dirty="0">
-                        <a:latin typeface="微软雅黑" panose="020B0503020204020204" pitchFamily="34" charset="-122"/>
-                        <a:ea typeface="微软雅黑" panose="020B0503020204020204" pitchFamily="34" charset="-122"/>
-                        <a:cs typeface="微软雅黑" panose="020B0503020204020204" pitchFamily="34" charset="-122"/>
+                        <a:latin typeface="微软雅黑" charset="0"/>
+                        <a:ea typeface="微软雅黑" charset="0"/>
+                        <a:cs typeface="微软雅黑" charset="0"/>
                       </a:endParaRPr>
                     </a:p>
                   </a:txBody>
-                  <a:tcPr anchor="ctr">
+                  <a:tcPr marL="91440" marR="91440" marT="45720" marB="45720" anchor="ctr">
                     <a:lnL w="9525" cap="flat" cmpd="sng" algn="ctr">
                       <a:solidFill>
                         <a:srgbClr val="D8DBE0"/>
@@ -2483,7 +2574,7 @@
                     <a:bodyPr/>
                     <a:lstStyle/>
                     <a:p>
-                      <a:pPr marL="0" indent="0" algn="ctr">
+                      <a:pPr algn="ctr" indent="0" marL="0">
                         <a:buNone/>
                       </a:pPr>
                       <a:r>
@@ -2491,20 +2582,20 @@
                           <a:solidFill>
                             <a:srgbClr val="1F2329"/>
                           </a:solidFill>
-                          <a:latin typeface="微软雅黑" panose="020B0503020204020204" pitchFamily="34" charset="-122"/>
-                          <a:ea typeface="微软雅黑" panose="020B0503020204020204" pitchFamily="34" charset="-122"/>
-                          <a:cs typeface="微软雅黑" panose="020B0503020204020204" pitchFamily="34" charset="-120"/>
+                          <a:latin typeface="微软雅黑" pitchFamily="34" charset="0"/>
+                          <a:ea typeface="微软雅黑" pitchFamily="34" charset="-122"/>
+                          <a:cs typeface="微软雅黑" pitchFamily="34" charset="-120"/>
                         </a:rPr>
                         <a:t>63%</a:t>
                       </a:r>
                       <a:endParaRPr lang="en-US" sz="1500" dirty="0">
-                        <a:latin typeface="微软雅黑" panose="020B0503020204020204" pitchFamily="34" charset="-122"/>
-                        <a:ea typeface="微软雅黑" panose="020B0503020204020204" pitchFamily="34" charset="-122"/>
-                        <a:cs typeface="微软雅黑" panose="020B0503020204020204" pitchFamily="34" charset="-122"/>
+                        <a:latin typeface="微软雅黑" charset="0"/>
+                        <a:ea typeface="微软雅黑" charset="0"/>
+                        <a:cs typeface="微软雅黑" charset="0"/>
                       </a:endParaRPr>
                     </a:p>
                   </a:txBody>
-                  <a:tcPr anchor="ctr">
+                  <a:tcPr marL="91440" marR="91440" marT="45720" marB="45720" anchor="ctr">
                     <a:lnL w="9525" cap="flat" cmpd="sng" algn="ctr">
                       <a:solidFill>
                         <a:srgbClr val="D8DBE0"/>
@@ -2551,7 +2642,7 @@
                     <a:bodyPr/>
                     <a:lstStyle/>
                     <a:p>
-                      <a:pPr marL="0" indent="0" algn="ctr">
+                      <a:pPr algn="ctr" indent="0" marL="0">
                         <a:buNone/>
                       </a:pPr>
                       <a:r>
@@ -2559,20 +2650,20 @@
                           <a:solidFill>
                             <a:srgbClr val="1F2329"/>
                           </a:solidFill>
-                          <a:latin typeface="微软雅黑" panose="020B0503020204020204" pitchFamily="34" charset="-122"/>
-                          <a:ea typeface="微软雅黑" panose="020B0503020204020204" pitchFamily="34" charset="-122"/>
-                          <a:cs typeface="微软雅黑" panose="020B0503020204020204" pitchFamily="34" charset="-120"/>
+                          <a:latin typeface="微软雅黑" pitchFamily="34" charset="0"/>
+                          <a:ea typeface="微软雅黑" pitchFamily="34" charset="-122"/>
+                          <a:cs typeface="微软雅黑" pitchFamily="34" charset="-120"/>
                         </a:rPr>
                         <a:t>在纲内、考频低，限时巩固</a:t>
                       </a:r>
                       <a:endParaRPr lang="en-US" sz="1500" dirty="0">
-                        <a:latin typeface="微软雅黑" panose="020B0503020204020204" pitchFamily="34" charset="-122"/>
-                        <a:ea typeface="微软雅黑" panose="020B0503020204020204" pitchFamily="34" charset="-122"/>
-                        <a:cs typeface="微软雅黑" panose="020B0503020204020204" pitchFamily="34" charset="-122"/>
+                        <a:latin typeface="微软雅黑" charset="0"/>
+                        <a:ea typeface="微软雅黑" charset="0"/>
+                        <a:cs typeface="微软雅黑" charset="0"/>
                       </a:endParaRPr>
                     </a:p>
                   </a:txBody>
-                  <a:tcPr anchor="ctr">
+                  <a:tcPr marL="91440" marR="91440" marT="45720" marB="45720" anchor="ctr">
                     <a:lnL w="9525" cap="flat" cmpd="sng" algn="ctr">
                       <a:solidFill>
                         <a:srgbClr val="D8DBE0"/>
@@ -2621,7 +2712,7 @@
                     <a:bodyPr/>
                     <a:lstStyle/>
                     <a:p>
-                      <a:pPr marL="0" indent="0" algn="ctr">
+                      <a:pPr algn="ctr" indent="0" marL="0">
                         <a:buNone/>
                       </a:pPr>
                       <a:r>
@@ -2629,20 +2720,20 @@
                           <a:solidFill>
                             <a:srgbClr val="1F2329"/>
                           </a:solidFill>
-                          <a:latin typeface="微软雅黑" panose="020B0503020204020204" pitchFamily="34" charset="-122"/>
-                          <a:ea typeface="微软雅黑" panose="020B0503020204020204" pitchFamily="34" charset="-122"/>
-                          <a:cs typeface="微软雅黑" panose="020B0503020204020204" pitchFamily="34" charset="-120"/>
+                          <a:latin typeface="微软雅黑" pitchFamily="34" charset="0"/>
+                          <a:ea typeface="微软雅黑" pitchFamily="34" charset="-122"/>
+                          <a:cs typeface="微软雅黑" pitchFamily="34" charset="-120"/>
                         </a:rPr>
                         <a:t>完全不做</a:t>
                       </a:r>
                       <a:endParaRPr lang="en-US" sz="1500" dirty="0">
-                        <a:latin typeface="微软雅黑" panose="020B0503020204020204" pitchFamily="34" charset="-122"/>
-                        <a:ea typeface="微软雅黑" panose="020B0503020204020204" pitchFamily="34" charset="-122"/>
-                        <a:cs typeface="微软雅黑" panose="020B0503020204020204" pitchFamily="34" charset="-122"/>
+                        <a:latin typeface="微软雅黑" charset="0"/>
+                        <a:ea typeface="微软雅黑" charset="0"/>
+                        <a:cs typeface="微软雅黑" charset="0"/>
                       </a:endParaRPr>
                     </a:p>
                   </a:txBody>
-                  <a:tcPr anchor="ctr">
+                  <a:tcPr marL="91440" marR="91440" marT="45720" marB="45720" anchor="ctr">
                     <a:lnL w="9525" cap="flat" cmpd="sng" algn="ctr">
                       <a:solidFill>
                         <a:srgbClr val="D8DBE0"/>
@@ -2689,7 +2780,7 @@
                     <a:bodyPr/>
                     <a:lstStyle/>
                     <a:p>
-                      <a:pPr marL="0" indent="0" algn="ctr">
+                      <a:pPr algn="ctr" indent="0" marL="0">
                         <a:buNone/>
                       </a:pPr>
                       <a:r>
@@ -2697,20 +2788,20 @@
                           <a:solidFill>
                             <a:srgbClr val="1F2329"/>
                           </a:solidFill>
-                          <a:latin typeface="微软雅黑" panose="020B0503020204020204" pitchFamily="34" charset="-122"/>
-                          <a:ea typeface="微软雅黑" panose="020B0503020204020204" pitchFamily="34" charset="-122"/>
-                          <a:cs typeface="微软雅黑" panose="020B0503020204020204" pitchFamily="34" charset="-120"/>
+                          <a:latin typeface="微软雅黑" pitchFamily="34" charset="0"/>
+                          <a:ea typeface="微软雅黑" pitchFamily="34" charset="-122"/>
+                          <a:cs typeface="微软雅黑" pitchFamily="34" charset="-120"/>
                         </a:rPr>
                         <a:t>4</a:t>
                       </a:r>
                       <a:endParaRPr lang="en-US" sz="1500" dirty="0">
-                        <a:latin typeface="微软雅黑" panose="020B0503020204020204" pitchFamily="34" charset="-122"/>
-                        <a:ea typeface="微软雅黑" panose="020B0503020204020204" pitchFamily="34" charset="-122"/>
-                        <a:cs typeface="微软雅黑" panose="020B0503020204020204" pitchFamily="34" charset="-122"/>
+                        <a:latin typeface="微软雅黑" charset="0"/>
+                        <a:ea typeface="微软雅黑" charset="0"/>
+                        <a:cs typeface="微软雅黑" charset="0"/>
                       </a:endParaRPr>
                     </a:p>
                   </a:txBody>
-                  <a:tcPr anchor="ctr">
+                  <a:tcPr marL="91440" marR="91440" marT="45720" marB="45720" anchor="ctr">
                     <a:lnL w="9525" cap="flat" cmpd="sng" algn="ctr">
                       <a:solidFill>
                         <a:srgbClr val="D8DBE0"/>
@@ -2757,7 +2848,7 @@
                     <a:bodyPr/>
                     <a:lstStyle/>
                     <a:p>
-                      <a:pPr marL="0" indent="0" algn="ctr">
+                      <a:pPr algn="ctr" indent="0" marL="0">
                         <a:buNone/>
                       </a:pPr>
                       <a:r>
@@ -2765,20 +2856,20 @@
                           <a:solidFill>
                             <a:srgbClr val="1F2329"/>
                           </a:solidFill>
-                          <a:latin typeface="微软雅黑" panose="020B0503020204020204" pitchFamily="34" charset="-122"/>
-                          <a:ea typeface="微软雅黑" panose="020B0503020204020204" pitchFamily="34" charset="-122"/>
-                          <a:cs typeface="微软雅黑" panose="020B0503020204020204" pitchFamily="34" charset="-120"/>
+                          <a:latin typeface="微软雅黑" pitchFamily="34" charset="0"/>
+                          <a:ea typeface="微软雅黑" pitchFamily="34" charset="-122"/>
+                          <a:cs typeface="微软雅黑" pitchFamily="34" charset="-120"/>
                         </a:rPr>
                         <a:t>9%</a:t>
                       </a:r>
                       <a:endParaRPr lang="en-US" sz="1500" dirty="0">
-                        <a:latin typeface="微软雅黑" panose="020B0503020204020204" pitchFamily="34" charset="-122"/>
-                        <a:ea typeface="微软雅黑" panose="020B0503020204020204" pitchFamily="34" charset="-122"/>
-                        <a:cs typeface="微软雅黑" panose="020B0503020204020204" pitchFamily="34" charset="-122"/>
+                        <a:latin typeface="微软雅黑" charset="0"/>
+                        <a:ea typeface="微软雅黑" charset="0"/>
+                        <a:cs typeface="微软雅黑" charset="0"/>
                       </a:endParaRPr>
                     </a:p>
                   </a:txBody>
-                  <a:tcPr anchor="ctr">
+                  <a:tcPr marL="91440" marR="91440" marT="45720" marB="45720" anchor="ctr">
                     <a:lnL w="9525" cap="flat" cmpd="sng" algn="ctr">
                       <a:solidFill>
                         <a:srgbClr val="D8DBE0"/>
@@ -2825,7 +2916,7 @@
                     <a:bodyPr/>
                     <a:lstStyle/>
                     <a:p>
-                      <a:pPr marL="0" indent="0" algn="ctr">
+                      <a:pPr algn="ctr" indent="0" marL="0">
                         <a:buNone/>
                       </a:pPr>
                       <a:r>
@@ -2833,20 +2924,20 @@
                           <a:solidFill>
                             <a:srgbClr val="1F2329"/>
                           </a:solidFill>
-                          <a:latin typeface="微软雅黑" panose="020B0503020204020204" pitchFamily="34" charset="-122"/>
-                          <a:ea typeface="微软雅黑" panose="020B0503020204020204" pitchFamily="34" charset="-122"/>
-                          <a:cs typeface="微软雅黑" panose="020B0503020204020204" pitchFamily="34" charset="-120"/>
+                          <a:latin typeface="微软雅黑" pitchFamily="34" charset="0"/>
+                          <a:ea typeface="微软雅黑" pitchFamily="34" charset="-122"/>
+                          <a:cs typeface="微软雅黑" pitchFamily="34" charset="-120"/>
                         </a:rPr>
                         <a:t>超纲或无对应题型，直接跳过</a:t>
                       </a:r>
                       <a:endParaRPr lang="en-US" sz="1500" dirty="0">
-                        <a:latin typeface="微软雅黑" panose="020B0503020204020204" pitchFamily="34" charset="-122"/>
-                        <a:ea typeface="微软雅黑" panose="020B0503020204020204" pitchFamily="34" charset="-122"/>
-                        <a:cs typeface="微软雅黑" panose="020B0503020204020204" pitchFamily="34" charset="-122"/>
+                        <a:latin typeface="微软雅黑" charset="0"/>
+                        <a:ea typeface="微软雅黑" charset="0"/>
+                        <a:cs typeface="微软雅黑" charset="0"/>
                       </a:endParaRPr>
                     </a:p>
                   </a:txBody>
-                  <a:tcPr anchor="ctr">
+                  <a:tcPr marL="91440" marR="91440" marT="45720" marB="45720" anchor="ctr">
                     <a:lnL w="9525" cap="flat" cmpd="sng" algn="ctr">
                       <a:solidFill>
                         <a:srgbClr val="D8DBE0"/>
@@ -2908,12 +2999,13 @@
             <a:avLst/>
           </a:prstGeom>
           <a:noFill/>
+          <a:ln/>
         </p:spPr>
         <p:txBody>
           <a:bodyPr wrap="square" rtlCol="0" anchor="t"/>
           <a:lstStyle/>
           <a:p>
-            <a:pPr marL="0" indent="0" algn="l">
+            <a:pPr algn="l" indent="0" marL="0">
               <a:buNone/>
             </a:pPr>
             <a:r>
@@ -2921,9 +3013,9 @@
                 <a:solidFill>
                   <a:srgbClr val="8A9099"/>
                 </a:solidFill>
-                <a:latin typeface="微软雅黑" panose="020B0503020204020204" pitchFamily="34" charset="-122"/>
-                <a:ea typeface="微软雅黑" panose="020B0503020204020204" pitchFamily="34" charset="-122"/>
-                <a:cs typeface="微软雅黑" panose="020B0503020204020204" pitchFamily="34" charset="-120"/>
+                <a:latin typeface="微软雅黑" pitchFamily="34" charset="0"/>
+                <a:ea typeface="微软雅黑" pitchFamily="34" charset="-122"/>
+                <a:cs typeface="微软雅黑" pitchFamily="34" charset="-120"/>
               </a:rPr>
               <a:t>题号口径：选N＝本章单项选择题第N题，答N＝解答题第N题，算N＝算法设计题第N题；页码为题集PDF页（书页＝PDF页−9）。</a:t>
             </a:r>
@@ -2941,7 +3033,7 @@
 
 <file path=ppt/slides/slide3.xml><?xml version="1.0" encoding="utf-8"?>
 <p:sld xmlns:a="http://schemas.openxmlformats.org/drawingml/2006/main" xmlns:r="http://schemas.openxmlformats.org/officeDocument/2006/relationships" xmlns:p="http://schemas.openxmlformats.org/presentationml/2006/main">
-  <p:cSld>
+  <p:cSld name="Slide 3">
     <p:bg>
       <p:bgPr>
         <a:blipFill dpi="0" rotWithShape="1">
@@ -2985,12 +3077,13 @@
             <a:avLst/>
           </a:prstGeom>
           <a:noFill/>
+          <a:ln/>
         </p:spPr>
         <p:txBody>
           <a:bodyPr wrap="square" rtlCol="0" anchor="ctr"/>
           <a:lstStyle/>
           <a:p>
-            <a:pPr marL="0" indent="0" algn="r">
+            <a:pPr algn="r" indent="0" marL="0">
               <a:buNone/>
             </a:pPr>
             <a:r>
@@ -2998,9 +3091,9 @@
                 <a:solidFill>
                   <a:srgbClr val="8A9099"/>
                 </a:solidFill>
-                <a:latin typeface="微软雅黑" panose="020B0503020204020204" pitchFamily="34" charset="-122"/>
-                <a:ea typeface="微软雅黑" panose="020B0503020204020204" pitchFamily="34" charset="-122"/>
-                <a:cs typeface="微软雅黑" panose="020B0503020204020204" pitchFamily="34" charset="-120"/>
+                <a:latin typeface="微软雅黑" pitchFamily="34" charset="0"/>
+                <a:ea typeface="微软雅黑" pitchFamily="34" charset="-122"/>
+                <a:cs typeface="微软雅黑" pitchFamily="34" charset="-120"/>
               </a:rPr>
               <a:t>3 / 8</a:t>
             </a:r>
@@ -3023,12 +3116,13 @@
             <a:avLst/>
           </a:prstGeom>
           <a:noFill/>
+          <a:ln/>
         </p:spPr>
         <p:txBody>
           <a:bodyPr wrap="square" rtlCol="0" anchor="ctr"/>
           <a:lstStyle/>
           <a:p>
-            <a:pPr marL="0" indent="0" algn="l">
+            <a:pPr algn="l" indent="0" marL="0">
               <a:buNone/>
             </a:pPr>
             <a:r>
@@ -3036,9 +3130,9 @@
                 <a:solidFill>
                   <a:srgbClr val="1F4E9C"/>
                 </a:solidFill>
-                <a:latin typeface="微软雅黑" panose="020B0503020204020204" pitchFamily="34" charset="-122"/>
-                <a:ea typeface="微软雅黑" panose="020B0503020204020204" pitchFamily="34" charset="-122"/>
-                <a:cs typeface="微软雅黑" panose="020B0503020204020204" pitchFamily="34" charset="-120"/>
+                <a:latin typeface="微软雅黑" pitchFamily="34" charset="0"/>
+                <a:ea typeface="微软雅黑" pitchFamily="34" charset="-122"/>
+                <a:cs typeface="微软雅黑" pitchFamily="34" charset="-120"/>
               </a:rPr>
               <a:t>有价值必做</a:t>
             </a:r>
@@ -3061,12 +3155,13 @@
             <a:avLst/>
           </a:prstGeom>
           <a:noFill/>
+          <a:ln/>
         </p:spPr>
         <p:txBody>
           <a:bodyPr wrap="square" rtlCol="0" anchor="ctr"/>
           <a:lstStyle/>
           <a:p>
-            <a:pPr marL="0" indent="0" algn="l">
+            <a:pPr algn="l" indent="0" marL="0">
               <a:buNone/>
             </a:pPr>
             <a:r>
@@ -3074,9 +3169,9 @@
                 <a:solidFill>
                   <a:srgbClr val="1F2329"/>
                 </a:solidFill>
-                <a:latin typeface="微软雅黑" panose="020B0503020204020204" pitchFamily="34" charset="-122"/>
-                <a:ea typeface="微软雅黑" panose="020B0503020204020204" pitchFamily="34" charset="-122"/>
-                <a:cs typeface="微软雅黑" panose="020B0503020204020204" pitchFamily="34" charset="-120"/>
+                <a:latin typeface="微软雅黑" pitchFamily="34" charset="0"/>
+                <a:ea typeface="微软雅黑" pitchFamily="34" charset="-122"/>
+                <a:cs typeface="微软雅黑" pitchFamily="34" charset="-120"/>
               </a:rPr>
               <a:t>必做题（1/3）</a:t>
             </a:r>
@@ -3086,15 +3181,21 @@
       </p:sp>
       <p:graphicFrame>
         <p:nvGraphicFramePr>
-          <p:cNvPr id="5" name="Table 0"/>
+          <p:cNvPr id="4" name="Table 0"/>
           <p:cNvGraphicFramePr>
             <a:graphicFrameLocks noGrp="1"/>
           </p:cNvGraphicFramePr>
-          <p:nvPr/>
+          <p:nvPr>
+            <p:extLst>
+              <p:ext uri="{D42A27DB-BD31-4B8C-83A1-F6EECF244321}">
+                <p14:modId xmlns:p14="http://schemas.microsoft.com/office/powerpoint/2010/main" val="1579011935"/>
+              </p:ext>
+            </p:extLst>
+          </p:nvPr>
         </p:nvGraphicFramePr>
         <p:xfrm>
           <a:off x="822960" y="2395728"/>
-          <a:ext cx="10545775" cy="2523744"/>
+          <a:ext cx="10545775" cy="914400"/>
         </p:xfrm>
         <a:graphic>
           <a:graphicData uri="http://schemas.openxmlformats.org/drawingml/2006/table">
@@ -3111,7 +3212,7 @@
                     <a:bodyPr/>
                     <a:lstStyle/>
                     <a:p>
-                      <a:pPr marL="0" indent="0" algn="l">
+                      <a:pPr algn="l" indent="0" marL="0">
                         <a:buNone/>
                       </a:pPr>
                       <a:r>
@@ -3119,20 +3220,20 @@
                           <a:solidFill>
                             <a:srgbClr val="1F4E9C"/>
                           </a:solidFill>
-                          <a:latin typeface="微软雅黑" panose="020B0503020204020204" pitchFamily="34" charset="-122"/>
-                          <a:ea typeface="微软雅黑" panose="020B0503020204020204" pitchFamily="34" charset="-122"/>
-                          <a:cs typeface="微软雅黑" panose="020B0503020204020204" pitchFamily="34" charset="-120"/>
+                          <a:latin typeface="微软雅黑" pitchFamily="34" charset="0"/>
+                          <a:ea typeface="微软雅黑" pitchFamily="34" charset="-122"/>
+                          <a:cs typeface="微软雅黑" pitchFamily="34" charset="-120"/>
                         </a:rPr>
                         <a:t>题号</a:t>
                       </a:r>
                       <a:endParaRPr lang="en-US" sz="1500" dirty="0">
-                        <a:latin typeface="微软雅黑" panose="020B0503020204020204" pitchFamily="34" charset="-122"/>
-                        <a:ea typeface="微软雅黑" panose="020B0503020204020204" pitchFamily="34" charset="-122"/>
-                        <a:cs typeface="微软雅黑" panose="020B0503020204020204" pitchFamily="34" charset="-122"/>
+                        <a:latin typeface="微软雅黑" charset="0"/>
+                        <a:ea typeface="微软雅黑" charset="0"/>
+                        <a:cs typeface="微软雅黑" charset="0"/>
                       </a:endParaRPr>
                     </a:p>
                   </a:txBody>
-                  <a:tcPr anchor="ctr">
+                  <a:tcPr marL="91440" marR="91440" marT="45720" marB="45720" anchor="ctr">
                     <a:lnL w="9525" cap="flat" cmpd="sng" algn="ctr">
                       <a:solidFill>
                         <a:srgbClr val="D8DBE0"/>
@@ -3179,7 +3280,7 @@
                     <a:bodyPr/>
                     <a:lstStyle/>
                     <a:p>
-                      <a:pPr marL="0" indent="0" algn="l">
+                      <a:pPr algn="l" indent="0" marL="0">
                         <a:buNone/>
                       </a:pPr>
                       <a:r>
@@ -3187,20 +3288,20 @@
                           <a:solidFill>
                             <a:srgbClr val="1F4E9C"/>
                           </a:solidFill>
-                          <a:latin typeface="微软雅黑" panose="020B0503020204020204" pitchFamily="34" charset="-122"/>
-                          <a:ea typeface="微软雅黑" panose="020B0503020204020204" pitchFamily="34" charset="-122"/>
-                          <a:cs typeface="微软雅黑" panose="020B0503020204020204" pitchFamily="34" charset="-120"/>
+                          <a:latin typeface="微软雅黑" pitchFamily="34" charset="0"/>
+                          <a:ea typeface="微软雅黑" pitchFamily="34" charset="-122"/>
+                          <a:cs typeface="微软雅黑" pitchFamily="34" charset="-120"/>
                         </a:rPr>
                         <a:t>考点</a:t>
                       </a:r>
                       <a:endParaRPr lang="en-US" sz="1500" dirty="0">
-                        <a:latin typeface="微软雅黑" panose="020B0503020204020204" pitchFamily="34" charset="-122"/>
-                        <a:ea typeface="微软雅黑" panose="020B0503020204020204" pitchFamily="34" charset="-122"/>
-                        <a:cs typeface="微软雅黑" panose="020B0503020204020204" pitchFamily="34" charset="-122"/>
+                        <a:latin typeface="微软雅黑" charset="0"/>
+                        <a:ea typeface="微软雅黑" charset="0"/>
+                        <a:cs typeface="微软雅黑" charset="0"/>
                       </a:endParaRPr>
                     </a:p>
                   </a:txBody>
-                  <a:tcPr anchor="ctr">
+                  <a:tcPr marL="91440" marR="91440" marT="45720" marB="45720" anchor="ctr">
                     <a:lnL w="9525" cap="flat" cmpd="sng" algn="ctr">
                       <a:solidFill>
                         <a:srgbClr val="D8DBE0"/>
@@ -3247,7 +3348,7 @@
                     <a:bodyPr/>
                     <a:lstStyle/>
                     <a:p>
-                      <a:pPr marL="0" indent="0" algn="l">
+                      <a:pPr algn="l" indent="0" marL="0">
                         <a:buNone/>
                       </a:pPr>
                       <a:r>
@@ -3255,20 +3356,20 @@
                           <a:solidFill>
                             <a:srgbClr val="1F4E9C"/>
                           </a:solidFill>
-                          <a:latin typeface="微软雅黑" panose="020B0503020204020204" pitchFamily="34" charset="-122"/>
-                          <a:ea typeface="微软雅黑" panose="020B0503020204020204" pitchFamily="34" charset="-122"/>
-                          <a:cs typeface="微软雅黑" panose="020B0503020204020204" pitchFamily="34" charset="-120"/>
+                          <a:latin typeface="微软雅黑" pitchFamily="34" charset="0"/>
+                          <a:ea typeface="微软雅黑" pitchFamily="34" charset="-122"/>
+                          <a:cs typeface="微软雅黑" pitchFamily="34" charset="-120"/>
                         </a:rPr>
                         <a:t>价值</a:t>
                       </a:r>
                       <a:endParaRPr lang="en-US" sz="1500" dirty="0">
-                        <a:latin typeface="微软雅黑" panose="020B0503020204020204" pitchFamily="34" charset="-122"/>
-                        <a:ea typeface="微软雅黑" panose="020B0503020204020204" pitchFamily="34" charset="-122"/>
-                        <a:cs typeface="微软雅黑" panose="020B0503020204020204" pitchFamily="34" charset="-122"/>
+                        <a:latin typeface="微软雅黑" charset="0"/>
+                        <a:ea typeface="微软雅黑" charset="0"/>
+                        <a:cs typeface="微软雅黑" charset="0"/>
                       </a:endParaRPr>
                     </a:p>
                   </a:txBody>
-                  <a:tcPr anchor="ctr">
+                  <a:tcPr marL="91440" marR="91440" marT="45720" marB="45720" anchor="ctr">
                     <a:lnL w="9525" cap="flat" cmpd="sng" algn="ctr">
                       <a:solidFill>
                         <a:srgbClr val="D8DBE0"/>
@@ -3317,7 +3418,7 @@
                     <a:bodyPr/>
                     <a:lstStyle/>
                     <a:p>
-                      <a:pPr marL="0" indent="0" algn="l">
+                      <a:pPr algn="l" indent="0" marL="0">
                         <a:buNone/>
                       </a:pPr>
                       <a:r>
@@ -3325,20 +3426,20 @@
                           <a:solidFill>
                             <a:srgbClr val="1F2329"/>
                           </a:solidFill>
-                          <a:latin typeface="微软雅黑" panose="020B0503020204020204" pitchFamily="34" charset="-122"/>
-                          <a:ea typeface="微软雅黑" panose="020B0503020204020204" pitchFamily="34" charset="-122"/>
-                          <a:cs typeface="微软雅黑" panose="020B0503020204020204" pitchFamily="34" charset="-120"/>
+                          <a:latin typeface="微软雅黑" pitchFamily="34" charset="0"/>
+                          <a:ea typeface="微软雅黑" pitchFamily="34" charset="-122"/>
+                          <a:cs typeface="微软雅黑" pitchFamily="34" charset="-120"/>
                         </a:rPr>
                         <a:t>1选13</a:t>
                       </a:r>
                       <a:endParaRPr lang="en-US" sz="1500" dirty="0">
-                        <a:latin typeface="微软雅黑" panose="020B0503020204020204" pitchFamily="34" charset="-122"/>
-                        <a:ea typeface="微软雅黑" panose="020B0503020204020204" pitchFamily="34" charset="-122"/>
-                        <a:cs typeface="微软雅黑" panose="020B0503020204020204" pitchFamily="34" charset="-122"/>
+                        <a:latin typeface="微软雅黑" charset="0"/>
+                        <a:ea typeface="微软雅黑" charset="0"/>
+                        <a:cs typeface="微软雅黑" charset="0"/>
                       </a:endParaRPr>
                     </a:p>
                   </a:txBody>
-                  <a:tcPr anchor="ctr">
+                  <a:tcPr marL="91440" marR="91440" marT="45720" marB="45720" anchor="ctr">
                     <a:lnL w="9525" cap="flat" cmpd="sng" algn="ctr">
                       <a:solidFill>
                         <a:srgbClr val="D8DBE0"/>
@@ -3385,7 +3486,7 @@
                     <a:bodyPr/>
                     <a:lstStyle/>
                     <a:p>
-                      <a:pPr marL="0" indent="0" algn="l">
+                      <a:pPr algn="l" indent="0" marL="0">
                         <a:buNone/>
                       </a:pPr>
                       <a:r>
@@ -3393,20 +3494,20 @@
                           <a:solidFill>
                             <a:srgbClr val="1F2329"/>
                           </a:solidFill>
-                          <a:latin typeface="微软雅黑" panose="020B0503020204020204" pitchFamily="34" charset="-122"/>
-                          <a:ea typeface="微软雅黑" panose="020B0503020204020204" pitchFamily="34" charset="-122"/>
-                          <a:cs typeface="微软雅黑" panose="020B0503020204020204" pitchFamily="34" charset="-120"/>
+                          <a:latin typeface="微软雅黑" pitchFamily="34" charset="0"/>
+                          <a:ea typeface="微软雅黑" pitchFamily="34" charset="-122"/>
+                          <a:cs typeface="微软雅黑" pitchFamily="34" charset="-120"/>
                         </a:rPr>
                         <a:t>复杂度阶比较</a:t>
                       </a:r>
                       <a:endParaRPr lang="en-US" sz="1500" dirty="0">
-                        <a:latin typeface="微软雅黑" panose="020B0503020204020204" pitchFamily="34" charset="-122"/>
-                        <a:ea typeface="微软雅黑" panose="020B0503020204020204" pitchFamily="34" charset="-122"/>
-                        <a:cs typeface="微软雅黑" panose="020B0503020204020204" pitchFamily="34" charset="-122"/>
+                        <a:latin typeface="微软雅黑" charset="0"/>
+                        <a:ea typeface="微软雅黑" charset="0"/>
+                        <a:cs typeface="微软雅黑" charset="0"/>
                       </a:endParaRPr>
                     </a:p>
                   </a:txBody>
-                  <a:tcPr anchor="ctr">
+                  <a:tcPr marL="91440" marR="91440" marT="45720" marB="45720" anchor="ctr">
                     <a:lnL w="9525" cap="flat" cmpd="sng" algn="ctr">
                       <a:solidFill>
                         <a:srgbClr val="D8DBE0"/>
@@ -3453,7 +3554,7 @@
                     <a:bodyPr/>
                     <a:lstStyle/>
                     <a:p>
-                      <a:pPr marL="0" indent="0" algn="l">
+                      <a:pPr algn="l" indent="0" marL="0">
                         <a:buNone/>
                       </a:pPr>
                       <a:r>
@@ -3461,20 +3562,20 @@
                           <a:solidFill>
                             <a:srgbClr val="1F2329"/>
                           </a:solidFill>
-                          <a:latin typeface="微软雅黑" panose="020B0503020204020204" pitchFamily="34" charset="-122"/>
-                          <a:ea typeface="微软雅黑" panose="020B0503020204020204" pitchFamily="34" charset="-122"/>
-                          <a:cs typeface="微软雅黑" panose="020B0503020204020204" pitchFamily="34" charset="-120"/>
+                          <a:latin typeface="微软雅黑" pitchFamily="34" charset="0"/>
+                          <a:ea typeface="微软雅黑" pitchFamily="34" charset="-122"/>
+                          <a:cs typeface="微软雅黑" pitchFamily="34" charset="-120"/>
                         </a:rPr>
                         <a:t>常见增长率排序是笔记核心清单、复杂度分析题基本功</a:t>
                       </a:r>
                       <a:endParaRPr lang="en-US" sz="1500" dirty="0">
-                        <a:latin typeface="微软雅黑" panose="020B0503020204020204" pitchFamily="34" charset="-122"/>
-                        <a:ea typeface="微软雅黑" panose="020B0503020204020204" pitchFamily="34" charset="-122"/>
-                        <a:cs typeface="微软雅黑" panose="020B0503020204020204" pitchFamily="34" charset="-122"/>
+                        <a:latin typeface="微软雅黑" charset="0"/>
+                        <a:ea typeface="微软雅黑" charset="0"/>
+                        <a:cs typeface="微软雅黑" charset="0"/>
                       </a:endParaRPr>
                     </a:p>
                   </a:txBody>
-                  <a:tcPr anchor="ctr">
+                  <a:tcPr marL="91440" marR="91440" marT="45720" marB="45720" anchor="ctr">
                     <a:lnL w="9525" cap="flat" cmpd="sng" algn="ctr">
                       <a:solidFill>
                         <a:srgbClr val="D8DBE0"/>
@@ -3523,7 +3624,7 @@
                     <a:bodyPr/>
                     <a:lstStyle/>
                     <a:p>
-                      <a:pPr marL="0" indent="0" algn="l">
+                      <a:pPr algn="l" indent="0" marL="0">
                         <a:buNone/>
                       </a:pPr>
                       <a:r>
@@ -3531,20 +3632,20 @@
                           <a:solidFill>
                             <a:srgbClr val="1F2329"/>
                           </a:solidFill>
-                          <a:latin typeface="微软雅黑" panose="020B0503020204020204" pitchFamily="34" charset="-122"/>
-                          <a:ea typeface="微软雅黑" panose="020B0503020204020204" pitchFamily="34" charset="-122"/>
-                          <a:cs typeface="微软雅黑" panose="020B0503020204020204" pitchFamily="34" charset="-120"/>
+                          <a:latin typeface="微软雅黑" pitchFamily="34" charset="0"/>
+                          <a:ea typeface="微软雅黑" pitchFamily="34" charset="-122"/>
+                          <a:cs typeface="微软雅黑" pitchFamily="34" charset="-120"/>
                         </a:rPr>
                         <a:t>1选17</a:t>
                       </a:r>
                       <a:endParaRPr lang="en-US" sz="1500" dirty="0">
-                        <a:latin typeface="微软雅黑" panose="020B0503020204020204" pitchFamily="34" charset="-122"/>
-                        <a:ea typeface="微软雅黑" panose="020B0503020204020204" pitchFamily="34" charset="-122"/>
-                        <a:cs typeface="微软雅黑" panose="020B0503020204020204" pitchFamily="34" charset="-122"/>
+                        <a:latin typeface="微软雅黑" charset="0"/>
+                        <a:ea typeface="微软雅黑" charset="0"/>
+                        <a:cs typeface="微软雅黑" charset="0"/>
                       </a:endParaRPr>
                     </a:p>
                   </a:txBody>
-                  <a:tcPr anchor="ctr">
+                  <a:tcPr marL="91440" marR="91440" marT="45720" marB="45720" anchor="ctr">
                     <a:lnL w="9525" cap="flat" cmpd="sng" algn="ctr">
                       <a:solidFill>
                         <a:srgbClr val="D8DBE0"/>
@@ -3591,7 +3692,7 @@
                     <a:bodyPr/>
                     <a:lstStyle/>
                     <a:p>
-                      <a:pPr marL="0" indent="0" algn="l">
+                      <a:pPr algn="l" indent="0" marL="0">
                         <a:buNone/>
                       </a:pPr>
                       <a:r>
@@ -3599,20 +3700,20 @@
                           <a:solidFill>
                             <a:srgbClr val="1F2329"/>
                           </a:solidFill>
-                          <a:latin typeface="微软雅黑" panose="020B0503020204020204" pitchFamily="34" charset="-122"/>
-                          <a:ea typeface="微软雅黑" panose="020B0503020204020204" pitchFamily="34" charset="-122"/>
-                          <a:cs typeface="微软雅黑" panose="020B0503020204020204" pitchFamily="34" charset="-120"/>
+                          <a:latin typeface="微软雅黑" pitchFamily="34" charset="0"/>
+                          <a:ea typeface="微软雅黑" pitchFamily="34" charset="-122"/>
+                          <a:cs typeface="微软雅黑" pitchFamily="34" charset="-120"/>
                         </a:rPr>
                         <a:t>程序段复杂度</a:t>
                       </a:r>
                       <a:endParaRPr lang="en-US" sz="1500" dirty="0">
-                        <a:latin typeface="微软雅黑" panose="020B0503020204020204" pitchFamily="34" charset="-122"/>
-                        <a:ea typeface="微软雅黑" panose="020B0503020204020204" pitchFamily="34" charset="-122"/>
-                        <a:cs typeface="微软雅黑" panose="020B0503020204020204" pitchFamily="34" charset="-122"/>
+                        <a:latin typeface="微软雅黑" charset="0"/>
+                        <a:ea typeface="微软雅黑" charset="0"/>
+                        <a:cs typeface="微软雅黑" charset="0"/>
                       </a:endParaRPr>
                     </a:p>
                   </a:txBody>
-                  <a:tcPr anchor="ctr">
+                  <a:tcPr marL="91440" marR="91440" marT="45720" marB="45720" anchor="ctr">
                     <a:lnL w="9525" cap="flat" cmpd="sng" algn="ctr">
                       <a:solidFill>
                         <a:srgbClr val="D8DBE0"/>
@@ -3659,7 +3760,7 @@
                     <a:bodyPr/>
                     <a:lstStyle/>
                     <a:p>
-                      <a:pPr marL="0" indent="0" algn="l">
+                      <a:pPr algn="l" indent="0" marL="0">
                         <a:buNone/>
                       </a:pPr>
                       <a:r>
@@ -3667,20 +3768,20 @@
                           <a:solidFill>
                             <a:srgbClr val="1F2329"/>
                           </a:solidFill>
-                          <a:latin typeface="微软雅黑" panose="020B0503020204020204" pitchFamily="34" charset="-122"/>
-                          <a:ea typeface="微软雅黑" panose="020B0503020204020204" pitchFamily="34" charset="-122"/>
-                          <a:cs typeface="微软雅黑" panose="020B0503020204020204" pitchFamily="34" charset="-120"/>
+                          <a:latin typeface="微软雅黑" pitchFamily="34" charset="0"/>
+                          <a:ea typeface="微软雅黑" pitchFamily="34" charset="-122"/>
+                          <a:cs typeface="微软雅黑" pitchFamily="34" charset="-120"/>
                         </a:rPr>
                         <a:t>程序段求时间复杂度=程序阅读/填空直考形态</a:t>
                       </a:r>
                       <a:endParaRPr lang="en-US" sz="1500" dirty="0">
-                        <a:latin typeface="微软雅黑" panose="020B0503020204020204" pitchFamily="34" charset="-122"/>
-                        <a:ea typeface="微软雅黑" panose="020B0503020204020204" pitchFamily="34" charset="-122"/>
-                        <a:cs typeface="微软雅黑" panose="020B0503020204020204" pitchFamily="34" charset="-122"/>
+                        <a:latin typeface="微软雅黑" charset="0"/>
+                        <a:ea typeface="微软雅黑" charset="0"/>
+                        <a:cs typeface="微软雅黑" charset="0"/>
                       </a:endParaRPr>
                     </a:p>
                   </a:txBody>
-                  <a:tcPr anchor="ctr">
+                  <a:tcPr marL="91440" marR="91440" marT="45720" marB="45720" anchor="ctr">
                     <a:lnL w="9525" cap="flat" cmpd="sng" algn="ctr">
                       <a:solidFill>
                         <a:srgbClr val="D8DBE0"/>
@@ -3729,7 +3830,7 @@
                     <a:bodyPr/>
                     <a:lstStyle/>
                     <a:p>
-                      <a:pPr marL="0" indent="0" algn="l">
+                      <a:pPr algn="l" indent="0" marL="0">
                         <a:buNone/>
                       </a:pPr>
                       <a:r>
@@ -3737,20 +3838,20 @@
                           <a:solidFill>
                             <a:srgbClr val="1F2329"/>
                           </a:solidFill>
-                          <a:latin typeface="微软雅黑" panose="020B0503020204020204" pitchFamily="34" charset="-122"/>
-                          <a:ea typeface="微软雅黑" panose="020B0503020204020204" pitchFamily="34" charset="-122"/>
-                          <a:cs typeface="微软雅黑" panose="020B0503020204020204" pitchFamily="34" charset="-120"/>
+                          <a:latin typeface="微软雅黑" pitchFamily="34" charset="0"/>
+                          <a:ea typeface="微软雅黑" pitchFamily="34" charset="-122"/>
+                          <a:cs typeface="微软雅黑" pitchFamily="34" charset="-120"/>
                         </a:rPr>
                         <a:t>1选18</a:t>
                       </a:r>
                       <a:endParaRPr lang="en-US" sz="1500" dirty="0">
-                        <a:latin typeface="微软雅黑" panose="020B0503020204020204" pitchFamily="34" charset="-122"/>
-                        <a:ea typeface="微软雅黑" panose="020B0503020204020204" pitchFamily="34" charset="-122"/>
-                        <a:cs typeface="微软雅黑" panose="020B0503020204020204" pitchFamily="34" charset="-122"/>
+                        <a:latin typeface="微软雅黑" charset="0"/>
+                        <a:ea typeface="微软雅黑" charset="0"/>
+                        <a:cs typeface="微软雅黑" charset="0"/>
                       </a:endParaRPr>
                     </a:p>
                   </a:txBody>
-                  <a:tcPr anchor="ctr">
+                  <a:tcPr marL="91440" marR="91440" marT="45720" marB="45720" anchor="ctr">
                     <a:lnL w="9525" cap="flat" cmpd="sng" algn="ctr">
                       <a:solidFill>
                         <a:srgbClr val="D8DBE0"/>
@@ -3797,7 +3898,7 @@
                     <a:bodyPr/>
                     <a:lstStyle/>
                     <a:p>
-                      <a:pPr marL="0" indent="0" algn="l">
+                      <a:pPr algn="l" indent="0" marL="0">
                         <a:buNone/>
                       </a:pPr>
                       <a:r>
@@ -3805,20 +3906,20 @@
                           <a:solidFill>
                             <a:srgbClr val="1F2329"/>
                           </a:solidFill>
-                          <a:latin typeface="微软雅黑" panose="020B0503020204020204" pitchFamily="34" charset="-122"/>
-                          <a:ea typeface="微软雅黑" panose="020B0503020204020204" pitchFamily="34" charset="-122"/>
-                          <a:cs typeface="微软雅黑" panose="020B0503020204020204" pitchFamily="34" charset="-120"/>
+                          <a:latin typeface="微软雅黑" pitchFamily="34" charset="0"/>
+                          <a:ea typeface="微软雅黑" pitchFamily="34" charset="-122"/>
+                          <a:cs typeface="微软雅黑" pitchFamily="34" charset="-120"/>
                         </a:rPr>
                         <a:t>程序段复杂度</a:t>
                       </a:r>
                       <a:endParaRPr lang="en-US" sz="1500" dirty="0">
-                        <a:latin typeface="微软雅黑" panose="020B0503020204020204" pitchFamily="34" charset="-122"/>
-                        <a:ea typeface="微软雅黑" panose="020B0503020204020204" pitchFamily="34" charset="-122"/>
-                        <a:cs typeface="微软雅黑" panose="020B0503020204020204" pitchFamily="34" charset="-122"/>
+                        <a:latin typeface="微软雅黑" charset="0"/>
+                        <a:ea typeface="微软雅黑" charset="0"/>
+                        <a:cs typeface="微软雅黑" charset="0"/>
                       </a:endParaRPr>
                     </a:p>
                   </a:txBody>
-                  <a:tcPr anchor="ctr">
+                  <a:tcPr marL="91440" marR="91440" marT="45720" marB="45720" anchor="ctr">
                     <a:lnL w="9525" cap="flat" cmpd="sng" algn="ctr">
                       <a:solidFill>
                         <a:srgbClr val="D8DBE0"/>
@@ -3865,7 +3966,7 @@
                     <a:bodyPr/>
                     <a:lstStyle/>
                     <a:p>
-                      <a:pPr marL="0" indent="0" algn="l">
+                      <a:pPr algn="l" indent="0" marL="0">
                         <a:buNone/>
                       </a:pPr>
                       <a:r>
@@ -3873,20 +3974,20 @@
                           <a:solidFill>
                             <a:srgbClr val="1F2329"/>
                           </a:solidFill>
-                          <a:latin typeface="微软雅黑" panose="020B0503020204020204" pitchFamily="34" charset="-122"/>
-                          <a:ea typeface="微软雅黑" panose="020B0503020204020204" pitchFamily="34" charset="-122"/>
-                          <a:cs typeface="微软雅黑" panose="020B0503020204020204" pitchFamily="34" charset="-120"/>
+                          <a:latin typeface="微软雅黑" pitchFamily="34" charset="0"/>
+                          <a:ea typeface="微软雅黑" pitchFamily="34" charset="-122"/>
+                          <a:cs typeface="微软雅黑" pitchFamily="34" charset="-120"/>
                         </a:rPr>
                         <a:t>同上，循环形态变式</a:t>
                       </a:r>
                       <a:endParaRPr lang="en-US" sz="1500" dirty="0">
-                        <a:latin typeface="微软雅黑" panose="020B0503020204020204" pitchFamily="34" charset="-122"/>
-                        <a:ea typeface="微软雅黑" panose="020B0503020204020204" pitchFamily="34" charset="-122"/>
-                        <a:cs typeface="微软雅黑" panose="020B0503020204020204" pitchFamily="34" charset="-122"/>
+                        <a:latin typeface="微软雅黑" charset="0"/>
+                        <a:ea typeface="微软雅黑" charset="0"/>
+                        <a:cs typeface="微软雅黑" charset="0"/>
                       </a:endParaRPr>
                     </a:p>
                   </a:txBody>
-                  <a:tcPr anchor="ctr">
+                  <a:tcPr marL="91440" marR="91440" marT="45720" marB="45720" anchor="ctr">
                     <a:lnL w="9525" cap="flat" cmpd="sng" algn="ctr">
                       <a:solidFill>
                         <a:srgbClr val="D8DBE0"/>
@@ -3935,7 +4036,7 @@
                     <a:bodyPr/>
                     <a:lstStyle/>
                     <a:p>
-                      <a:pPr marL="0" indent="0" algn="l">
+                      <a:pPr algn="l" indent="0" marL="0">
                         <a:buNone/>
                       </a:pPr>
                       <a:r>
@@ -3943,20 +4044,20 @@
                           <a:solidFill>
                             <a:srgbClr val="1F2329"/>
                           </a:solidFill>
-                          <a:latin typeface="微软雅黑" panose="020B0503020204020204" pitchFamily="34" charset="-122"/>
-                          <a:ea typeface="微软雅黑" panose="020B0503020204020204" pitchFamily="34" charset="-122"/>
-                          <a:cs typeface="微软雅黑" panose="020B0503020204020204" pitchFamily="34" charset="-120"/>
+                          <a:latin typeface="微软雅黑" pitchFamily="34" charset="0"/>
+                          <a:ea typeface="微软雅黑" pitchFamily="34" charset="-122"/>
+                          <a:cs typeface="微软雅黑" pitchFamily="34" charset="-120"/>
                         </a:rPr>
                         <a:t>1选19</a:t>
                       </a:r>
                       <a:endParaRPr lang="en-US" sz="1500" dirty="0">
-                        <a:latin typeface="微软雅黑" panose="020B0503020204020204" pitchFamily="34" charset="-122"/>
-                        <a:ea typeface="微软雅黑" panose="020B0503020204020204" pitchFamily="34" charset="-122"/>
-                        <a:cs typeface="微软雅黑" panose="020B0503020204020204" pitchFamily="34" charset="-122"/>
+                        <a:latin typeface="微软雅黑" charset="0"/>
+                        <a:ea typeface="微软雅黑" charset="0"/>
+                        <a:cs typeface="微软雅黑" charset="0"/>
                       </a:endParaRPr>
                     </a:p>
                   </a:txBody>
-                  <a:tcPr anchor="ctr">
+                  <a:tcPr marL="91440" marR="91440" marT="45720" marB="45720" anchor="ctr">
                     <a:lnL w="9525" cap="flat" cmpd="sng" algn="ctr">
                       <a:solidFill>
                         <a:srgbClr val="D8DBE0"/>
@@ -4003,7 +4104,7 @@
                     <a:bodyPr/>
                     <a:lstStyle/>
                     <a:p>
-                      <a:pPr marL="0" indent="0" algn="l">
+                      <a:pPr algn="l" indent="0" marL="0">
                         <a:buNone/>
                       </a:pPr>
                       <a:r>
@@ -4011,20 +4112,20 @@
                           <a:solidFill>
                             <a:srgbClr val="1F2329"/>
                           </a:solidFill>
-                          <a:latin typeface="微软雅黑" panose="020B0503020204020204" pitchFamily="34" charset="-122"/>
-                          <a:ea typeface="微软雅黑" panose="020B0503020204020204" pitchFamily="34" charset="-122"/>
-                          <a:cs typeface="微软雅黑" panose="020B0503020204020204" pitchFamily="34" charset="-120"/>
+                          <a:latin typeface="微软雅黑" pitchFamily="34" charset="0"/>
+                          <a:ea typeface="微软雅黑" pitchFamily="34" charset="-122"/>
+                          <a:cs typeface="微软雅黑" pitchFamily="34" charset="-120"/>
                         </a:rPr>
                         <a:t>程序段复杂度</a:t>
                       </a:r>
                       <a:endParaRPr lang="en-US" sz="1500" dirty="0">
-                        <a:latin typeface="微软雅黑" panose="020B0503020204020204" pitchFamily="34" charset="-122"/>
-                        <a:ea typeface="微软雅黑" panose="020B0503020204020204" pitchFamily="34" charset="-122"/>
-                        <a:cs typeface="微软雅黑" panose="020B0503020204020204" pitchFamily="34" charset="-122"/>
+                        <a:latin typeface="微软雅黑" charset="0"/>
+                        <a:ea typeface="微软雅黑" charset="0"/>
+                        <a:cs typeface="微软雅黑" charset="0"/>
                       </a:endParaRPr>
                     </a:p>
                   </a:txBody>
-                  <a:tcPr anchor="ctr">
+                  <a:tcPr marL="91440" marR="91440" marT="45720" marB="45720" anchor="ctr">
                     <a:lnL w="9525" cap="flat" cmpd="sng" algn="ctr">
                       <a:solidFill>
                         <a:srgbClr val="D8DBE0"/>
@@ -4071,7 +4172,7 @@
                     <a:bodyPr/>
                     <a:lstStyle/>
                     <a:p>
-                      <a:pPr marL="0" indent="0" algn="l">
+                      <a:pPr algn="l" indent="0" marL="0">
                         <a:buNone/>
                       </a:pPr>
                       <a:r>
@@ -4079,20 +4180,20 @@
                           <a:solidFill>
                             <a:srgbClr val="1F2329"/>
                           </a:solidFill>
-                          <a:latin typeface="微软雅黑" panose="020B0503020204020204" pitchFamily="34" charset="-122"/>
-                          <a:ea typeface="微软雅黑" panose="020B0503020204020204" pitchFamily="34" charset="-122"/>
-                          <a:cs typeface="微软雅黑" panose="020B0503020204020204" pitchFamily="34" charset="-120"/>
+                          <a:latin typeface="微软雅黑" pitchFamily="34" charset="0"/>
+                          <a:ea typeface="微软雅黑" pitchFamily="34" charset="-122"/>
+                          <a:cs typeface="微软雅黑" pitchFamily="34" charset="-120"/>
                         </a:rPr>
                         <a:t>同上，循环形态变式</a:t>
                       </a:r>
                       <a:endParaRPr lang="en-US" sz="1500" dirty="0">
-                        <a:latin typeface="微软雅黑" panose="020B0503020204020204" pitchFamily="34" charset="-122"/>
-                        <a:ea typeface="微软雅黑" panose="020B0503020204020204" pitchFamily="34" charset="-122"/>
-                        <a:cs typeface="微软雅黑" panose="020B0503020204020204" pitchFamily="34" charset="-122"/>
+                        <a:latin typeface="微软雅黑" charset="0"/>
+                        <a:ea typeface="微软雅黑" charset="0"/>
+                        <a:cs typeface="微软雅黑" charset="0"/>
                       </a:endParaRPr>
                     </a:p>
                   </a:txBody>
-                  <a:tcPr anchor="ctr">
+                  <a:tcPr marL="91440" marR="91440" marT="45720" marB="45720" anchor="ctr">
                     <a:lnL w="9525" cap="flat" cmpd="sng" algn="ctr">
                       <a:solidFill>
                         <a:srgbClr val="D8DBE0"/>
@@ -4141,7 +4242,7 @@
                     <a:bodyPr/>
                     <a:lstStyle/>
                     <a:p>
-                      <a:pPr marL="0" indent="0" algn="l">
+                      <a:pPr algn="l" indent="0" marL="0">
                         <a:buNone/>
                       </a:pPr>
                       <a:r>
@@ -4149,20 +4250,20 @@
                           <a:solidFill>
                             <a:srgbClr val="1F2329"/>
                           </a:solidFill>
-                          <a:latin typeface="微软雅黑" panose="020B0503020204020204" pitchFamily="34" charset="-122"/>
-                          <a:ea typeface="微软雅黑" panose="020B0503020204020204" pitchFamily="34" charset="-122"/>
-                          <a:cs typeface="微软雅黑" panose="020B0503020204020204" pitchFamily="34" charset="-120"/>
+                          <a:latin typeface="微软雅黑" pitchFamily="34" charset="0"/>
+                          <a:ea typeface="微软雅黑" pitchFamily="34" charset="-122"/>
+                          <a:cs typeface="微软雅黑" pitchFamily="34" charset="-120"/>
                         </a:rPr>
                         <a:t>1选20</a:t>
                       </a:r>
                       <a:endParaRPr lang="en-US" sz="1500" dirty="0">
-                        <a:latin typeface="微软雅黑" panose="020B0503020204020204" pitchFamily="34" charset="-122"/>
-                        <a:ea typeface="微软雅黑" panose="020B0503020204020204" pitchFamily="34" charset="-122"/>
-                        <a:cs typeface="微软雅黑" panose="020B0503020204020204" pitchFamily="34" charset="-122"/>
+                        <a:latin typeface="微软雅黑" charset="0"/>
+                        <a:ea typeface="微软雅黑" charset="0"/>
+                        <a:cs typeface="微软雅黑" charset="0"/>
                       </a:endParaRPr>
                     </a:p>
                   </a:txBody>
-                  <a:tcPr anchor="ctr">
+                  <a:tcPr marL="91440" marR="91440" marT="45720" marB="45720" anchor="ctr">
                     <a:lnL w="9525" cap="flat" cmpd="sng" algn="ctr">
                       <a:solidFill>
                         <a:srgbClr val="D8DBE0"/>
@@ -4209,7 +4310,7 @@
                     <a:bodyPr/>
                     <a:lstStyle/>
                     <a:p>
-                      <a:pPr marL="0" indent="0" algn="l">
+                      <a:pPr algn="l" indent="0" marL="0">
                         <a:buNone/>
                       </a:pPr>
                       <a:r>
@@ -4217,20 +4318,20 @@
                           <a:solidFill>
                             <a:srgbClr val="1F2329"/>
                           </a:solidFill>
-                          <a:latin typeface="微软雅黑" panose="020B0503020204020204" pitchFamily="34" charset="-122"/>
-                          <a:ea typeface="微软雅黑" panose="020B0503020204020204" pitchFamily="34" charset="-122"/>
-                          <a:cs typeface="微软雅黑" panose="020B0503020204020204" pitchFamily="34" charset="-120"/>
+                          <a:latin typeface="微软雅黑" pitchFamily="34" charset="0"/>
+                          <a:ea typeface="微软雅黑" pitchFamily="34" charset="-122"/>
+                          <a:cs typeface="微软雅黑" pitchFamily="34" charset="-120"/>
                         </a:rPr>
                         <a:t>程序段复杂度</a:t>
                       </a:r>
                       <a:endParaRPr lang="en-US" sz="1500" dirty="0">
-                        <a:latin typeface="微软雅黑" panose="020B0503020204020204" pitchFamily="34" charset="-122"/>
-                        <a:ea typeface="微软雅黑" panose="020B0503020204020204" pitchFamily="34" charset="-122"/>
-                        <a:cs typeface="微软雅黑" panose="020B0503020204020204" pitchFamily="34" charset="-122"/>
+                        <a:latin typeface="微软雅黑" charset="0"/>
+                        <a:ea typeface="微软雅黑" charset="0"/>
+                        <a:cs typeface="微软雅黑" charset="0"/>
                       </a:endParaRPr>
                     </a:p>
                   </a:txBody>
-                  <a:tcPr anchor="ctr">
+                  <a:tcPr marL="91440" marR="91440" marT="45720" marB="45720" anchor="ctr">
                     <a:lnL w="9525" cap="flat" cmpd="sng" algn="ctr">
                       <a:solidFill>
                         <a:srgbClr val="D8DBE0"/>
@@ -4277,7 +4378,7 @@
                     <a:bodyPr/>
                     <a:lstStyle/>
                     <a:p>
-                      <a:pPr marL="0" indent="0" algn="l">
+                      <a:pPr algn="l" indent="0" marL="0">
                         <a:buNone/>
                       </a:pPr>
                       <a:r>
@@ -4285,20 +4386,20 @@
                           <a:solidFill>
                             <a:srgbClr val="1F2329"/>
                           </a:solidFill>
-                          <a:latin typeface="微软雅黑" panose="020B0503020204020204" pitchFamily="34" charset="-122"/>
-                          <a:ea typeface="微软雅黑" panose="020B0503020204020204" pitchFamily="34" charset="-122"/>
-                          <a:cs typeface="微软雅黑" panose="020B0503020204020204" pitchFamily="34" charset="-120"/>
+                          <a:latin typeface="微软雅黑" pitchFamily="34" charset="0"/>
+                          <a:ea typeface="微软雅黑" pitchFamily="34" charset="-122"/>
+                          <a:cs typeface="微软雅黑" pitchFamily="34" charset="-120"/>
                         </a:rPr>
                         <a:t>同上，循环形态变式</a:t>
                       </a:r>
                       <a:endParaRPr lang="en-US" sz="1500" dirty="0">
-                        <a:latin typeface="微软雅黑" panose="020B0503020204020204" pitchFamily="34" charset="-122"/>
-                        <a:ea typeface="微软雅黑" panose="020B0503020204020204" pitchFamily="34" charset="-122"/>
-                        <a:cs typeface="微软雅黑" panose="020B0503020204020204" pitchFamily="34" charset="-122"/>
+                        <a:latin typeface="微软雅黑" charset="0"/>
+                        <a:ea typeface="微软雅黑" charset="0"/>
+                        <a:cs typeface="微软雅黑" charset="0"/>
                       </a:endParaRPr>
                     </a:p>
                   </a:txBody>
-                  <a:tcPr anchor="ctr">
+                  <a:tcPr marL="91440" marR="91440" marT="45720" marB="45720" anchor="ctr">
                     <a:lnL w="9525" cap="flat" cmpd="sng" algn="ctr">
                       <a:solidFill>
                         <a:srgbClr val="D8DBE0"/>
@@ -4355,7 +4456,7 @@
 
 <file path=ppt/slides/slide4.xml><?xml version="1.0" encoding="utf-8"?>
 <p:sld xmlns:a="http://schemas.openxmlformats.org/drawingml/2006/main" xmlns:r="http://schemas.openxmlformats.org/officeDocument/2006/relationships" xmlns:p="http://schemas.openxmlformats.org/presentationml/2006/main">
-  <p:cSld>
+  <p:cSld name="Slide 4">
     <p:bg>
       <p:bgPr>
         <a:blipFill dpi="0" rotWithShape="1">
@@ -4399,12 +4500,13 @@
             <a:avLst/>
           </a:prstGeom>
           <a:noFill/>
+          <a:ln/>
         </p:spPr>
         <p:txBody>
           <a:bodyPr wrap="square" rtlCol="0" anchor="ctr"/>
           <a:lstStyle/>
           <a:p>
-            <a:pPr marL="0" indent="0" algn="r">
+            <a:pPr algn="r" indent="0" marL="0">
               <a:buNone/>
             </a:pPr>
             <a:r>
@@ -4412,9 +4514,9 @@
                 <a:solidFill>
                   <a:srgbClr val="8A9099"/>
                 </a:solidFill>
-                <a:latin typeface="微软雅黑" panose="020B0503020204020204" pitchFamily="34" charset="-122"/>
-                <a:ea typeface="微软雅黑" panose="020B0503020204020204" pitchFamily="34" charset="-122"/>
-                <a:cs typeface="微软雅黑" panose="020B0503020204020204" pitchFamily="34" charset="-120"/>
+                <a:latin typeface="微软雅黑" pitchFamily="34" charset="0"/>
+                <a:ea typeface="微软雅黑" pitchFamily="34" charset="-122"/>
+                <a:cs typeface="微软雅黑" pitchFamily="34" charset="-120"/>
               </a:rPr>
               <a:t>4 / 8</a:t>
             </a:r>
@@ -4437,12 +4539,13 @@
             <a:avLst/>
           </a:prstGeom>
           <a:noFill/>
+          <a:ln/>
         </p:spPr>
         <p:txBody>
           <a:bodyPr wrap="square" rtlCol="0" anchor="ctr"/>
           <a:lstStyle/>
           <a:p>
-            <a:pPr marL="0" indent="0" algn="l">
+            <a:pPr algn="l" indent="0" marL="0">
               <a:buNone/>
             </a:pPr>
             <a:r>
@@ -4450,9 +4553,9 @@
                 <a:solidFill>
                   <a:srgbClr val="1F4E9C"/>
                 </a:solidFill>
-                <a:latin typeface="微软雅黑" panose="020B0503020204020204" pitchFamily="34" charset="-122"/>
-                <a:ea typeface="微软雅黑" panose="020B0503020204020204" pitchFamily="34" charset="-122"/>
-                <a:cs typeface="微软雅黑" panose="020B0503020204020204" pitchFamily="34" charset="-120"/>
+                <a:latin typeface="微软雅黑" pitchFamily="34" charset="0"/>
+                <a:ea typeface="微软雅黑" pitchFamily="34" charset="-122"/>
+                <a:cs typeface="微软雅黑" pitchFamily="34" charset="-120"/>
               </a:rPr>
               <a:t>有价值必做</a:t>
             </a:r>
@@ -4475,12 +4578,13 @@
             <a:avLst/>
           </a:prstGeom>
           <a:noFill/>
+          <a:ln/>
         </p:spPr>
         <p:txBody>
           <a:bodyPr wrap="square" rtlCol="0" anchor="ctr"/>
           <a:lstStyle/>
           <a:p>
-            <a:pPr marL="0" indent="0" algn="l">
+            <a:pPr algn="l" indent="0" marL="0">
               <a:buNone/>
             </a:pPr>
             <a:r>
@@ -4488,9 +4592,9 @@
                 <a:solidFill>
                   <a:srgbClr val="1F2329"/>
                 </a:solidFill>
-                <a:latin typeface="微软雅黑" panose="020B0503020204020204" pitchFamily="34" charset="-122"/>
-                <a:ea typeface="微软雅黑" panose="020B0503020204020204" pitchFamily="34" charset="-122"/>
-                <a:cs typeface="微软雅黑" panose="020B0503020204020204" pitchFamily="34" charset="-120"/>
+                <a:latin typeface="微软雅黑" pitchFamily="34" charset="0"/>
+                <a:ea typeface="微软雅黑" pitchFamily="34" charset="-122"/>
+                <a:cs typeface="微软雅黑" pitchFamily="34" charset="-120"/>
               </a:rPr>
               <a:t>必做题（2/3）</a:t>
             </a:r>
@@ -4504,11 +4608,17 @@
           <p:cNvGraphicFramePr>
             <a:graphicFrameLocks noGrp="1"/>
           </p:cNvGraphicFramePr>
-          <p:nvPr/>
+          <p:nvPr>
+            <p:extLst>
+              <p:ext uri="{D42A27DB-BD31-4B8C-83A1-F6EECF244321}">
+                <p14:modId xmlns:p14="http://schemas.microsoft.com/office/powerpoint/2010/main" val="1579011935"/>
+              </p:ext>
+            </p:extLst>
+          </p:nvPr>
         </p:nvGraphicFramePr>
         <p:xfrm>
           <a:off x="822960" y="2395728"/>
-          <a:ext cx="10545775" cy="2523744"/>
+          <a:ext cx="10545775" cy="914400"/>
         </p:xfrm>
         <a:graphic>
           <a:graphicData uri="http://schemas.openxmlformats.org/drawingml/2006/table">
@@ -4525,7 +4635,7 @@
                     <a:bodyPr/>
                     <a:lstStyle/>
                     <a:p>
-                      <a:pPr marL="0" indent="0" algn="l">
+                      <a:pPr algn="l" indent="0" marL="0">
                         <a:buNone/>
                       </a:pPr>
                       <a:r>
@@ -4533,20 +4643,20 @@
                           <a:solidFill>
                             <a:srgbClr val="1F4E9C"/>
                           </a:solidFill>
-                          <a:latin typeface="微软雅黑" panose="020B0503020204020204" pitchFamily="34" charset="-122"/>
-                          <a:ea typeface="微软雅黑" panose="020B0503020204020204" pitchFamily="34" charset="-122"/>
-                          <a:cs typeface="微软雅黑" panose="020B0503020204020204" pitchFamily="34" charset="-120"/>
+                          <a:latin typeface="微软雅黑" pitchFamily="34" charset="0"/>
+                          <a:ea typeface="微软雅黑" pitchFamily="34" charset="-122"/>
+                          <a:cs typeface="微软雅黑" pitchFamily="34" charset="-120"/>
                         </a:rPr>
                         <a:t>题号</a:t>
                       </a:r>
                       <a:endParaRPr lang="en-US" sz="1500" dirty="0">
-                        <a:latin typeface="微软雅黑" panose="020B0503020204020204" pitchFamily="34" charset="-122"/>
-                        <a:ea typeface="微软雅黑" panose="020B0503020204020204" pitchFamily="34" charset="-122"/>
-                        <a:cs typeface="微软雅黑" panose="020B0503020204020204" pitchFamily="34" charset="-122"/>
+                        <a:latin typeface="微软雅黑" charset="0"/>
+                        <a:ea typeface="微软雅黑" charset="0"/>
+                        <a:cs typeface="微软雅黑" charset="0"/>
                       </a:endParaRPr>
                     </a:p>
                   </a:txBody>
-                  <a:tcPr anchor="ctr">
+                  <a:tcPr marL="91440" marR="91440" marT="45720" marB="45720" anchor="ctr">
                     <a:lnL w="9525" cap="flat" cmpd="sng" algn="ctr">
                       <a:solidFill>
                         <a:srgbClr val="D8DBE0"/>
@@ -4593,7 +4703,7 @@
                     <a:bodyPr/>
                     <a:lstStyle/>
                     <a:p>
-                      <a:pPr marL="0" indent="0" algn="l">
+                      <a:pPr algn="l" indent="0" marL="0">
                         <a:buNone/>
                       </a:pPr>
                       <a:r>
@@ -4601,20 +4711,20 @@
                           <a:solidFill>
                             <a:srgbClr val="1F4E9C"/>
                           </a:solidFill>
-                          <a:latin typeface="微软雅黑" panose="020B0503020204020204" pitchFamily="34" charset="-122"/>
-                          <a:ea typeface="微软雅黑" panose="020B0503020204020204" pitchFamily="34" charset="-122"/>
-                          <a:cs typeface="微软雅黑" panose="020B0503020204020204" pitchFamily="34" charset="-120"/>
+                          <a:latin typeface="微软雅黑" pitchFamily="34" charset="0"/>
+                          <a:ea typeface="微软雅黑" pitchFamily="34" charset="-122"/>
+                          <a:cs typeface="微软雅黑" pitchFamily="34" charset="-120"/>
                         </a:rPr>
                         <a:t>考点</a:t>
                       </a:r>
                       <a:endParaRPr lang="en-US" sz="1500" dirty="0">
-                        <a:latin typeface="微软雅黑" panose="020B0503020204020204" pitchFamily="34" charset="-122"/>
-                        <a:ea typeface="微软雅黑" panose="020B0503020204020204" pitchFamily="34" charset="-122"/>
-                        <a:cs typeface="微软雅黑" panose="020B0503020204020204" pitchFamily="34" charset="-122"/>
+                        <a:latin typeface="微软雅黑" charset="0"/>
+                        <a:ea typeface="微软雅黑" charset="0"/>
+                        <a:cs typeface="微软雅黑" charset="0"/>
                       </a:endParaRPr>
                     </a:p>
                   </a:txBody>
-                  <a:tcPr anchor="ctr">
+                  <a:tcPr marL="91440" marR="91440" marT="45720" marB="45720" anchor="ctr">
                     <a:lnL w="9525" cap="flat" cmpd="sng" algn="ctr">
                       <a:solidFill>
                         <a:srgbClr val="D8DBE0"/>
@@ -4661,7 +4771,7 @@
                     <a:bodyPr/>
                     <a:lstStyle/>
                     <a:p>
-                      <a:pPr marL="0" indent="0" algn="l">
+                      <a:pPr algn="l" indent="0" marL="0">
                         <a:buNone/>
                       </a:pPr>
                       <a:r>
@@ -4669,20 +4779,20 @@
                           <a:solidFill>
                             <a:srgbClr val="1F4E9C"/>
                           </a:solidFill>
-                          <a:latin typeface="微软雅黑" panose="020B0503020204020204" pitchFamily="34" charset="-122"/>
-                          <a:ea typeface="微软雅黑" panose="020B0503020204020204" pitchFamily="34" charset="-122"/>
-                          <a:cs typeface="微软雅黑" panose="020B0503020204020204" pitchFamily="34" charset="-120"/>
+                          <a:latin typeface="微软雅黑" pitchFamily="34" charset="0"/>
+                          <a:ea typeface="微软雅黑" pitchFamily="34" charset="-122"/>
+                          <a:cs typeface="微软雅黑" pitchFamily="34" charset="-120"/>
                         </a:rPr>
                         <a:t>价值</a:t>
                       </a:r>
                       <a:endParaRPr lang="en-US" sz="1500" dirty="0">
-                        <a:latin typeface="微软雅黑" panose="020B0503020204020204" pitchFamily="34" charset="-122"/>
-                        <a:ea typeface="微软雅黑" panose="020B0503020204020204" pitchFamily="34" charset="-122"/>
-                        <a:cs typeface="微软雅黑" panose="020B0503020204020204" pitchFamily="34" charset="-122"/>
+                        <a:latin typeface="微软雅黑" charset="0"/>
+                        <a:ea typeface="微软雅黑" charset="0"/>
+                        <a:cs typeface="微软雅黑" charset="0"/>
                       </a:endParaRPr>
                     </a:p>
                   </a:txBody>
-                  <a:tcPr anchor="ctr">
+                  <a:tcPr marL="91440" marR="91440" marT="45720" marB="45720" anchor="ctr">
                     <a:lnL w="9525" cap="flat" cmpd="sng" algn="ctr">
                       <a:solidFill>
                         <a:srgbClr val="D8DBE0"/>
@@ -4731,7 +4841,7 @@
                     <a:bodyPr/>
                     <a:lstStyle/>
                     <a:p>
-                      <a:pPr marL="0" indent="0" algn="l">
+                      <a:pPr algn="l" indent="0" marL="0">
                         <a:buNone/>
                       </a:pPr>
                       <a:r>
@@ -4739,20 +4849,20 @@
                           <a:solidFill>
                             <a:srgbClr val="1F2329"/>
                           </a:solidFill>
-                          <a:latin typeface="微软雅黑" panose="020B0503020204020204" pitchFamily="34" charset="-122"/>
-                          <a:ea typeface="微软雅黑" panose="020B0503020204020204" pitchFamily="34" charset="-122"/>
-                          <a:cs typeface="微软雅黑" panose="020B0503020204020204" pitchFamily="34" charset="-120"/>
+                          <a:latin typeface="微软雅黑" pitchFamily="34" charset="0"/>
+                          <a:ea typeface="微软雅黑" pitchFamily="34" charset="-122"/>
+                          <a:cs typeface="微软雅黑" pitchFamily="34" charset="-120"/>
                         </a:rPr>
                         <a:t>1选21</a:t>
                       </a:r>
                       <a:endParaRPr lang="en-US" sz="1500" dirty="0">
-                        <a:latin typeface="微软雅黑" panose="020B0503020204020204" pitchFamily="34" charset="-122"/>
-                        <a:ea typeface="微软雅黑" panose="020B0503020204020204" pitchFamily="34" charset="-122"/>
-                        <a:cs typeface="微软雅黑" panose="020B0503020204020204" pitchFamily="34" charset="-122"/>
+                        <a:latin typeface="微软雅黑" charset="0"/>
+                        <a:ea typeface="微软雅黑" charset="0"/>
+                        <a:cs typeface="微软雅黑" charset="0"/>
                       </a:endParaRPr>
                     </a:p>
                   </a:txBody>
-                  <a:tcPr anchor="ctr">
+                  <a:tcPr marL="91440" marR="91440" marT="45720" marB="45720" anchor="ctr">
                     <a:lnL w="9525" cap="flat" cmpd="sng" algn="ctr">
                       <a:solidFill>
                         <a:srgbClr val="D8DBE0"/>
@@ -4799,7 +4909,7 @@
                     <a:bodyPr/>
                     <a:lstStyle/>
                     <a:p>
-                      <a:pPr marL="0" indent="0" algn="l">
+                      <a:pPr algn="l" indent="0" marL="0">
                         <a:buNone/>
                       </a:pPr>
                       <a:r>
@@ -4807,20 +4917,20 @@
                           <a:solidFill>
                             <a:srgbClr val="1F2329"/>
                           </a:solidFill>
-                          <a:latin typeface="微软雅黑" panose="020B0503020204020204" pitchFamily="34" charset="-122"/>
-                          <a:ea typeface="微软雅黑" panose="020B0503020204020204" pitchFamily="34" charset="-122"/>
-                          <a:cs typeface="微软雅黑" panose="020B0503020204020204" pitchFamily="34" charset="-120"/>
+                          <a:latin typeface="微软雅黑" pitchFamily="34" charset="0"/>
+                          <a:ea typeface="微软雅黑" pitchFamily="34" charset="-122"/>
+                          <a:cs typeface="微软雅黑" pitchFamily="34" charset="-120"/>
                         </a:rPr>
                         <a:t>程序段复杂度</a:t>
                       </a:r>
                       <a:endParaRPr lang="en-US" sz="1500" dirty="0">
-                        <a:latin typeface="微软雅黑" panose="020B0503020204020204" pitchFamily="34" charset="-122"/>
-                        <a:ea typeface="微软雅黑" panose="020B0503020204020204" pitchFamily="34" charset="-122"/>
-                        <a:cs typeface="微软雅黑" panose="020B0503020204020204" pitchFamily="34" charset="-122"/>
+                        <a:latin typeface="微软雅黑" charset="0"/>
+                        <a:ea typeface="微软雅黑" charset="0"/>
+                        <a:cs typeface="微软雅黑" charset="0"/>
                       </a:endParaRPr>
                     </a:p>
                   </a:txBody>
-                  <a:tcPr anchor="ctr">
+                  <a:tcPr marL="91440" marR="91440" marT="45720" marB="45720" anchor="ctr">
                     <a:lnL w="9525" cap="flat" cmpd="sng" algn="ctr">
                       <a:solidFill>
                         <a:srgbClr val="D8DBE0"/>
@@ -4867,7 +4977,7 @@
                     <a:bodyPr/>
                     <a:lstStyle/>
                     <a:p>
-                      <a:pPr marL="0" indent="0" algn="l">
+                      <a:pPr algn="l" indent="0" marL="0">
                         <a:buNone/>
                       </a:pPr>
                       <a:r>
@@ -4875,20 +4985,20 @@
                           <a:solidFill>
                             <a:srgbClr val="1F2329"/>
                           </a:solidFill>
-                          <a:latin typeface="微软雅黑" panose="020B0503020204020204" pitchFamily="34" charset="-122"/>
-                          <a:ea typeface="微软雅黑" panose="020B0503020204020204" pitchFamily="34" charset="-122"/>
-                          <a:cs typeface="微软雅黑" panose="020B0503020204020204" pitchFamily="34" charset="-120"/>
+                          <a:latin typeface="微软雅黑" pitchFamily="34" charset="0"/>
+                          <a:ea typeface="微软雅黑" pitchFamily="34" charset="-122"/>
+                          <a:cs typeface="微软雅黑" pitchFamily="34" charset="-120"/>
                         </a:rPr>
                         <a:t>同上，循环形态变式</a:t>
                       </a:r>
                       <a:endParaRPr lang="en-US" sz="1500" dirty="0">
-                        <a:latin typeface="微软雅黑" panose="020B0503020204020204" pitchFamily="34" charset="-122"/>
-                        <a:ea typeface="微软雅黑" panose="020B0503020204020204" pitchFamily="34" charset="-122"/>
-                        <a:cs typeface="微软雅黑" panose="020B0503020204020204" pitchFamily="34" charset="-122"/>
+                        <a:latin typeface="微软雅黑" charset="0"/>
+                        <a:ea typeface="微软雅黑" charset="0"/>
+                        <a:cs typeface="微软雅黑" charset="0"/>
                       </a:endParaRPr>
                     </a:p>
                   </a:txBody>
-                  <a:tcPr anchor="ctr">
+                  <a:tcPr marL="91440" marR="91440" marT="45720" marB="45720" anchor="ctr">
                     <a:lnL w="9525" cap="flat" cmpd="sng" algn="ctr">
                       <a:solidFill>
                         <a:srgbClr val="D8DBE0"/>
@@ -4937,7 +5047,7 @@
                     <a:bodyPr/>
                     <a:lstStyle/>
                     <a:p>
-                      <a:pPr marL="0" indent="0" algn="l">
+                      <a:pPr algn="l" indent="0" marL="0">
                         <a:buNone/>
                       </a:pPr>
                       <a:r>
@@ -4945,20 +5055,20 @@
                           <a:solidFill>
                             <a:srgbClr val="1F2329"/>
                           </a:solidFill>
-                          <a:latin typeface="微软雅黑" panose="020B0503020204020204" pitchFamily="34" charset="-122"/>
-                          <a:ea typeface="微软雅黑" panose="020B0503020204020204" pitchFamily="34" charset="-122"/>
-                          <a:cs typeface="微软雅黑" panose="020B0503020204020204" pitchFamily="34" charset="-120"/>
+                          <a:latin typeface="微软雅黑" pitchFamily="34" charset="0"/>
+                          <a:ea typeface="微软雅黑" pitchFamily="34" charset="-122"/>
+                          <a:cs typeface="微软雅黑" pitchFamily="34" charset="-120"/>
                         </a:rPr>
                         <a:t>1选22</a:t>
                       </a:r>
                       <a:endParaRPr lang="en-US" sz="1500" dirty="0">
-                        <a:latin typeface="微软雅黑" panose="020B0503020204020204" pitchFamily="34" charset="-122"/>
-                        <a:ea typeface="微软雅黑" panose="020B0503020204020204" pitchFamily="34" charset="-122"/>
-                        <a:cs typeface="微软雅黑" panose="020B0503020204020204" pitchFamily="34" charset="-122"/>
+                        <a:latin typeface="微软雅黑" charset="0"/>
+                        <a:ea typeface="微软雅黑" charset="0"/>
+                        <a:cs typeface="微软雅黑" charset="0"/>
                       </a:endParaRPr>
                     </a:p>
                   </a:txBody>
-                  <a:tcPr anchor="ctr">
+                  <a:tcPr marL="91440" marR="91440" marT="45720" marB="45720" anchor="ctr">
                     <a:lnL w="9525" cap="flat" cmpd="sng" algn="ctr">
                       <a:solidFill>
                         <a:srgbClr val="D8DBE0"/>
@@ -5005,7 +5115,7 @@
                     <a:bodyPr/>
                     <a:lstStyle/>
                     <a:p>
-                      <a:pPr marL="0" indent="0" algn="l">
+                      <a:pPr algn="l" indent="0" marL="0">
                         <a:buNone/>
                       </a:pPr>
                       <a:r>
@@ -5013,20 +5123,20 @@
                           <a:solidFill>
                             <a:srgbClr val="1F2329"/>
                           </a:solidFill>
-                          <a:latin typeface="微软雅黑" panose="020B0503020204020204" pitchFamily="34" charset="-122"/>
-                          <a:ea typeface="微软雅黑" panose="020B0503020204020204" pitchFamily="34" charset="-122"/>
-                          <a:cs typeface="微软雅黑" panose="020B0503020204020204" pitchFamily="34" charset="-120"/>
+                          <a:latin typeface="微软雅黑" pitchFamily="34" charset="0"/>
+                          <a:ea typeface="微软雅黑" pitchFamily="34" charset="-122"/>
+                          <a:cs typeface="微软雅黑" pitchFamily="34" charset="-120"/>
                         </a:rPr>
                         <a:t>程序段复杂度</a:t>
                       </a:r>
                       <a:endParaRPr lang="en-US" sz="1500" dirty="0">
-                        <a:latin typeface="微软雅黑" panose="020B0503020204020204" pitchFamily="34" charset="-122"/>
-                        <a:ea typeface="微软雅黑" panose="020B0503020204020204" pitchFamily="34" charset="-122"/>
-                        <a:cs typeface="微软雅黑" panose="020B0503020204020204" pitchFamily="34" charset="-122"/>
+                        <a:latin typeface="微软雅黑" charset="0"/>
+                        <a:ea typeface="微软雅黑" charset="0"/>
+                        <a:cs typeface="微软雅黑" charset="0"/>
                       </a:endParaRPr>
                     </a:p>
                   </a:txBody>
-                  <a:tcPr anchor="ctr">
+                  <a:tcPr marL="91440" marR="91440" marT="45720" marB="45720" anchor="ctr">
                     <a:lnL w="9525" cap="flat" cmpd="sng" algn="ctr">
                       <a:solidFill>
                         <a:srgbClr val="D8DBE0"/>
@@ -5073,7 +5183,7 @@
                     <a:bodyPr/>
                     <a:lstStyle/>
                     <a:p>
-                      <a:pPr marL="0" indent="0" algn="l">
+                      <a:pPr algn="l" indent="0" marL="0">
                         <a:buNone/>
                       </a:pPr>
                       <a:r>
@@ -5081,20 +5191,20 @@
                           <a:solidFill>
                             <a:srgbClr val="1F2329"/>
                           </a:solidFill>
-                          <a:latin typeface="微软雅黑" panose="020B0503020204020204" pitchFamily="34" charset="-122"/>
-                          <a:ea typeface="微软雅黑" panose="020B0503020204020204" pitchFamily="34" charset="-122"/>
-                          <a:cs typeface="微软雅黑" panose="020B0503020204020204" pitchFamily="34" charset="-120"/>
+                          <a:latin typeface="微软雅黑" pitchFamily="34" charset="0"/>
+                          <a:ea typeface="微软雅黑" pitchFamily="34" charset="-122"/>
+                          <a:cs typeface="微软雅黑" pitchFamily="34" charset="-120"/>
                         </a:rPr>
                         <a:t>同上，循环形态变式</a:t>
                       </a:r>
                       <a:endParaRPr lang="en-US" sz="1500" dirty="0">
-                        <a:latin typeface="微软雅黑" panose="020B0503020204020204" pitchFamily="34" charset="-122"/>
-                        <a:ea typeface="微软雅黑" panose="020B0503020204020204" pitchFamily="34" charset="-122"/>
-                        <a:cs typeface="微软雅黑" panose="020B0503020204020204" pitchFamily="34" charset="-122"/>
+                        <a:latin typeface="微软雅黑" charset="0"/>
+                        <a:ea typeface="微软雅黑" charset="0"/>
+                        <a:cs typeface="微软雅黑" charset="0"/>
                       </a:endParaRPr>
                     </a:p>
                   </a:txBody>
-                  <a:tcPr anchor="ctr">
+                  <a:tcPr marL="91440" marR="91440" marT="45720" marB="45720" anchor="ctr">
                     <a:lnL w="9525" cap="flat" cmpd="sng" algn="ctr">
                       <a:solidFill>
                         <a:srgbClr val="D8DBE0"/>
@@ -5143,7 +5253,7 @@
                     <a:bodyPr/>
                     <a:lstStyle/>
                     <a:p>
-                      <a:pPr marL="0" indent="0" algn="l">
+                      <a:pPr algn="l" indent="0" marL="0">
                         <a:buNone/>
                       </a:pPr>
                       <a:r>
@@ -5151,20 +5261,20 @@
                           <a:solidFill>
                             <a:srgbClr val="1F2329"/>
                           </a:solidFill>
-                          <a:latin typeface="微软雅黑" panose="020B0503020204020204" pitchFamily="34" charset="-122"/>
-                          <a:ea typeface="微软雅黑" panose="020B0503020204020204" pitchFamily="34" charset="-122"/>
-                          <a:cs typeface="微软雅黑" panose="020B0503020204020204" pitchFamily="34" charset="-120"/>
+                          <a:latin typeface="微软雅黑" pitchFamily="34" charset="0"/>
+                          <a:ea typeface="微软雅黑" pitchFamily="34" charset="-122"/>
+                          <a:cs typeface="微软雅黑" pitchFamily="34" charset="-120"/>
                         </a:rPr>
                         <a:t>1选23</a:t>
                       </a:r>
                       <a:endParaRPr lang="en-US" sz="1500" dirty="0">
-                        <a:latin typeface="微软雅黑" panose="020B0503020204020204" pitchFamily="34" charset="-122"/>
-                        <a:ea typeface="微软雅黑" panose="020B0503020204020204" pitchFamily="34" charset="-122"/>
-                        <a:cs typeface="微软雅黑" panose="020B0503020204020204" pitchFamily="34" charset="-122"/>
+                        <a:latin typeface="微软雅黑" charset="0"/>
+                        <a:ea typeface="微软雅黑" charset="0"/>
+                        <a:cs typeface="微软雅黑" charset="0"/>
                       </a:endParaRPr>
                     </a:p>
                   </a:txBody>
-                  <a:tcPr anchor="ctr">
+                  <a:tcPr marL="91440" marR="91440" marT="45720" marB="45720" anchor="ctr">
                     <a:lnL w="9525" cap="flat" cmpd="sng" algn="ctr">
                       <a:solidFill>
                         <a:srgbClr val="D8DBE0"/>
@@ -5211,7 +5321,7 @@
                     <a:bodyPr/>
                     <a:lstStyle/>
                     <a:p>
-                      <a:pPr marL="0" indent="0" algn="l">
+                      <a:pPr algn="l" indent="0" marL="0">
                         <a:buNone/>
                       </a:pPr>
                       <a:r>
@@ -5219,20 +5329,20 @@
                           <a:solidFill>
                             <a:srgbClr val="1F2329"/>
                           </a:solidFill>
-                          <a:latin typeface="微软雅黑" panose="020B0503020204020204" pitchFamily="34" charset="-122"/>
-                          <a:ea typeface="微软雅黑" panose="020B0503020204020204" pitchFamily="34" charset="-122"/>
-                          <a:cs typeface="微软雅黑" panose="020B0503020204020204" pitchFamily="34" charset="-120"/>
+                          <a:latin typeface="微软雅黑" pitchFamily="34" charset="0"/>
+                          <a:ea typeface="微软雅黑" pitchFamily="34" charset="-122"/>
+                          <a:cs typeface="微软雅黑" pitchFamily="34" charset="-120"/>
                         </a:rPr>
                         <a:t>程序段复杂度</a:t>
                       </a:r>
                       <a:endParaRPr lang="en-US" sz="1500" dirty="0">
-                        <a:latin typeface="微软雅黑" panose="020B0503020204020204" pitchFamily="34" charset="-122"/>
-                        <a:ea typeface="微软雅黑" panose="020B0503020204020204" pitchFamily="34" charset="-122"/>
-                        <a:cs typeface="微软雅黑" panose="020B0503020204020204" pitchFamily="34" charset="-122"/>
+                        <a:latin typeface="微软雅黑" charset="0"/>
+                        <a:ea typeface="微软雅黑" charset="0"/>
+                        <a:cs typeface="微软雅黑" charset="0"/>
                       </a:endParaRPr>
                     </a:p>
                   </a:txBody>
-                  <a:tcPr anchor="ctr">
+                  <a:tcPr marL="91440" marR="91440" marT="45720" marB="45720" anchor="ctr">
                     <a:lnL w="9525" cap="flat" cmpd="sng" algn="ctr">
                       <a:solidFill>
                         <a:srgbClr val="D8DBE0"/>
@@ -5279,7 +5389,7 @@
                     <a:bodyPr/>
                     <a:lstStyle/>
                     <a:p>
-                      <a:pPr marL="0" indent="0" algn="l">
+                      <a:pPr algn="l" indent="0" marL="0">
                         <a:buNone/>
                       </a:pPr>
                       <a:r>
@@ -5287,20 +5397,20 @@
                           <a:solidFill>
                             <a:srgbClr val="1F2329"/>
                           </a:solidFill>
-                          <a:latin typeface="微软雅黑" panose="020B0503020204020204" pitchFamily="34" charset="-122"/>
-                          <a:ea typeface="微软雅黑" panose="020B0503020204020204" pitchFamily="34" charset="-122"/>
-                          <a:cs typeface="微软雅黑" panose="020B0503020204020204" pitchFamily="34" charset="-120"/>
+                          <a:latin typeface="微软雅黑" pitchFamily="34" charset="0"/>
+                          <a:ea typeface="微软雅黑" pitchFamily="34" charset="-122"/>
+                          <a:cs typeface="微软雅黑" pitchFamily="34" charset="-120"/>
                         </a:rPr>
                         <a:t>同上，循环形态变式</a:t>
                       </a:r>
                       <a:endParaRPr lang="en-US" sz="1500" dirty="0">
-                        <a:latin typeface="微软雅黑" panose="020B0503020204020204" pitchFamily="34" charset="-122"/>
-                        <a:ea typeface="微软雅黑" panose="020B0503020204020204" pitchFamily="34" charset="-122"/>
-                        <a:cs typeface="微软雅黑" panose="020B0503020204020204" pitchFamily="34" charset="-122"/>
+                        <a:latin typeface="微软雅黑" charset="0"/>
+                        <a:ea typeface="微软雅黑" charset="0"/>
+                        <a:cs typeface="微软雅黑" charset="0"/>
                       </a:endParaRPr>
                     </a:p>
                   </a:txBody>
-                  <a:tcPr anchor="ctr">
+                  <a:tcPr marL="91440" marR="91440" marT="45720" marB="45720" anchor="ctr">
                     <a:lnL w="9525" cap="flat" cmpd="sng" algn="ctr">
                       <a:solidFill>
                         <a:srgbClr val="D8DBE0"/>
@@ -5349,7 +5459,7 @@
                     <a:bodyPr/>
                     <a:lstStyle/>
                     <a:p>
-                      <a:pPr marL="0" indent="0" algn="l">
+                      <a:pPr algn="l" indent="0" marL="0">
                         <a:buNone/>
                       </a:pPr>
                       <a:r>
@@ -5357,20 +5467,20 @@
                           <a:solidFill>
                             <a:srgbClr val="1F2329"/>
                           </a:solidFill>
-                          <a:latin typeface="微软雅黑" panose="020B0503020204020204" pitchFamily="34" charset="-122"/>
-                          <a:ea typeface="微软雅黑" panose="020B0503020204020204" pitchFamily="34" charset="-122"/>
-                          <a:cs typeface="微软雅黑" panose="020B0503020204020204" pitchFamily="34" charset="-120"/>
+                          <a:latin typeface="微软雅黑" pitchFamily="34" charset="0"/>
+                          <a:ea typeface="微软雅黑" pitchFamily="34" charset="-122"/>
+                          <a:cs typeface="微软雅黑" pitchFamily="34" charset="-120"/>
                         </a:rPr>
                         <a:t>1答8</a:t>
                       </a:r>
                       <a:endParaRPr lang="en-US" sz="1500" dirty="0">
-                        <a:latin typeface="微软雅黑" panose="020B0503020204020204" pitchFamily="34" charset="-122"/>
-                        <a:ea typeface="微软雅黑" panose="020B0503020204020204" pitchFamily="34" charset="-122"/>
-                        <a:cs typeface="微软雅黑" panose="020B0503020204020204" pitchFamily="34" charset="-122"/>
+                        <a:latin typeface="微软雅黑" charset="0"/>
+                        <a:ea typeface="微软雅黑" charset="0"/>
+                        <a:cs typeface="微软雅黑" charset="0"/>
                       </a:endParaRPr>
                     </a:p>
                   </a:txBody>
-                  <a:tcPr anchor="ctr">
+                  <a:tcPr marL="91440" marR="91440" marT="45720" marB="45720" anchor="ctr">
                     <a:lnL w="9525" cap="flat" cmpd="sng" algn="ctr">
                       <a:solidFill>
                         <a:srgbClr val="D8DBE0"/>
@@ -5417,7 +5527,7 @@
                     <a:bodyPr/>
                     <a:lstStyle/>
                     <a:p>
-                      <a:pPr marL="0" indent="0" algn="l">
+                      <a:pPr algn="l" indent="0" marL="0">
                         <a:buNone/>
                       </a:pPr>
                       <a:r>
@@ -5425,20 +5535,20 @@
                           <a:solidFill>
                             <a:srgbClr val="1F2329"/>
                           </a:solidFill>
-                          <a:latin typeface="微软雅黑" panose="020B0503020204020204" pitchFamily="34" charset="-122"/>
-                          <a:ea typeface="微软雅黑" panose="020B0503020204020204" pitchFamily="34" charset="-122"/>
-                          <a:cs typeface="微软雅黑" panose="020B0503020204020204" pitchFamily="34" charset="-120"/>
+                          <a:latin typeface="微软雅黑" pitchFamily="34" charset="0"/>
+                          <a:ea typeface="微软雅黑" pitchFamily="34" charset="-122"/>
+                          <a:cs typeface="微软雅黑" pitchFamily="34" charset="-120"/>
                         </a:rPr>
                         <a:t>语句频度计算</a:t>
                       </a:r>
                       <a:endParaRPr lang="en-US" sz="1500" dirty="0">
-                        <a:latin typeface="微软雅黑" panose="020B0503020204020204" pitchFamily="34" charset="-122"/>
-                        <a:ea typeface="微软雅黑" panose="020B0503020204020204" pitchFamily="34" charset="-122"/>
-                        <a:cs typeface="微软雅黑" panose="020B0503020204020204" pitchFamily="34" charset="-122"/>
+                        <a:latin typeface="微软雅黑" charset="0"/>
+                        <a:ea typeface="微软雅黑" charset="0"/>
+                        <a:cs typeface="微软雅黑" charset="0"/>
                       </a:endParaRPr>
                     </a:p>
                   </a:txBody>
-                  <a:tcPr anchor="ctr">
+                  <a:tcPr marL="91440" marR="91440" marT="45720" marB="45720" anchor="ctr">
                     <a:lnL w="9525" cap="flat" cmpd="sng" algn="ctr">
                       <a:solidFill>
                         <a:srgbClr val="D8DBE0"/>
@@ -5485,7 +5595,7 @@
                     <a:bodyPr/>
                     <a:lstStyle/>
                     <a:p>
-                      <a:pPr marL="0" indent="0" algn="l">
+                      <a:pPr algn="l" indent="0" marL="0">
                         <a:buNone/>
                       </a:pPr>
                       <a:r>
@@ -5493,20 +5603,20 @@
                           <a:solidFill>
                             <a:srgbClr val="1F2329"/>
                           </a:solidFill>
-                          <a:latin typeface="微软雅黑" panose="020B0503020204020204" pitchFamily="34" charset="-122"/>
-                          <a:ea typeface="微软雅黑" panose="020B0503020204020204" pitchFamily="34" charset="-122"/>
-                          <a:cs typeface="微软雅黑" panose="020B0503020204020204" pitchFamily="34" charset="-120"/>
+                          <a:latin typeface="微软雅黑" pitchFamily="34" charset="0"/>
+                          <a:ea typeface="微软雅黑" pitchFamily="34" charset="-122"/>
+                          <a:cs typeface="微软雅黑" pitchFamily="34" charset="-120"/>
                         </a:rPr>
                         <a:t>嵌套循环频度→复杂度推导，2026阅读4「输出+复杂度「前置技能</a:t>
                       </a:r>
                       <a:endParaRPr lang="en-US" sz="1500" dirty="0">
-                        <a:latin typeface="微软雅黑" panose="020B0503020204020204" pitchFamily="34" charset="-122"/>
-                        <a:ea typeface="微软雅黑" panose="020B0503020204020204" pitchFamily="34" charset="-122"/>
-                        <a:cs typeface="微软雅黑" panose="020B0503020204020204" pitchFamily="34" charset="-122"/>
+                        <a:latin typeface="微软雅黑" charset="0"/>
+                        <a:ea typeface="微软雅黑" charset="0"/>
+                        <a:cs typeface="微软雅黑" charset="0"/>
                       </a:endParaRPr>
                     </a:p>
                   </a:txBody>
-                  <a:tcPr anchor="ctr">
+                  <a:tcPr marL="91440" marR="91440" marT="45720" marB="45720" anchor="ctr">
                     <a:lnL w="9525" cap="flat" cmpd="sng" algn="ctr">
                       <a:solidFill>
                         <a:srgbClr val="D8DBE0"/>
@@ -5555,7 +5665,7 @@
                     <a:bodyPr/>
                     <a:lstStyle/>
                     <a:p>
-                      <a:pPr marL="0" indent="0" algn="l">
+                      <a:pPr algn="l" indent="0" marL="0">
                         <a:buNone/>
                       </a:pPr>
                       <a:r>
@@ -5563,20 +5673,20 @@
                           <a:solidFill>
                             <a:srgbClr val="1F2329"/>
                           </a:solidFill>
-                          <a:latin typeface="微软雅黑" panose="020B0503020204020204" pitchFamily="34" charset="-122"/>
-                          <a:ea typeface="微软雅黑" panose="020B0503020204020204" pitchFamily="34" charset="-122"/>
-                          <a:cs typeface="微软雅黑" panose="020B0503020204020204" pitchFamily="34" charset="-120"/>
+                          <a:latin typeface="微软雅黑" pitchFamily="34" charset="0"/>
+                          <a:ea typeface="微软雅黑" pitchFamily="34" charset="-122"/>
+                          <a:cs typeface="微软雅黑" pitchFamily="34" charset="-120"/>
                         </a:rPr>
                         <a:t>1答9</a:t>
                       </a:r>
                       <a:endParaRPr lang="en-US" sz="1500" dirty="0">
-                        <a:latin typeface="微软雅黑" panose="020B0503020204020204" pitchFamily="34" charset="-122"/>
-                        <a:ea typeface="微软雅黑" panose="020B0503020204020204" pitchFamily="34" charset="-122"/>
-                        <a:cs typeface="微软雅黑" panose="020B0503020204020204" pitchFamily="34" charset="-122"/>
+                        <a:latin typeface="微软雅黑" charset="0"/>
+                        <a:ea typeface="微软雅黑" charset="0"/>
+                        <a:cs typeface="微软雅黑" charset="0"/>
                       </a:endParaRPr>
                     </a:p>
                   </a:txBody>
-                  <a:tcPr anchor="ctr">
+                  <a:tcPr marL="91440" marR="91440" marT="45720" marB="45720" anchor="ctr">
                     <a:lnL w="9525" cap="flat" cmpd="sng" algn="ctr">
                       <a:solidFill>
                         <a:srgbClr val="D8DBE0"/>
@@ -5623,7 +5733,7 @@
                     <a:bodyPr/>
                     <a:lstStyle/>
                     <a:p>
-                      <a:pPr marL="0" indent="0" algn="l">
+                      <a:pPr algn="l" indent="0" marL="0">
                         <a:buNone/>
                       </a:pPr>
                       <a:r>
@@ -5631,20 +5741,20 @@
                           <a:solidFill>
                             <a:srgbClr val="1F2329"/>
                           </a:solidFill>
-                          <a:latin typeface="微软雅黑" panose="020B0503020204020204" pitchFamily="34" charset="-122"/>
-                          <a:ea typeface="微软雅黑" panose="020B0503020204020204" pitchFamily="34" charset="-122"/>
-                          <a:cs typeface="微软雅黑" panose="020B0503020204020204" pitchFamily="34" charset="-120"/>
+                          <a:latin typeface="微软雅黑" pitchFamily="34" charset="0"/>
+                          <a:ea typeface="微软雅黑" pitchFamily="34" charset="-122"/>
+                          <a:cs typeface="微软雅黑" pitchFamily="34" charset="-120"/>
                         </a:rPr>
                         <a:t>复杂度+循环计数</a:t>
                       </a:r>
                       <a:endParaRPr lang="en-US" sz="1500" dirty="0">
-                        <a:latin typeface="微软雅黑" panose="020B0503020204020204" pitchFamily="34" charset="-122"/>
-                        <a:ea typeface="微软雅黑" panose="020B0503020204020204" pitchFamily="34" charset="-122"/>
-                        <a:cs typeface="微软雅黑" panose="020B0503020204020204" pitchFamily="34" charset="-122"/>
+                        <a:latin typeface="微软雅黑" charset="0"/>
+                        <a:ea typeface="微软雅黑" charset="0"/>
+                        <a:cs typeface="微软雅黑" charset="0"/>
                       </a:endParaRPr>
                     </a:p>
                   </a:txBody>
-                  <a:tcPr anchor="ctr">
+                  <a:tcPr marL="91440" marR="91440" marT="45720" marB="45720" anchor="ctr">
                     <a:lnL w="9525" cap="flat" cmpd="sng" algn="ctr">
                       <a:solidFill>
                         <a:srgbClr val="D8DBE0"/>
@@ -5691,7 +5801,7 @@
                     <a:bodyPr/>
                     <a:lstStyle/>
                     <a:p>
-                      <a:pPr marL="0" indent="0" algn="l">
+                      <a:pPr algn="l" indent="0" marL="0">
                         <a:buNone/>
                       </a:pPr>
                       <a:r>
@@ -5699,20 +5809,20 @@
                           <a:solidFill>
                             <a:srgbClr val="1F2329"/>
                           </a:solidFill>
-                          <a:latin typeface="微软雅黑" panose="020B0503020204020204" pitchFamily="34" charset="-122"/>
-                          <a:ea typeface="微软雅黑" panose="020B0503020204020204" pitchFamily="34" charset="-122"/>
-                          <a:cs typeface="微软雅黑" panose="020B0503020204020204" pitchFamily="34" charset="-120"/>
+                          <a:latin typeface="微软雅黑" pitchFamily="34" charset="0"/>
+                          <a:ea typeface="微软雅黑" pitchFamily="34" charset="-122"/>
+                          <a:cs typeface="微软雅黑" pitchFamily="34" charset="-120"/>
                         </a:rPr>
                         <a:t>n为2的乘幂、x*=x型循环计数：与2024程序阅读1同源</a:t>
                       </a:r>
                       <a:endParaRPr lang="en-US" sz="1500" dirty="0">
-                        <a:latin typeface="微软雅黑" panose="020B0503020204020204" pitchFamily="34" charset="-122"/>
-                        <a:ea typeface="微软雅黑" panose="020B0503020204020204" pitchFamily="34" charset="-122"/>
-                        <a:cs typeface="微软雅黑" panose="020B0503020204020204" pitchFamily="34" charset="-122"/>
+                        <a:latin typeface="微软雅黑" charset="0"/>
+                        <a:ea typeface="微软雅黑" charset="0"/>
+                        <a:cs typeface="微软雅黑" charset="0"/>
                       </a:endParaRPr>
                     </a:p>
                   </a:txBody>
-                  <a:tcPr anchor="ctr">
+                  <a:tcPr marL="91440" marR="91440" marT="45720" marB="45720" anchor="ctr">
                     <a:lnL w="9525" cap="flat" cmpd="sng" algn="ctr">
                       <a:solidFill>
                         <a:srgbClr val="D8DBE0"/>
@@ -5769,7 +5879,7 @@
 
 <file path=ppt/slides/slide5.xml><?xml version="1.0" encoding="utf-8"?>
 <p:sld xmlns:a="http://schemas.openxmlformats.org/drawingml/2006/main" xmlns:r="http://schemas.openxmlformats.org/officeDocument/2006/relationships" xmlns:p="http://schemas.openxmlformats.org/presentationml/2006/main">
-  <p:cSld>
+  <p:cSld name="Slide 5">
     <p:bg>
       <p:bgPr>
         <a:blipFill dpi="0" rotWithShape="1">
@@ -5813,12 +5923,13 @@
             <a:avLst/>
           </a:prstGeom>
           <a:noFill/>
+          <a:ln/>
         </p:spPr>
         <p:txBody>
           <a:bodyPr wrap="square" rtlCol="0" anchor="ctr"/>
           <a:lstStyle/>
           <a:p>
-            <a:pPr marL="0" indent="0" algn="r">
+            <a:pPr algn="r" indent="0" marL="0">
               <a:buNone/>
             </a:pPr>
             <a:r>
@@ -5826,9 +5937,9 @@
                 <a:solidFill>
                   <a:srgbClr val="8A9099"/>
                 </a:solidFill>
-                <a:latin typeface="微软雅黑" panose="020B0503020204020204" pitchFamily="34" charset="-122"/>
-                <a:ea typeface="微软雅黑" panose="020B0503020204020204" pitchFamily="34" charset="-122"/>
-                <a:cs typeface="微软雅黑" panose="020B0503020204020204" pitchFamily="34" charset="-120"/>
+                <a:latin typeface="微软雅黑" pitchFamily="34" charset="0"/>
+                <a:ea typeface="微软雅黑" pitchFamily="34" charset="-122"/>
+                <a:cs typeface="微软雅黑" pitchFamily="34" charset="-120"/>
               </a:rPr>
               <a:t>5 / 8</a:t>
             </a:r>
@@ -5851,12 +5962,13 @@
             <a:avLst/>
           </a:prstGeom>
           <a:noFill/>
+          <a:ln/>
         </p:spPr>
         <p:txBody>
           <a:bodyPr wrap="square" rtlCol="0" anchor="ctr"/>
           <a:lstStyle/>
           <a:p>
-            <a:pPr marL="0" indent="0" algn="l">
+            <a:pPr algn="l" indent="0" marL="0">
               <a:buNone/>
             </a:pPr>
             <a:r>
@@ -5864,9 +5976,9 @@
                 <a:solidFill>
                   <a:srgbClr val="1F4E9C"/>
                 </a:solidFill>
-                <a:latin typeface="微软雅黑" panose="020B0503020204020204" pitchFamily="34" charset="-122"/>
-                <a:ea typeface="微软雅黑" panose="020B0503020204020204" pitchFamily="34" charset="-122"/>
-                <a:cs typeface="微软雅黑" panose="020B0503020204020204" pitchFamily="34" charset="-120"/>
+                <a:latin typeface="微软雅黑" pitchFamily="34" charset="0"/>
+                <a:ea typeface="微软雅黑" pitchFamily="34" charset="-122"/>
+                <a:cs typeface="微软雅黑" pitchFamily="34" charset="-120"/>
               </a:rPr>
               <a:t>有价值必做</a:t>
             </a:r>
@@ -5889,12 +6001,13 @@
             <a:avLst/>
           </a:prstGeom>
           <a:noFill/>
+          <a:ln/>
         </p:spPr>
         <p:txBody>
           <a:bodyPr wrap="square" rtlCol="0" anchor="ctr"/>
           <a:lstStyle/>
           <a:p>
-            <a:pPr marL="0" indent="0" algn="l">
+            <a:pPr algn="l" indent="0" marL="0">
               <a:buNone/>
             </a:pPr>
             <a:r>
@@ -5902,9 +6015,9 @@
                 <a:solidFill>
                   <a:srgbClr val="1F2329"/>
                 </a:solidFill>
-                <a:latin typeface="微软雅黑" panose="020B0503020204020204" pitchFamily="34" charset="-122"/>
-                <a:ea typeface="微软雅黑" panose="020B0503020204020204" pitchFamily="34" charset="-122"/>
-                <a:cs typeface="微软雅黑" panose="020B0503020204020204" pitchFamily="34" charset="-120"/>
+                <a:latin typeface="微软雅黑" pitchFamily="34" charset="0"/>
+                <a:ea typeface="微软雅黑" pitchFamily="34" charset="-122"/>
+                <a:cs typeface="微软雅黑" pitchFamily="34" charset="-120"/>
               </a:rPr>
               <a:t>必做题（3/3）</a:t>
             </a:r>
@@ -5918,11 +6031,17 @@
           <p:cNvGraphicFramePr>
             <a:graphicFrameLocks noGrp="1"/>
           </p:cNvGraphicFramePr>
-          <p:nvPr/>
+          <p:nvPr>
+            <p:extLst>
+              <p:ext uri="{D42A27DB-BD31-4B8C-83A1-F6EECF244321}">
+                <p14:modId xmlns:p14="http://schemas.microsoft.com/office/powerpoint/2010/main" val="1579011935"/>
+              </p:ext>
+            </p:extLst>
+          </p:nvPr>
         </p:nvGraphicFramePr>
         <p:xfrm>
           <a:off x="822960" y="2395728"/>
-          <a:ext cx="10545775" cy="1682496"/>
+          <a:ext cx="10545775" cy="914400"/>
         </p:xfrm>
         <a:graphic>
           <a:graphicData uri="http://schemas.openxmlformats.org/drawingml/2006/table">
@@ -5939,7 +6058,7 @@
                     <a:bodyPr/>
                     <a:lstStyle/>
                     <a:p>
-                      <a:pPr marL="0" indent="0" algn="l">
+                      <a:pPr algn="l" indent="0" marL="0">
                         <a:buNone/>
                       </a:pPr>
                       <a:r>
@@ -5947,20 +6066,20 @@
                           <a:solidFill>
                             <a:srgbClr val="1F4E9C"/>
                           </a:solidFill>
-                          <a:latin typeface="微软雅黑" panose="020B0503020204020204" pitchFamily="34" charset="-122"/>
-                          <a:ea typeface="微软雅黑" panose="020B0503020204020204" pitchFamily="34" charset="-122"/>
-                          <a:cs typeface="微软雅黑" panose="020B0503020204020204" pitchFamily="34" charset="-120"/>
+                          <a:latin typeface="微软雅黑" pitchFamily="34" charset="0"/>
+                          <a:ea typeface="微软雅黑" pitchFamily="34" charset="-122"/>
+                          <a:cs typeface="微软雅黑" pitchFamily="34" charset="-120"/>
                         </a:rPr>
                         <a:t>题号</a:t>
                       </a:r>
                       <a:endParaRPr lang="en-US" sz="1500" dirty="0">
-                        <a:latin typeface="微软雅黑" panose="020B0503020204020204" pitchFamily="34" charset="-122"/>
-                        <a:ea typeface="微软雅黑" panose="020B0503020204020204" pitchFamily="34" charset="-122"/>
-                        <a:cs typeface="微软雅黑" panose="020B0503020204020204" pitchFamily="34" charset="-122"/>
+                        <a:latin typeface="微软雅黑" charset="0"/>
+                        <a:ea typeface="微软雅黑" charset="0"/>
+                        <a:cs typeface="微软雅黑" charset="0"/>
                       </a:endParaRPr>
                     </a:p>
                   </a:txBody>
-                  <a:tcPr anchor="ctr">
+                  <a:tcPr marL="91440" marR="91440" marT="45720" marB="45720" anchor="ctr">
                     <a:lnL w="9525" cap="flat" cmpd="sng" algn="ctr">
                       <a:solidFill>
                         <a:srgbClr val="D8DBE0"/>
@@ -6007,7 +6126,7 @@
                     <a:bodyPr/>
                     <a:lstStyle/>
                     <a:p>
-                      <a:pPr marL="0" indent="0" algn="l">
+                      <a:pPr algn="l" indent="0" marL="0">
                         <a:buNone/>
                       </a:pPr>
                       <a:r>
@@ -6015,20 +6134,20 @@
                           <a:solidFill>
                             <a:srgbClr val="1F4E9C"/>
                           </a:solidFill>
-                          <a:latin typeface="微软雅黑" panose="020B0503020204020204" pitchFamily="34" charset="-122"/>
-                          <a:ea typeface="微软雅黑" panose="020B0503020204020204" pitchFamily="34" charset="-122"/>
-                          <a:cs typeface="微软雅黑" panose="020B0503020204020204" pitchFamily="34" charset="-120"/>
+                          <a:latin typeface="微软雅黑" pitchFamily="34" charset="0"/>
+                          <a:ea typeface="微软雅黑" pitchFamily="34" charset="-122"/>
+                          <a:cs typeface="微软雅黑" pitchFamily="34" charset="-120"/>
                         </a:rPr>
                         <a:t>考点</a:t>
                       </a:r>
                       <a:endParaRPr lang="en-US" sz="1500" dirty="0">
-                        <a:latin typeface="微软雅黑" panose="020B0503020204020204" pitchFamily="34" charset="-122"/>
-                        <a:ea typeface="微软雅黑" panose="020B0503020204020204" pitchFamily="34" charset="-122"/>
-                        <a:cs typeface="微软雅黑" panose="020B0503020204020204" pitchFamily="34" charset="-122"/>
+                        <a:latin typeface="微软雅黑" charset="0"/>
+                        <a:ea typeface="微软雅黑" charset="0"/>
+                        <a:cs typeface="微软雅黑" charset="0"/>
                       </a:endParaRPr>
                     </a:p>
                   </a:txBody>
-                  <a:tcPr anchor="ctr">
+                  <a:tcPr marL="91440" marR="91440" marT="45720" marB="45720" anchor="ctr">
                     <a:lnL w="9525" cap="flat" cmpd="sng" algn="ctr">
                       <a:solidFill>
                         <a:srgbClr val="D8DBE0"/>
@@ -6075,7 +6194,7 @@
                     <a:bodyPr/>
                     <a:lstStyle/>
                     <a:p>
-                      <a:pPr marL="0" indent="0" algn="l">
+                      <a:pPr algn="l" indent="0" marL="0">
                         <a:buNone/>
                       </a:pPr>
                       <a:r>
@@ -6083,20 +6202,20 @@
                           <a:solidFill>
                             <a:srgbClr val="1F4E9C"/>
                           </a:solidFill>
-                          <a:latin typeface="微软雅黑" panose="020B0503020204020204" pitchFamily="34" charset="-122"/>
-                          <a:ea typeface="微软雅黑" panose="020B0503020204020204" pitchFamily="34" charset="-122"/>
-                          <a:cs typeface="微软雅黑" panose="020B0503020204020204" pitchFamily="34" charset="-120"/>
+                          <a:latin typeface="微软雅黑" pitchFamily="34" charset="0"/>
+                          <a:ea typeface="微软雅黑" pitchFamily="34" charset="-122"/>
+                          <a:cs typeface="微软雅黑" pitchFamily="34" charset="-120"/>
                         </a:rPr>
                         <a:t>价值</a:t>
                       </a:r>
                       <a:endParaRPr lang="en-US" sz="1500" dirty="0">
-                        <a:latin typeface="微软雅黑" panose="020B0503020204020204" pitchFamily="34" charset="-122"/>
-                        <a:ea typeface="微软雅黑" panose="020B0503020204020204" pitchFamily="34" charset="-122"/>
-                        <a:cs typeface="微软雅黑" panose="020B0503020204020204" pitchFamily="34" charset="-122"/>
+                        <a:latin typeface="微软雅黑" charset="0"/>
+                        <a:ea typeface="微软雅黑" charset="0"/>
+                        <a:cs typeface="微软雅黑" charset="0"/>
                       </a:endParaRPr>
                     </a:p>
                   </a:txBody>
-                  <a:tcPr anchor="ctr">
+                  <a:tcPr marL="91440" marR="91440" marT="45720" marB="45720" anchor="ctr">
                     <a:lnL w="9525" cap="flat" cmpd="sng" algn="ctr">
                       <a:solidFill>
                         <a:srgbClr val="D8DBE0"/>
@@ -6145,7 +6264,7 @@
                     <a:bodyPr/>
                     <a:lstStyle/>
                     <a:p>
-                      <a:pPr marL="0" indent="0" algn="l">
+                      <a:pPr algn="l" indent="0" marL="0">
                         <a:buNone/>
                       </a:pPr>
                       <a:r>
@@ -6153,20 +6272,20 @@
                           <a:solidFill>
                             <a:srgbClr val="1F2329"/>
                           </a:solidFill>
-                          <a:latin typeface="微软雅黑" panose="020B0503020204020204" pitchFamily="34" charset="-122"/>
-                          <a:ea typeface="微软雅黑" panose="020B0503020204020204" pitchFamily="34" charset="-122"/>
-                          <a:cs typeface="微软雅黑" panose="020B0503020204020204" pitchFamily="34" charset="-120"/>
+                          <a:latin typeface="微软雅黑" pitchFamily="34" charset="0"/>
+                          <a:ea typeface="微软雅黑" pitchFamily="34" charset="-122"/>
+                          <a:cs typeface="微软雅黑" pitchFamily="34" charset="-120"/>
                         </a:rPr>
                         <a:t>1答10</a:t>
                       </a:r>
                       <a:endParaRPr lang="en-US" sz="1500" dirty="0">
-                        <a:latin typeface="微软雅黑" panose="020B0503020204020204" pitchFamily="34" charset="-122"/>
-                        <a:ea typeface="微软雅黑" panose="020B0503020204020204" pitchFamily="34" charset="-122"/>
-                        <a:cs typeface="微软雅黑" panose="020B0503020204020204" pitchFamily="34" charset="-122"/>
+                        <a:latin typeface="微软雅黑" charset="0"/>
+                        <a:ea typeface="微软雅黑" charset="0"/>
+                        <a:cs typeface="微软雅黑" charset="0"/>
                       </a:endParaRPr>
                     </a:p>
                   </a:txBody>
-                  <a:tcPr anchor="ctr">
+                  <a:tcPr marL="91440" marR="91440" marT="45720" marB="45720" anchor="ctr">
                     <a:lnL w="9525" cap="flat" cmpd="sng" algn="ctr">
                       <a:solidFill>
                         <a:srgbClr val="D8DBE0"/>
@@ -6213,7 +6332,7 @@
                     <a:bodyPr/>
                     <a:lstStyle/>
                     <a:p>
-                      <a:pPr marL="0" indent="0" algn="l">
+                      <a:pPr algn="l" indent="0" marL="0">
                         <a:buNone/>
                       </a:pPr>
                       <a:r>
@@ -6221,20 +6340,20 @@
                           <a:solidFill>
                             <a:srgbClr val="1F2329"/>
                           </a:solidFill>
-                          <a:latin typeface="微软雅黑" panose="020B0503020204020204" pitchFamily="34" charset="-122"/>
-                          <a:ea typeface="微软雅黑" panose="020B0503020204020204" pitchFamily="34" charset="-122"/>
-                          <a:cs typeface="微软雅黑" panose="020B0503020204020204" pitchFamily="34" charset="-120"/>
+                          <a:latin typeface="微软雅黑" pitchFamily="34" charset="0"/>
+                          <a:ea typeface="微软雅黑" pitchFamily="34" charset="-122"/>
+                          <a:cs typeface="微软雅黑" pitchFamily="34" charset="-120"/>
                         </a:rPr>
                         <a:t>函数复杂度</a:t>
                       </a:r>
                       <a:endParaRPr lang="en-US" sz="1500" dirty="0">
-                        <a:latin typeface="微软雅黑" panose="020B0503020204020204" pitchFamily="34" charset="-122"/>
-                        <a:ea typeface="微软雅黑" panose="020B0503020204020204" pitchFamily="34" charset="-122"/>
-                        <a:cs typeface="微软雅黑" panose="020B0503020204020204" pitchFamily="34" charset="-122"/>
+                        <a:latin typeface="微软雅黑" charset="0"/>
+                        <a:ea typeface="微软雅黑" charset="0"/>
+                        <a:cs typeface="微软雅黑" charset="0"/>
                       </a:endParaRPr>
                     </a:p>
                   </a:txBody>
-                  <a:tcPr anchor="ctr">
+                  <a:tcPr marL="91440" marR="91440" marT="45720" marB="45720" anchor="ctr">
                     <a:lnL w="9525" cap="flat" cmpd="sng" algn="ctr">
                       <a:solidFill>
                         <a:srgbClr val="D8DBE0"/>
@@ -6281,7 +6400,7 @@
                     <a:bodyPr/>
                     <a:lstStyle/>
                     <a:p>
-                      <a:pPr marL="0" indent="0" algn="l">
+                      <a:pPr algn="l" indent="0" marL="0">
                         <a:buNone/>
                       </a:pPr>
                       <a:r>
@@ -6289,20 +6408,20 @@
                           <a:solidFill>
                             <a:srgbClr val="1F2329"/>
                           </a:solidFill>
-                          <a:latin typeface="微软雅黑" panose="020B0503020204020204" pitchFamily="34" charset="-122"/>
-                          <a:ea typeface="微软雅黑" panose="020B0503020204020204" pitchFamily="34" charset="-122"/>
-                          <a:cs typeface="微软雅黑" panose="020B0503020204020204" pitchFamily="34" charset="-120"/>
+                          <a:latin typeface="微软雅黑" pitchFamily="34" charset="0"/>
+                          <a:ea typeface="微软雅黑" pitchFamily="34" charset="-122"/>
+                          <a:cs typeface="微软雅黑" pitchFamily="34" charset="-120"/>
                         </a:rPr>
                         <a:t>10个小问覆盖多种循环形态的复杂度辨认</a:t>
                       </a:r>
                       <a:endParaRPr lang="en-US" sz="1500" dirty="0">
-                        <a:latin typeface="微软雅黑" panose="020B0503020204020204" pitchFamily="34" charset="-122"/>
-                        <a:ea typeface="微软雅黑" panose="020B0503020204020204" pitchFamily="34" charset="-122"/>
-                        <a:cs typeface="微软雅黑" panose="020B0503020204020204" pitchFamily="34" charset="-122"/>
+                        <a:latin typeface="微软雅黑" charset="0"/>
+                        <a:ea typeface="微软雅黑" charset="0"/>
+                        <a:cs typeface="微软雅黑" charset="0"/>
                       </a:endParaRPr>
                     </a:p>
                   </a:txBody>
-                  <a:tcPr anchor="ctr">
+                  <a:tcPr marL="91440" marR="91440" marT="45720" marB="45720" anchor="ctr">
                     <a:lnL w="9525" cap="flat" cmpd="sng" algn="ctr">
                       <a:solidFill>
                         <a:srgbClr val="D8DBE0"/>
@@ -6351,7 +6470,7 @@
                     <a:bodyPr/>
                     <a:lstStyle/>
                     <a:p>
-                      <a:pPr marL="0" indent="0" algn="l">
+                      <a:pPr algn="l" indent="0" marL="0">
                         <a:buNone/>
                       </a:pPr>
                       <a:r>
@@ -6359,20 +6478,20 @@
                           <a:solidFill>
                             <a:srgbClr val="1F2329"/>
                           </a:solidFill>
-                          <a:latin typeface="微软雅黑" panose="020B0503020204020204" pitchFamily="34" charset="-122"/>
-                          <a:ea typeface="微软雅黑" panose="020B0503020204020204" pitchFamily="34" charset="-122"/>
-                          <a:cs typeface="微软雅黑" panose="020B0503020204020204" pitchFamily="34" charset="-120"/>
+                          <a:latin typeface="微软雅黑" pitchFamily="34" charset="0"/>
+                          <a:ea typeface="微软雅黑" pitchFamily="34" charset="-122"/>
+                          <a:cs typeface="微软雅黑" pitchFamily="34" charset="-120"/>
                         </a:rPr>
                         <a:t>1答11</a:t>
                       </a:r>
                       <a:endParaRPr lang="en-US" sz="1500" dirty="0">
-                        <a:latin typeface="微软雅黑" panose="020B0503020204020204" pitchFamily="34" charset="-122"/>
-                        <a:ea typeface="微软雅黑" panose="020B0503020204020204" pitchFamily="34" charset="-122"/>
-                        <a:cs typeface="微软雅黑" panose="020B0503020204020204" pitchFamily="34" charset="-122"/>
+                        <a:latin typeface="微软雅黑" charset="0"/>
+                        <a:ea typeface="微软雅黑" charset="0"/>
+                        <a:cs typeface="微软雅黑" charset="0"/>
                       </a:endParaRPr>
                     </a:p>
                   </a:txBody>
-                  <a:tcPr anchor="ctr">
+                  <a:tcPr marL="91440" marR="91440" marT="45720" marB="45720" anchor="ctr">
                     <a:lnL w="9525" cap="flat" cmpd="sng" algn="ctr">
                       <a:solidFill>
                         <a:srgbClr val="D8DBE0"/>
@@ -6419,7 +6538,7 @@
                     <a:bodyPr/>
                     <a:lstStyle/>
                     <a:p>
-                      <a:pPr marL="0" indent="0" algn="l">
+                      <a:pPr algn="l" indent="0" marL="0">
                         <a:buNone/>
                       </a:pPr>
                       <a:r>
@@ -6427,20 +6546,20 @@
                           <a:solidFill>
                             <a:srgbClr val="1F2329"/>
                           </a:solidFill>
-                          <a:latin typeface="微软雅黑" panose="020B0503020204020204" pitchFamily="34" charset="-122"/>
-                          <a:ea typeface="微软雅黑" panose="020B0503020204020204" pitchFamily="34" charset="-122"/>
-                          <a:cs typeface="微软雅黑" panose="020B0503020204020204" pitchFamily="34" charset="-120"/>
+                          <a:latin typeface="微软雅黑" pitchFamily="34" charset="0"/>
+                          <a:ea typeface="微软雅黑" pitchFamily="34" charset="-122"/>
+                          <a:cs typeface="微软雅黑" pitchFamily="34" charset="-120"/>
                         </a:rPr>
                         <a:t>递归复杂度</a:t>
                       </a:r>
                       <a:endParaRPr lang="en-US" sz="1500" dirty="0">
-                        <a:latin typeface="微软雅黑" panose="020B0503020204020204" pitchFamily="34" charset="-122"/>
-                        <a:ea typeface="微软雅黑" panose="020B0503020204020204" pitchFamily="34" charset="-122"/>
-                        <a:cs typeface="微软雅黑" panose="020B0503020204020204" pitchFamily="34" charset="-122"/>
+                        <a:latin typeface="微软雅黑" charset="0"/>
+                        <a:ea typeface="微软雅黑" charset="0"/>
+                        <a:cs typeface="微软雅黑" charset="0"/>
                       </a:endParaRPr>
                     </a:p>
                   </a:txBody>
-                  <a:tcPr anchor="ctr">
+                  <a:tcPr marL="91440" marR="91440" marT="45720" marB="45720" anchor="ctr">
                     <a:lnL w="9525" cap="flat" cmpd="sng" algn="ctr">
                       <a:solidFill>
                         <a:srgbClr val="D8DBE0"/>
@@ -6487,7 +6606,7 @@
                     <a:bodyPr/>
                     <a:lstStyle/>
                     <a:p>
-                      <a:pPr marL="0" indent="0" algn="l">
+                      <a:pPr algn="l" indent="0" marL="0">
                         <a:buNone/>
                       </a:pPr>
                       <a:r>
@@ -6495,20 +6614,20 @@
                           <a:solidFill>
                             <a:srgbClr val="1F2329"/>
                           </a:solidFill>
-                          <a:latin typeface="微软雅黑" panose="020B0503020204020204" pitchFamily="34" charset="-122"/>
-                          <a:ea typeface="微软雅黑" panose="020B0503020204020204" pitchFamily="34" charset="-122"/>
-                          <a:cs typeface="微软雅黑" panose="020B0503020204020204" pitchFamily="34" charset="-120"/>
+                          <a:latin typeface="微软雅黑" pitchFamily="34" charset="0"/>
+                          <a:ea typeface="微软雅黑" pitchFamily="34" charset="-122"/>
+                          <a:cs typeface="微软雅黑" pitchFamily="34" charset="-120"/>
                         </a:rPr>
                         <a:t>递归复杂度是2025阅读1（汉诺塔）、2026阅读4</a:t>
                       </a:r>
                       <a:endParaRPr lang="en-US" sz="1500" dirty="0">
-                        <a:latin typeface="微软雅黑" panose="020B0503020204020204" pitchFamily="34" charset="-122"/>
-                        <a:ea typeface="微软雅黑" panose="020B0503020204020204" pitchFamily="34" charset="-122"/>
-                        <a:cs typeface="微软雅黑" panose="020B0503020204020204" pitchFamily="34" charset="-122"/>
+                        <a:latin typeface="微软雅黑" charset="0"/>
+                        <a:ea typeface="微软雅黑" charset="0"/>
+                        <a:cs typeface="微软雅黑" charset="0"/>
                       </a:endParaRPr>
                     </a:p>
                   </a:txBody>
-                  <a:tcPr anchor="ctr">
+                  <a:tcPr marL="91440" marR="91440" marT="45720" marB="45720" anchor="ctr">
                     <a:lnL w="9525" cap="flat" cmpd="sng" algn="ctr">
                       <a:solidFill>
                         <a:srgbClr val="D8DBE0"/>
@@ -6557,7 +6676,7 @@
                     <a:bodyPr/>
                     <a:lstStyle/>
                     <a:p>
-                      <a:pPr marL="0" indent="0" algn="l">
+                      <a:pPr algn="l" indent="0" marL="0">
                         <a:buNone/>
                       </a:pPr>
                       <a:r>
@@ -6565,20 +6684,20 @@
                           <a:solidFill>
                             <a:srgbClr val="1F2329"/>
                           </a:solidFill>
-                          <a:latin typeface="微软雅黑" panose="020B0503020204020204" pitchFamily="34" charset="-122"/>
-                          <a:ea typeface="微软雅黑" panose="020B0503020204020204" pitchFamily="34" charset="-122"/>
-                          <a:cs typeface="微软雅黑" panose="020B0503020204020204" pitchFamily="34" charset="-120"/>
+                          <a:latin typeface="微软雅黑" pitchFamily="34" charset="0"/>
+                          <a:ea typeface="微软雅黑" pitchFamily="34" charset="-122"/>
+                          <a:cs typeface="微软雅黑" pitchFamily="34" charset="-120"/>
                         </a:rPr>
                         <a:t>1算6</a:t>
                       </a:r>
                       <a:endParaRPr lang="en-US" sz="1500" dirty="0">
-                        <a:latin typeface="微软雅黑" panose="020B0503020204020204" pitchFamily="34" charset="-122"/>
-                        <a:ea typeface="微软雅黑" panose="020B0503020204020204" pitchFamily="34" charset="-122"/>
-                        <a:cs typeface="微软雅黑" panose="020B0503020204020204" pitchFamily="34" charset="-122"/>
+                        <a:latin typeface="微软雅黑" charset="0"/>
+                        <a:ea typeface="微软雅黑" charset="0"/>
+                        <a:cs typeface="微软雅黑" charset="0"/>
                       </a:endParaRPr>
                     </a:p>
                   </a:txBody>
-                  <a:tcPr anchor="ctr">
+                  <a:tcPr marL="91440" marR="91440" marT="45720" marB="45720" anchor="ctr">
                     <a:lnL w="9525" cap="flat" cmpd="sng" algn="ctr">
                       <a:solidFill>
                         <a:srgbClr val="D8DBE0"/>
@@ -6625,7 +6744,7 @@
                     <a:bodyPr/>
                     <a:lstStyle/>
                     <a:p>
-                      <a:pPr marL="0" indent="0" algn="l">
+                      <a:pPr algn="l" indent="0" marL="0">
                         <a:buNone/>
                       </a:pPr>
                       <a:r>
@@ -6633,20 +6752,20 @@
                           <a:solidFill>
                             <a:srgbClr val="1F2329"/>
                           </a:solidFill>
-                          <a:latin typeface="微软雅黑" panose="020B0503020204020204" pitchFamily="34" charset="-122"/>
-                          <a:ea typeface="微软雅黑" panose="020B0503020204020204" pitchFamily="34" charset="-122"/>
-                          <a:cs typeface="微软雅黑" panose="020B0503020204020204" pitchFamily="34" charset="-120"/>
+                          <a:latin typeface="微软雅黑" pitchFamily="34" charset="0"/>
+                          <a:ea typeface="微软雅黑" pitchFamily="34" charset="-122"/>
+                          <a:cs typeface="微软雅黑" pitchFamily="34" charset="-120"/>
                         </a:rPr>
                         <a:t>多项式求值+复杂度</a:t>
                       </a:r>
                       <a:endParaRPr lang="en-US" sz="1500" dirty="0">
-                        <a:latin typeface="微软雅黑" panose="020B0503020204020204" pitchFamily="34" charset="-122"/>
-                        <a:ea typeface="微软雅黑" panose="020B0503020204020204" pitchFamily="34" charset="-122"/>
-                        <a:cs typeface="微软雅黑" panose="020B0503020204020204" pitchFamily="34" charset="-122"/>
+                        <a:latin typeface="微软雅黑" charset="0"/>
+                        <a:ea typeface="微软雅黑" charset="0"/>
+                        <a:cs typeface="微软雅黑" charset="0"/>
                       </a:endParaRPr>
                     </a:p>
                   </a:txBody>
-                  <a:tcPr anchor="ctr">
+                  <a:tcPr marL="91440" marR="91440" marT="45720" marB="45720" anchor="ctr">
                     <a:lnL w="9525" cap="flat" cmpd="sng" algn="ctr">
                       <a:solidFill>
                         <a:srgbClr val="D8DBE0"/>
@@ -6693,7 +6812,7 @@
                     <a:bodyPr/>
                     <a:lstStyle/>
                     <a:p>
-                      <a:pPr marL="0" indent="0" algn="l">
+                      <a:pPr algn="l" indent="0" marL="0">
                         <a:buNone/>
                       </a:pPr>
                       <a:r>
@@ -6701,20 +6820,20 @@
                           <a:solidFill>
                             <a:srgbClr val="1F2329"/>
                           </a:solidFill>
-                          <a:latin typeface="微软雅黑" panose="020B0503020204020204" pitchFamily="34" charset="-122"/>
-                          <a:ea typeface="微软雅黑" panose="020B0503020204020204" pitchFamily="34" charset="-122"/>
-                          <a:cs typeface="微软雅黑" panose="020B0503020204020204" pitchFamily="34" charset="-120"/>
+                          <a:latin typeface="微软雅黑" pitchFamily="34" charset="0"/>
+                          <a:ea typeface="微软雅黑" pitchFamily="34" charset="-122"/>
+                          <a:cs typeface="微软雅黑" pitchFamily="34" charset="-120"/>
                         </a:rPr>
                         <a:t>代码+每语句执行次数+总复杂度=2026阅读4形态</a:t>
                       </a:r>
                       <a:endParaRPr lang="en-US" sz="1500" dirty="0">
-                        <a:latin typeface="微软雅黑" panose="020B0503020204020204" pitchFamily="34" charset="-122"/>
-                        <a:ea typeface="微软雅黑" panose="020B0503020204020204" pitchFamily="34" charset="-122"/>
-                        <a:cs typeface="微软雅黑" panose="020B0503020204020204" pitchFamily="34" charset="-122"/>
+                        <a:latin typeface="微软雅黑" charset="0"/>
+                        <a:ea typeface="微软雅黑" charset="0"/>
+                        <a:cs typeface="微软雅黑" charset="0"/>
                       </a:endParaRPr>
                     </a:p>
                   </a:txBody>
-                  <a:tcPr anchor="ctr">
+                  <a:tcPr marL="91440" marR="91440" marT="45720" marB="45720" anchor="ctr">
                     <a:lnL w="9525" cap="flat" cmpd="sng" algn="ctr">
                       <a:solidFill>
                         <a:srgbClr val="D8DBE0"/>
@@ -6771,7 +6890,7 @@
 
 <file path=ppt/slides/slide6.xml><?xml version="1.0" encoding="utf-8"?>
 <p:sld xmlns:a="http://schemas.openxmlformats.org/drawingml/2006/main" xmlns:r="http://schemas.openxmlformats.org/officeDocument/2006/relationships" xmlns:p="http://schemas.openxmlformats.org/presentationml/2006/main">
-  <p:cSld>
+  <p:cSld name="Slide 6">
     <p:bg>
       <p:bgPr>
         <a:blipFill dpi="0" rotWithShape="1">
@@ -6815,12 +6934,13 @@
             <a:avLst/>
           </a:prstGeom>
           <a:noFill/>
+          <a:ln/>
         </p:spPr>
         <p:txBody>
           <a:bodyPr wrap="square" rtlCol="0" anchor="ctr"/>
           <a:lstStyle/>
           <a:p>
-            <a:pPr marL="0" indent="0" algn="r">
+            <a:pPr algn="r" indent="0" marL="0">
               <a:buNone/>
             </a:pPr>
             <a:r>
@@ -6828,11 +6948,11 @@
                 <a:solidFill>
                   <a:srgbClr val="8A9099"/>
                 </a:solidFill>
-                <a:latin typeface="微软雅黑" panose="020B0503020204020204" pitchFamily="34" charset="-122"/>
-                <a:ea typeface="微软雅黑" panose="020B0503020204020204" pitchFamily="34" charset="-122"/>
-                <a:cs typeface="微软雅黑" panose="020B0503020204020204" pitchFamily="34" charset="-120"/>
+                <a:latin typeface="微软雅黑" pitchFamily="34" charset="0"/>
+                <a:ea typeface="微软雅黑" pitchFamily="34" charset="-122"/>
+                <a:cs typeface="微软雅黑" pitchFamily="34" charset="-120"/>
               </a:rPr>
-              <a:t>7 / 8</a:t>
+              <a:t>6 / 8</a:t>
             </a:r>
             <a:endParaRPr lang="en-US" sz="1000" dirty="0"/>
           </a:p>
@@ -6853,12 +6973,13 @@
             <a:avLst/>
           </a:prstGeom>
           <a:noFill/>
+          <a:ln/>
         </p:spPr>
         <p:txBody>
           <a:bodyPr wrap="square" rtlCol="0" anchor="ctr"/>
           <a:lstStyle/>
           <a:p>
-            <a:pPr marL="0" indent="0" algn="l">
+            <a:pPr algn="l" indent="0" marL="0">
               <a:buNone/>
             </a:pPr>
             <a:r>
@@ -6866,11 +6987,11 @@
                 <a:solidFill>
                   <a:srgbClr val="1F4E9C"/>
                 </a:solidFill>
-                <a:latin typeface="微软雅黑" panose="020B0503020204020204" pitchFamily="34" charset="-122"/>
-                <a:ea typeface="微软雅黑" panose="020B0503020204020204" pitchFamily="34" charset="-122"/>
-                <a:cs typeface="微软雅黑" panose="020B0503020204020204" pitchFamily="34" charset="-120"/>
+                <a:latin typeface="微软雅黑" pitchFamily="34" charset="0"/>
+                <a:ea typeface="微软雅黑" pitchFamily="34" charset="-122"/>
+                <a:cs typeface="微软雅黑" pitchFamily="34" charset="-120"/>
               </a:rPr>
-              <a:t>完全不做</a:t>
+              <a:t>可做可不做</a:t>
             </a:r>
             <a:endParaRPr lang="en-US" sz="1400" dirty="0"/>
           </a:p>
@@ -6891,12 +7012,13 @@
             <a:avLst/>
           </a:prstGeom>
           <a:noFill/>
+          <a:ln/>
         </p:spPr>
         <p:txBody>
           <a:bodyPr wrap="square" rtlCol="0" anchor="ctr"/>
           <a:lstStyle/>
           <a:p>
-            <a:pPr marL="0" indent="0" algn="l">
+            <a:pPr algn="l" indent="0" marL="0">
               <a:buNone/>
             </a:pPr>
             <a:r>
@@ -6904,11 +7026,11 @@
                 <a:solidFill>
                   <a:srgbClr val="1F2329"/>
                 </a:solidFill>
-                <a:latin typeface="微软雅黑" panose="020B0503020204020204" pitchFamily="34" charset="-122"/>
-                <a:ea typeface="微软雅黑" panose="020B0503020204020204" pitchFamily="34" charset="-122"/>
-                <a:cs typeface="微软雅黑" panose="020B0503020204020204" pitchFamily="34" charset="-120"/>
+                <a:latin typeface="微软雅黑" pitchFamily="34" charset="0"/>
+                <a:ea typeface="微软雅黑" pitchFamily="34" charset="-122"/>
+                <a:cs typeface="微软雅黑" pitchFamily="34" charset="-120"/>
               </a:rPr>
-              <a:t>完全不做清单</a:t>
+              <a:t>可做可不做清单</a:t>
             </a:r>
             <a:endParaRPr lang="en-US" sz="2800" dirty="0"/>
           </a:p>
@@ -6916,15 +7038,21 @@
       </p:sp>
       <p:graphicFrame>
         <p:nvGraphicFramePr>
-          <p:cNvPr id="8" name="Table 0"/>
+          <p:cNvPr id="7" name="Table 0"/>
           <p:cNvGraphicFramePr>
             <a:graphicFrameLocks noGrp="1"/>
           </p:cNvGraphicFramePr>
-          <p:nvPr/>
+          <p:nvPr>
+            <p:extLst>
+              <p:ext uri="{D42A27DB-BD31-4B8C-83A1-F6EECF244321}">
+                <p14:modId xmlns:p14="http://schemas.microsoft.com/office/powerpoint/2010/main" val="1579011935"/>
+              </p:ext>
+            </p:extLst>
+          </p:nvPr>
         </p:nvGraphicFramePr>
         <p:xfrm>
           <a:off x="822960" y="2395728"/>
-          <a:ext cx="10545775" cy="1261872"/>
+          <a:ext cx="10545775" cy="914400"/>
         </p:xfrm>
         <a:graphic>
           <a:graphicData uri="http://schemas.openxmlformats.org/drawingml/2006/table">
@@ -6940,7 +7068,7 @@
                     <a:bodyPr/>
                     <a:lstStyle/>
                     <a:p>
-                      <a:pPr marL="0" indent="0" algn="l">
+                      <a:pPr algn="l" indent="0" marL="0">
                         <a:buNone/>
                       </a:pPr>
                       <a:r>
@@ -6948,20 +7076,20 @@
                           <a:solidFill>
                             <a:srgbClr val="1F4E9C"/>
                           </a:solidFill>
-                          <a:latin typeface="微软雅黑" panose="020B0503020204020204" pitchFamily="34" charset="-122"/>
-                          <a:ea typeface="微软雅黑" panose="020B0503020204020204" pitchFamily="34" charset="-122"/>
-                          <a:cs typeface="微软雅黑" panose="020B0503020204020204" pitchFamily="34" charset="-120"/>
+                          <a:latin typeface="微软雅黑" pitchFamily="34" charset="0"/>
+                          <a:ea typeface="微软雅黑" pitchFamily="34" charset="-122"/>
+                          <a:cs typeface="微软雅黑" pitchFamily="34" charset="-120"/>
                         </a:rPr>
-                        <a:t>内容</a:t>
+                        <a:t>分组</a:t>
                       </a:r>
                       <a:endParaRPr lang="en-US" sz="1500" dirty="0">
-                        <a:latin typeface="微软雅黑" panose="020B0503020204020204" pitchFamily="34" charset="-122"/>
-                        <a:ea typeface="微软雅黑" panose="020B0503020204020204" pitchFamily="34" charset="-122"/>
-                        <a:cs typeface="微软雅黑" panose="020B0503020204020204" pitchFamily="34" charset="-122"/>
+                        <a:latin typeface="微软雅黑" charset="0"/>
+                        <a:ea typeface="微软雅黑" charset="0"/>
+                        <a:cs typeface="微软雅黑" charset="0"/>
                       </a:endParaRPr>
                     </a:p>
                   </a:txBody>
-                  <a:tcPr anchor="ctr">
+                  <a:tcPr marL="91440" marR="91440" marT="45720" marB="45720" anchor="ctr">
                     <a:lnL w="9525" cap="flat" cmpd="sng" algn="ctr">
                       <a:solidFill>
                         <a:srgbClr val="D8DBE0"/>
@@ -7008,7 +7136,7 @@
                     <a:bodyPr/>
                     <a:lstStyle/>
                     <a:p>
-                      <a:pPr marL="0" indent="0" algn="l">
+                      <a:pPr algn="l" indent="0" marL="0">
                         <a:buNone/>
                       </a:pPr>
                       <a:r>
@@ -7016,20 +7144,20 @@
                           <a:solidFill>
                             <a:srgbClr val="1F4E9C"/>
                           </a:solidFill>
-                          <a:latin typeface="微软雅黑" panose="020B0503020204020204" pitchFamily="34" charset="-122"/>
-                          <a:ea typeface="微软雅黑" panose="020B0503020204020204" pitchFamily="34" charset="-122"/>
-                          <a:cs typeface="微软雅黑" panose="020B0503020204020204" pitchFamily="34" charset="-120"/>
+                          <a:latin typeface="微软雅黑" pitchFamily="34" charset="0"/>
+                          <a:ea typeface="微软雅黑" pitchFamily="34" charset="-122"/>
+                          <a:cs typeface="微软雅黑" pitchFamily="34" charset="-120"/>
                         </a:rPr>
                         <a:t>题号</a:t>
                       </a:r>
                       <a:endParaRPr lang="en-US" sz="1500" dirty="0">
-                        <a:latin typeface="微软雅黑" panose="020B0503020204020204" pitchFamily="34" charset="-122"/>
-                        <a:ea typeface="微软雅黑" panose="020B0503020204020204" pitchFamily="34" charset="-122"/>
-                        <a:cs typeface="微软雅黑" panose="020B0503020204020204" pitchFamily="34" charset="-122"/>
+                        <a:latin typeface="微软雅黑" charset="0"/>
+                        <a:ea typeface="微软雅黑" charset="0"/>
+                        <a:cs typeface="微软雅黑" charset="0"/>
                       </a:endParaRPr>
                     </a:p>
                   </a:txBody>
-                  <a:tcPr anchor="ctr">
+                  <a:tcPr marL="91440" marR="91440" marT="45720" marB="45720" anchor="ctr">
                     <a:lnL w="9525" cap="flat" cmpd="sng" algn="ctr">
                       <a:solidFill>
                         <a:srgbClr val="D8DBE0"/>
@@ -7078,7 +7206,7 @@
                     <a:bodyPr/>
                     <a:lstStyle/>
                     <a:p>
-                      <a:pPr marL="0" indent="0" algn="l">
+                      <a:pPr algn="l" indent="0" marL="0">
                         <a:buNone/>
                       </a:pPr>
                       <a:r>
@@ -7086,20 +7214,20 @@
                           <a:solidFill>
                             <a:srgbClr val="1F2329"/>
                           </a:solidFill>
-                          <a:latin typeface="微软雅黑" panose="020B0503020204020204" pitchFamily="34" charset="-122"/>
-                          <a:ea typeface="微软雅黑" panose="020B0503020204020204" pitchFamily="34" charset="-122"/>
-                          <a:cs typeface="微软雅黑" panose="020B0503020204020204" pitchFamily="34" charset="-120"/>
+                          <a:latin typeface="微软雅黑" pitchFamily="34" charset="0"/>
+                          <a:ea typeface="微软雅黑" pitchFamily="34" charset="-122"/>
+                          <a:cs typeface="微软雅黑" pitchFamily="34" charset="-120"/>
                         </a:rPr>
-                        <a:t>程序设计方法论与流程图</a:t>
+                        <a:t>选择题：绪论概念（数据/数据结构/ADT/存…</a:t>
                       </a:r>
                       <a:endParaRPr lang="en-US" sz="1500" dirty="0">
-                        <a:latin typeface="微软雅黑" panose="020B0503020204020204" pitchFamily="34" charset="-122"/>
-                        <a:ea typeface="微软雅黑" panose="020B0503020204020204" pitchFamily="34" charset="-122"/>
-                        <a:cs typeface="微软雅黑" panose="020B0503020204020204" pitchFamily="34" charset="-122"/>
+                        <a:latin typeface="微软雅黑" charset="0"/>
+                        <a:ea typeface="微软雅黑" charset="0"/>
+                        <a:cs typeface="微软雅黑" charset="0"/>
                       </a:endParaRPr>
                     </a:p>
                   </a:txBody>
-                  <a:tcPr anchor="ctr">
+                  <a:tcPr marL="91440" marR="91440" marT="45720" marB="45720" anchor="ctr">
                     <a:lnL w="9525" cap="flat" cmpd="sng" algn="ctr">
                       <a:solidFill>
                         <a:srgbClr val="D8DBE0"/>
@@ -7146,7 +7274,7 @@
                     <a:bodyPr/>
                     <a:lstStyle/>
                     <a:p>
-                      <a:pPr marL="0" indent="0" algn="l">
+                      <a:pPr algn="l" indent="0" marL="0">
                         <a:buNone/>
                       </a:pPr>
                       <a:r>
@@ -7154,20 +7282,20 @@
                           <a:solidFill>
                             <a:srgbClr val="1F2329"/>
                           </a:solidFill>
-                          <a:latin typeface="微软雅黑" panose="020B0503020204020204" pitchFamily="34" charset="-122"/>
-                          <a:ea typeface="微软雅黑" panose="020B0503020204020204" pitchFamily="34" charset="-122"/>
-                          <a:cs typeface="微软雅黑" panose="020B0503020204020204" pitchFamily="34" charset="-120"/>
+                          <a:latin typeface="微软雅黑" pitchFamily="34" charset="0"/>
+                          <a:ea typeface="微软雅黑" pitchFamily="34" charset="-122"/>
+                          <a:cs typeface="微软雅黑" pitchFamily="34" charset="-120"/>
                         </a:rPr>
-                        <a:t>答5—7</a:t>
+                        <a:t>选1—12、14—16</a:t>
                       </a:r>
                       <a:endParaRPr lang="en-US" sz="1500" dirty="0">
-                        <a:latin typeface="微软雅黑" panose="020B0503020204020204" pitchFamily="34" charset="-122"/>
-                        <a:ea typeface="微软雅黑" panose="020B0503020204020204" pitchFamily="34" charset="-122"/>
-                        <a:cs typeface="微软雅黑" panose="020B0503020204020204" pitchFamily="34" charset="-122"/>
+                        <a:latin typeface="微软雅黑" charset="0"/>
+                        <a:ea typeface="微软雅黑" charset="0"/>
+                        <a:cs typeface="微软雅黑" charset="0"/>
                       </a:endParaRPr>
                     </a:p>
                   </a:txBody>
-                  <a:tcPr anchor="ctr">
+                  <a:tcPr marL="91440" marR="91440" marT="45720" marB="45720" anchor="ctr">
                     <a:lnL w="9525" cap="flat" cmpd="sng" algn="ctr">
                       <a:solidFill>
                         <a:srgbClr val="D8DBE0"/>
@@ -7216,7 +7344,7 @@
                     <a:bodyPr/>
                     <a:lstStyle/>
                     <a:p>
-                      <a:pPr marL="0" indent="0" algn="l">
+                      <a:pPr algn="l" indent="0" marL="0">
                         <a:buNone/>
                       </a:pPr>
                       <a:r>
@@ -7224,20 +7352,20 @@
                           <a:solidFill>
                             <a:srgbClr val="1F2329"/>
                           </a:solidFill>
-                          <a:latin typeface="微软雅黑" panose="020B0503020204020204" pitchFamily="34" charset="-122"/>
-                          <a:ea typeface="微软雅黑" panose="020B0503020204020204" pitchFamily="34" charset="-122"/>
-                          <a:cs typeface="微软雅黑" panose="020B0503020204020204" pitchFamily="34" charset="-120"/>
+                          <a:latin typeface="微软雅黑" pitchFamily="34" charset="0"/>
+                          <a:ea typeface="微软雅黑" pitchFamily="34" charset="-122"/>
+                          <a:cs typeface="微软雅黑" pitchFamily="34" charset="-120"/>
                         </a:rPr>
-                        <a:t>证明与推导题</a:t>
+                        <a:t>解答题：绪论概念辨析与复杂度巩固（术语、AD…</a:t>
                       </a:r>
                       <a:endParaRPr lang="en-US" sz="1500" dirty="0">
-                        <a:latin typeface="微软雅黑" panose="020B0503020204020204" pitchFamily="34" charset="-122"/>
-                        <a:ea typeface="微软雅黑" panose="020B0503020204020204" pitchFamily="34" charset="-122"/>
-                        <a:cs typeface="微软雅黑" panose="020B0503020204020204" pitchFamily="34" charset="-122"/>
+                        <a:latin typeface="微软雅黑" charset="0"/>
+                        <a:ea typeface="微软雅黑" charset="0"/>
+                        <a:cs typeface="微软雅黑" charset="0"/>
                       </a:endParaRPr>
                     </a:p>
                   </a:txBody>
-                  <a:tcPr anchor="ctr">
+                  <a:tcPr marL="91440" marR="91440" marT="45720" marB="45720" anchor="ctr">
                     <a:lnL w="9525" cap="flat" cmpd="sng" algn="ctr">
                       <a:solidFill>
                         <a:srgbClr val="D8DBE0"/>
@@ -7284,7 +7412,7 @@
                     <a:bodyPr/>
                     <a:lstStyle/>
                     <a:p>
-                      <a:pPr marL="0" indent="0" algn="l">
+                      <a:pPr algn="l" indent="0" marL="0">
                         <a:buNone/>
                       </a:pPr>
                       <a:r>
@@ -7292,20 +7420,158 @@
                           <a:solidFill>
                             <a:srgbClr val="1F2329"/>
                           </a:solidFill>
-                          <a:latin typeface="微软雅黑" panose="020B0503020204020204" pitchFamily="34" charset="-122"/>
-                          <a:ea typeface="微软雅黑" panose="020B0503020204020204" pitchFamily="34" charset="-122"/>
-                          <a:cs typeface="微软雅黑" panose="020B0503020204020204" pitchFamily="34" charset="-120"/>
+                          <a:latin typeface="微软雅黑" pitchFamily="34" charset="0"/>
+                          <a:ea typeface="微软雅黑" pitchFamily="34" charset="-122"/>
+                          <a:cs typeface="微软雅黑" pitchFamily="34" charset="-120"/>
                         </a:rPr>
-                        <a:t>答17</a:t>
+                        <a:t>答1—4、12—16</a:t>
                       </a:r>
                       <a:endParaRPr lang="en-US" sz="1500" dirty="0">
-                        <a:latin typeface="微软雅黑" panose="020B0503020204020204" pitchFamily="34" charset="-122"/>
-                        <a:ea typeface="微软雅黑" panose="020B0503020204020204" pitchFamily="34" charset="-122"/>
-                        <a:cs typeface="微软雅黑" panose="020B0503020204020204" pitchFamily="34" charset="-122"/>
+                        <a:latin typeface="微软雅黑" charset="0"/>
+                        <a:ea typeface="微软雅黑" charset="0"/>
+                        <a:cs typeface="微软雅黑" charset="0"/>
                       </a:endParaRPr>
                     </a:p>
                   </a:txBody>
-                  <a:tcPr anchor="ctr">
+                  <a:tcPr marL="91440" marR="91440" marT="45720" marB="45720" anchor="ctr">
+                    <a:lnL w="9525" cap="flat" cmpd="sng" algn="ctr">
+                      <a:solidFill>
+                        <a:srgbClr val="D8DBE0"/>
+                      </a:solidFill>
+                      <a:prstDash val="solid"/>
+                      <a:round/>
+                      <a:headEnd type="none" w="med" len="med"/>
+                      <a:tailEnd type="none" w="med" len="med"/>
+                    </a:lnL>
+                    <a:lnR w="9525" cap="flat" cmpd="sng" algn="ctr">
+                      <a:solidFill>
+                        <a:srgbClr val="D8DBE0"/>
+                      </a:solidFill>
+                      <a:prstDash val="solid"/>
+                      <a:round/>
+                      <a:headEnd type="none" w="med" len="med"/>
+                      <a:tailEnd type="none" w="med" len="med"/>
+                    </a:lnR>
+                    <a:lnT w="9525" cap="flat" cmpd="sng" algn="ctr">
+                      <a:solidFill>
+                        <a:srgbClr val="D8DBE0"/>
+                      </a:solidFill>
+                      <a:prstDash val="solid"/>
+                      <a:round/>
+                      <a:headEnd type="none" w="med" len="med"/>
+                      <a:tailEnd type="none" w="med" len="med"/>
+                    </a:lnT>
+                    <a:lnB w="9525" cap="flat" cmpd="sng" algn="ctr">
+                      <a:solidFill>
+                        <a:srgbClr val="D8DBE0"/>
+                      </a:solidFill>
+                      <a:prstDash val="solid"/>
+                      <a:round/>
+                      <a:headEnd type="none" w="med" len="med"/>
+                      <a:tailEnd type="none" w="med" len="med"/>
+                    </a:lnB>
+                    <a:solidFill>
+                      <a:srgbClr val="FFFFFF"/>
+                    </a:solidFill>
+                  </a:tcPr>
+                </a:tc>
+              </a:tr>
+              <a:tr h="420624">
+                <a:tc>
+                  <a:txBody>
+                    <a:bodyPr/>
+                    <a:lstStyle/>
+                    <a:p>
+                      <a:pPr algn="l" indent="0" marL="0">
+                        <a:buNone/>
+                      </a:pPr>
+                      <a:r>
+                        <a:rPr lang="en-US" sz="1500" dirty="0">
+                          <a:solidFill>
+                            <a:srgbClr val="1F2329"/>
+                          </a:solidFill>
+                          <a:latin typeface="微软雅黑" pitchFamily="34" charset="0"/>
+                          <a:ea typeface="微软雅黑" pitchFamily="34" charset="-122"/>
+                          <a:cs typeface="微软雅黑" pitchFamily="34" charset="-120"/>
+                        </a:rPr>
+                        <a:t>算法设计题：基础代码训练（排序输出、数组覆盖…</a:t>
+                      </a:r>
+                      <a:endParaRPr lang="en-US" sz="1500" dirty="0">
+                        <a:latin typeface="微软雅黑" charset="0"/>
+                        <a:ea typeface="微软雅黑" charset="0"/>
+                        <a:cs typeface="微软雅黑" charset="0"/>
+                      </a:endParaRPr>
+                    </a:p>
+                  </a:txBody>
+                  <a:tcPr marL="91440" marR="91440" marT="45720" marB="45720" anchor="ctr">
+                    <a:lnL w="9525" cap="flat" cmpd="sng" algn="ctr">
+                      <a:solidFill>
+                        <a:srgbClr val="D8DBE0"/>
+                      </a:solidFill>
+                      <a:prstDash val="solid"/>
+                      <a:round/>
+                      <a:headEnd type="none" w="med" len="med"/>
+                      <a:tailEnd type="none" w="med" len="med"/>
+                    </a:lnL>
+                    <a:lnR w="9525" cap="flat" cmpd="sng" algn="ctr">
+                      <a:solidFill>
+                        <a:srgbClr val="D8DBE0"/>
+                      </a:solidFill>
+                      <a:prstDash val="solid"/>
+                      <a:round/>
+                      <a:headEnd type="none" w="med" len="med"/>
+                      <a:tailEnd type="none" w="med" len="med"/>
+                    </a:lnR>
+                    <a:lnT w="9525" cap="flat" cmpd="sng" algn="ctr">
+                      <a:solidFill>
+                        <a:srgbClr val="D8DBE0"/>
+                      </a:solidFill>
+                      <a:prstDash val="solid"/>
+                      <a:round/>
+                      <a:headEnd type="none" w="med" len="med"/>
+                      <a:tailEnd type="none" w="med" len="med"/>
+                    </a:lnT>
+                    <a:lnB w="9525" cap="flat" cmpd="sng" algn="ctr">
+                      <a:solidFill>
+                        <a:srgbClr val="D8DBE0"/>
+                      </a:solidFill>
+                      <a:prstDash val="solid"/>
+                      <a:round/>
+                      <a:headEnd type="none" w="med" len="med"/>
+                      <a:tailEnd type="none" w="med" len="med"/>
+                    </a:lnB>
+                    <a:solidFill>
+                      <a:srgbClr val="FFFFFF"/>
+                    </a:solidFill>
+                  </a:tcPr>
+                </a:tc>
+                <a:tc>
+                  <a:txBody>
+                    <a:bodyPr/>
+                    <a:lstStyle/>
+                    <a:p>
+                      <a:pPr algn="l" indent="0" marL="0">
+                        <a:buNone/>
+                      </a:pPr>
+                      <a:r>
+                        <a:rPr lang="en-US" sz="1500" dirty="0">
+                          <a:solidFill>
+                            <a:srgbClr val="1F2329"/>
+                          </a:solidFill>
+                          <a:latin typeface="微软雅黑" pitchFamily="34" charset="0"/>
+                          <a:ea typeface="微软雅黑" pitchFamily="34" charset="-122"/>
+                          <a:cs typeface="微软雅黑" pitchFamily="34" charset="-120"/>
+                        </a:rPr>
+                        <a:t>算1—5</a:t>
+                      </a:r>
+                      <a:endParaRPr lang="en-US" sz="1500" dirty="0">
+                        <a:latin typeface="微软雅黑" charset="0"/>
+                        <a:ea typeface="微软雅黑" charset="0"/>
+                        <a:cs typeface="微软雅黑" charset="0"/>
+                      </a:endParaRPr>
+                    </a:p>
+                  </a:txBody>
+                  <a:tcPr marL="91440" marR="91440" marT="45720" marB="45720" anchor="ctr">
                     <a:lnL w="9525" cap="flat" cmpd="sng" algn="ctr">
                       <a:solidFill>
                         <a:srgbClr val="D8DBE0"/>
@@ -7362,7 +7628,7 @@
 
 <file path=ppt/slides/slide7.xml><?xml version="1.0" encoding="utf-8"?>
 <p:sld xmlns:a="http://schemas.openxmlformats.org/drawingml/2006/main" xmlns:r="http://schemas.openxmlformats.org/officeDocument/2006/relationships" xmlns:p="http://schemas.openxmlformats.org/presentationml/2006/main">
-  <p:cSld>
+  <p:cSld name="Slide 7">
     <p:bg>
       <p:bgPr>
         <a:blipFill dpi="0" rotWithShape="1">
@@ -7406,12 +7672,13 @@
             <a:avLst/>
           </a:prstGeom>
           <a:noFill/>
+          <a:ln/>
         </p:spPr>
         <p:txBody>
           <a:bodyPr wrap="square" rtlCol="0" anchor="ctr"/>
           <a:lstStyle/>
           <a:p>
-            <a:pPr marL="0" indent="0" algn="r">
+            <a:pPr algn="r" indent="0" marL="0">
               <a:buNone/>
             </a:pPr>
             <a:r>
@@ -7419,11 +7686,11 @@
                 <a:solidFill>
                   <a:srgbClr val="8A9099"/>
                 </a:solidFill>
-                <a:latin typeface="微软雅黑" panose="020B0503020204020204" pitchFamily="34" charset="-122"/>
-                <a:ea typeface="微软雅黑" panose="020B0503020204020204" pitchFamily="34" charset="-122"/>
-                <a:cs typeface="微软雅黑" panose="020B0503020204020204" pitchFamily="34" charset="-120"/>
+                <a:latin typeface="微软雅黑" pitchFamily="34" charset="0"/>
+                <a:ea typeface="微软雅黑" pitchFamily="34" charset="-122"/>
+                <a:cs typeface="微软雅黑" pitchFamily="34" charset="-120"/>
               </a:rPr>
-              <a:t>6 / 8</a:t>
+              <a:t>7 / 8</a:t>
             </a:r>
             <a:endParaRPr lang="en-US" sz="1000" dirty="0"/>
           </a:p>
@@ -7444,12 +7711,13 @@
             <a:avLst/>
           </a:prstGeom>
           <a:noFill/>
+          <a:ln/>
         </p:spPr>
         <p:txBody>
           <a:bodyPr wrap="square" rtlCol="0" anchor="ctr"/>
           <a:lstStyle/>
           <a:p>
-            <a:pPr marL="0" indent="0" algn="l">
+            <a:pPr algn="l" indent="0" marL="0">
               <a:buNone/>
             </a:pPr>
             <a:r>
@@ -7457,11 +7725,11 @@
                 <a:solidFill>
                   <a:srgbClr val="1F4E9C"/>
                 </a:solidFill>
-                <a:latin typeface="微软雅黑" panose="020B0503020204020204" pitchFamily="34" charset="-122"/>
-                <a:ea typeface="微软雅黑" panose="020B0503020204020204" pitchFamily="34" charset="-122"/>
-                <a:cs typeface="微软雅黑" panose="020B0503020204020204" pitchFamily="34" charset="-120"/>
+                <a:latin typeface="微软雅黑" pitchFamily="34" charset="0"/>
+                <a:ea typeface="微软雅黑" pitchFamily="34" charset="-122"/>
+                <a:cs typeface="微软雅黑" pitchFamily="34" charset="-120"/>
               </a:rPr>
-              <a:t>可做可不做</a:t>
+              <a:t>完全不做</a:t>
             </a:r>
             <a:endParaRPr lang="en-US" sz="1400" dirty="0"/>
           </a:p>
@@ -7482,12 +7750,13 @@
             <a:avLst/>
           </a:prstGeom>
           <a:noFill/>
+          <a:ln/>
         </p:spPr>
         <p:txBody>
           <a:bodyPr wrap="square" rtlCol="0" anchor="ctr"/>
           <a:lstStyle/>
           <a:p>
-            <a:pPr marL="0" indent="0" algn="l">
+            <a:pPr algn="l" indent="0" marL="0">
               <a:buNone/>
             </a:pPr>
             <a:r>
@@ -7495,11 +7764,11 @@
                 <a:solidFill>
                   <a:srgbClr val="1F2329"/>
                 </a:solidFill>
-                <a:latin typeface="微软雅黑" panose="020B0503020204020204" pitchFamily="34" charset="-122"/>
-                <a:ea typeface="微软雅黑" panose="020B0503020204020204" pitchFamily="34" charset="-122"/>
-                <a:cs typeface="微软雅黑" panose="020B0503020204020204" pitchFamily="34" charset="-120"/>
+                <a:latin typeface="微软雅黑" pitchFamily="34" charset="0"/>
+                <a:ea typeface="微软雅黑" pitchFamily="34" charset="-122"/>
+                <a:cs typeface="微软雅黑" pitchFamily="34" charset="-120"/>
               </a:rPr>
-              <a:t>可做可不做清单</a:t>
+              <a:t>完全不做清单</a:t>
             </a:r>
             <a:endParaRPr lang="en-US" sz="2800" dirty="0"/>
           </a:p>
@@ -7507,15 +7776,21 @@
       </p:sp>
       <p:graphicFrame>
         <p:nvGraphicFramePr>
-          <p:cNvPr id="7" name="Table 0"/>
+          <p:cNvPr id="8" name="Table 0"/>
           <p:cNvGraphicFramePr>
             <a:graphicFrameLocks noGrp="1"/>
           </p:cNvGraphicFramePr>
-          <p:nvPr/>
+          <p:nvPr>
+            <p:extLst>
+              <p:ext uri="{D42A27DB-BD31-4B8C-83A1-F6EECF244321}">
+                <p14:modId xmlns:p14="http://schemas.microsoft.com/office/powerpoint/2010/main" val="1579011935"/>
+              </p:ext>
+            </p:extLst>
+          </p:nvPr>
         </p:nvGraphicFramePr>
         <p:xfrm>
           <a:off x="822960" y="2395728"/>
-          <a:ext cx="10545775" cy="1682496"/>
+          <a:ext cx="10545775" cy="914400"/>
         </p:xfrm>
         <a:graphic>
           <a:graphicData uri="http://schemas.openxmlformats.org/drawingml/2006/table">
@@ -7531,7 +7806,7 @@
                     <a:bodyPr/>
                     <a:lstStyle/>
                     <a:p>
-                      <a:pPr marL="0" indent="0" algn="l">
+                      <a:pPr algn="l" indent="0" marL="0">
                         <a:buNone/>
                       </a:pPr>
                       <a:r>
@@ -7539,20 +7814,20 @@
                           <a:solidFill>
                             <a:srgbClr val="1F4E9C"/>
                           </a:solidFill>
-                          <a:latin typeface="微软雅黑" panose="020B0503020204020204" pitchFamily="34" charset="-122"/>
-                          <a:ea typeface="微软雅黑" panose="020B0503020204020204" pitchFamily="34" charset="-122"/>
-                          <a:cs typeface="微软雅黑" panose="020B0503020204020204" pitchFamily="34" charset="-120"/>
+                          <a:latin typeface="微软雅黑" pitchFamily="34" charset="0"/>
+                          <a:ea typeface="微软雅黑" pitchFamily="34" charset="-122"/>
+                          <a:cs typeface="微软雅黑" pitchFamily="34" charset="-120"/>
                         </a:rPr>
-                        <a:t>分组</a:t>
+                        <a:t>内容</a:t>
                       </a:r>
                       <a:endParaRPr lang="en-US" sz="1500" dirty="0">
-                        <a:latin typeface="微软雅黑" panose="020B0503020204020204" pitchFamily="34" charset="-122"/>
-                        <a:ea typeface="微软雅黑" panose="020B0503020204020204" pitchFamily="34" charset="-122"/>
-                        <a:cs typeface="微软雅黑" panose="020B0503020204020204" pitchFamily="34" charset="-122"/>
+                        <a:latin typeface="微软雅黑" charset="0"/>
+                        <a:ea typeface="微软雅黑" charset="0"/>
+                        <a:cs typeface="微软雅黑" charset="0"/>
                       </a:endParaRPr>
                     </a:p>
                   </a:txBody>
-                  <a:tcPr anchor="ctr">
+                  <a:tcPr marL="91440" marR="91440" marT="45720" marB="45720" anchor="ctr">
                     <a:lnL w="9525" cap="flat" cmpd="sng" algn="ctr">
                       <a:solidFill>
                         <a:srgbClr val="D8DBE0"/>
@@ -7599,7 +7874,7 @@
                     <a:bodyPr/>
                     <a:lstStyle/>
                     <a:p>
-                      <a:pPr marL="0" indent="0" algn="l">
+                      <a:pPr algn="l" indent="0" marL="0">
                         <a:buNone/>
                       </a:pPr>
                       <a:r>
@@ -7607,20 +7882,20 @@
                           <a:solidFill>
                             <a:srgbClr val="1F4E9C"/>
                           </a:solidFill>
-                          <a:latin typeface="微软雅黑" panose="020B0503020204020204" pitchFamily="34" charset="-122"/>
-                          <a:ea typeface="微软雅黑" panose="020B0503020204020204" pitchFamily="34" charset="-122"/>
-                          <a:cs typeface="微软雅黑" panose="020B0503020204020204" pitchFamily="34" charset="-120"/>
+                          <a:latin typeface="微软雅黑" pitchFamily="34" charset="0"/>
+                          <a:ea typeface="微软雅黑" pitchFamily="34" charset="-122"/>
+                          <a:cs typeface="微软雅黑" pitchFamily="34" charset="-120"/>
                         </a:rPr>
                         <a:t>题号</a:t>
                       </a:r>
                       <a:endParaRPr lang="en-US" sz="1500" dirty="0">
-                        <a:latin typeface="微软雅黑" panose="020B0503020204020204" pitchFamily="34" charset="-122"/>
-                        <a:ea typeface="微软雅黑" panose="020B0503020204020204" pitchFamily="34" charset="-122"/>
-                        <a:cs typeface="微软雅黑" panose="020B0503020204020204" pitchFamily="34" charset="-122"/>
+                        <a:latin typeface="微软雅黑" charset="0"/>
+                        <a:ea typeface="微软雅黑" charset="0"/>
+                        <a:cs typeface="微软雅黑" charset="0"/>
                       </a:endParaRPr>
                     </a:p>
                   </a:txBody>
-                  <a:tcPr anchor="ctr">
+                  <a:tcPr marL="91440" marR="91440" marT="45720" marB="45720" anchor="ctr">
                     <a:lnL w="9525" cap="flat" cmpd="sng" algn="ctr">
                       <a:solidFill>
                         <a:srgbClr val="D8DBE0"/>
@@ -7669,7 +7944,7 @@
                     <a:bodyPr/>
                     <a:lstStyle/>
                     <a:p>
-                      <a:pPr marL="0" indent="0" algn="l">
+                      <a:pPr algn="l" indent="0" marL="0">
                         <a:buNone/>
                       </a:pPr>
                       <a:r>
@@ -7677,20 +7952,20 @@
                           <a:solidFill>
                             <a:srgbClr val="1F2329"/>
                           </a:solidFill>
-                          <a:latin typeface="微软雅黑" panose="020B0503020204020204" pitchFamily="34" charset="-122"/>
-                          <a:ea typeface="微软雅黑" panose="020B0503020204020204" pitchFamily="34" charset="-122"/>
-                          <a:cs typeface="微软雅黑" panose="020B0503020204020204" pitchFamily="34" charset="-120"/>
+                          <a:latin typeface="微软雅黑" pitchFamily="34" charset="0"/>
+                          <a:ea typeface="微软雅黑" pitchFamily="34" charset="-122"/>
+                          <a:cs typeface="微软雅黑" pitchFamily="34" charset="-120"/>
                         </a:rPr>
-                        <a:t>选择题：绪论概念（数据/数据结构/ADT/存…</a:t>
+                        <a:t>程序设计方法论与流程图</a:t>
                       </a:r>
                       <a:endParaRPr lang="en-US" sz="1500" dirty="0">
-                        <a:latin typeface="微软雅黑" panose="020B0503020204020204" pitchFamily="34" charset="-122"/>
-                        <a:ea typeface="微软雅黑" panose="020B0503020204020204" pitchFamily="34" charset="-122"/>
-                        <a:cs typeface="微软雅黑" panose="020B0503020204020204" pitchFamily="34" charset="-122"/>
+                        <a:latin typeface="微软雅黑" charset="0"/>
+                        <a:ea typeface="微软雅黑" charset="0"/>
+                        <a:cs typeface="微软雅黑" charset="0"/>
                       </a:endParaRPr>
                     </a:p>
                   </a:txBody>
-                  <a:tcPr anchor="ctr">
+                  <a:tcPr marL="91440" marR="91440" marT="45720" marB="45720" anchor="ctr">
                     <a:lnL w="9525" cap="flat" cmpd="sng" algn="ctr">
                       <a:solidFill>
                         <a:srgbClr val="D8DBE0"/>
@@ -7737,7 +8012,7 @@
                     <a:bodyPr/>
                     <a:lstStyle/>
                     <a:p>
-                      <a:pPr marL="0" indent="0" algn="l">
+                      <a:pPr algn="l" indent="0" marL="0">
                         <a:buNone/>
                       </a:pPr>
                       <a:r>
@@ -7745,20 +8020,20 @@
                           <a:solidFill>
                             <a:srgbClr val="1F2329"/>
                           </a:solidFill>
-                          <a:latin typeface="微软雅黑" panose="020B0503020204020204" pitchFamily="34" charset="-122"/>
-                          <a:ea typeface="微软雅黑" panose="020B0503020204020204" pitchFamily="34" charset="-122"/>
-                          <a:cs typeface="微软雅黑" panose="020B0503020204020204" pitchFamily="34" charset="-120"/>
+                          <a:latin typeface="微软雅黑" pitchFamily="34" charset="0"/>
+                          <a:ea typeface="微软雅黑" pitchFamily="34" charset="-122"/>
+                          <a:cs typeface="微软雅黑" pitchFamily="34" charset="-120"/>
                         </a:rPr>
-                        <a:t>选1—12、14—16</a:t>
+                        <a:t>答5—7</a:t>
                       </a:r>
                       <a:endParaRPr lang="en-US" sz="1500" dirty="0">
-                        <a:latin typeface="微软雅黑" panose="020B0503020204020204" pitchFamily="34" charset="-122"/>
-                        <a:ea typeface="微软雅黑" panose="020B0503020204020204" pitchFamily="34" charset="-122"/>
-                        <a:cs typeface="微软雅黑" panose="020B0503020204020204" pitchFamily="34" charset="-122"/>
+                        <a:latin typeface="微软雅黑" charset="0"/>
+                        <a:ea typeface="微软雅黑" charset="0"/>
+                        <a:cs typeface="微软雅黑" charset="0"/>
                       </a:endParaRPr>
                     </a:p>
                   </a:txBody>
-                  <a:tcPr anchor="ctr">
+                  <a:tcPr marL="91440" marR="91440" marT="45720" marB="45720" anchor="ctr">
                     <a:lnL w="9525" cap="flat" cmpd="sng" algn="ctr">
                       <a:solidFill>
                         <a:srgbClr val="D8DBE0"/>
@@ -7807,7 +8082,7 @@
                     <a:bodyPr/>
                     <a:lstStyle/>
                     <a:p>
-                      <a:pPr marL="0" indent="0" algn="l">
+                      <a:pPr algn="l" indent="0" marL="0">
                         <a:buNone/>
                       </a:pPr>
                       <a:r>
@@ -7815,20 +8090,20 @@
                           <a:solidFill>
                             <a:srgbClr val="1F2329"/>
                           </a:solidFill>
-                          <a:latin typeface="微软雅黑" panose="020B0503020204020204" pitchFamily="34" charset="-122"/>
-                          <a:ea typeface="微软雅黑" panose="020B0503020204020204" pitchFamily="34" charset="-122"/>
-                          <a:cs typeface="微软雅黑" panose="020B0503020204020204" pitchFamily="34" charset="-120"/>
+                          <a:latin typeface="微软雅黑" pitchFamily="34" charset="0"/>
+                          <a:ea typeface="微软雅黑" pitchFamily="34" charset="-122"/>
+                          <a:cs typeface="微软雅黑" pitchFamily="34" charset="-120"/>
                         </a:rPr>
-                        <a:t>解答题：绪论概念辨析与复杂度巩固（术语、AD…</a:t>
+                        <a:t>证明与推导题</a:t>
                       </a:r>
                       <a:endParaRPr lang="en-US" sz="1500" dirty="0">
-                        <a:latin typeface="微软雅黑" panose="020B0503020204020204" pitchFamily="34" charset="-122"/>
-                        <a:ea typeface="微软雅黑" panose="020B0503020204020204" pitchFamily="34" charset="-122"/>
-                        <a:cs typeface="微软雅黑" panose="020B0503020204020204" pitchFamily="34" charset="-122"/>
+                        <a:latin typeface="微软雅黑" charset="0"/>
+                        <a:ea typeface="微软雅黑" charset="0"/>
+                        <a:cs typeface="微软雅黑" charset="0"/>
                       </a:endParaRPr>
                     </a:p>
                   </a:txBody>
-                  <a:tcPr anchor="ctr">
+                  <a:tcPr marL="91440" marR="91440" marT="45720" marB="45720" anchor="ctr">
                     <a:lnL w="9525" cap="flat" cmpd="sng" algn="ctr">
                       <a:solidFill>
                         <a:srgbClr val="D8DBE0"/>
@@ -7875,7 +8150,7 @@
                     <a:bodyPr/>
                     <a:lstStyle/>
                     <a:p>
-                      <a:pPr marL="0" indent="0" algn="l">
+                      <a:pPr algn="l" indent="0" marL="0">
                         <a:buNone/>
                       </a:pPr>
                       <a:r>
@@ -7883,158 +8158,20 @@
                           <a:solidFill>
                             <a:srgbClr val="1F2329"/>
                           </a:solidFill>
-                          <a:latin typeface="微软雅黑" panose="020B0503020204020204" pitchFamily="34" charset="-122"/>
-                          <a:ea typeface="微软雅黑" panose="020B0503020204020204" pitchFamily="34" charset="-122"/>
-                          <a:cs typeface="微软雅黑" panose="020B0503020204020204" pitchFamily="34" charset="-120"/>
+                          <a:latin typeface="微软雅黑" pitchFamily="34" charset="0"/>
+                          <a:ea typeface="微软雅黑" pitchFamily="34" charset="-122"/>
+                          <a:cs typeface="微软雅黑" pitchFamily="34" charset="-120"/>
                         </a:rPr>
-                        <a:t>答1—4、12—16</a:t>
+                        <a:t>答17</a:t>
                       </a:r>
                       <a:endParaRPr lang="en-US" sz="1500" dirty="0">
-                        <a:latin typeface="微软雅黑" panose="020B0503020204020204" pitchFamily="34" charset="-122"/>
-                        <a:ea typeface="微软雅黑" panose="020B0503020204020204" pitchFamily="34" charset="-122"/>
-                        <a:cs typeface="微软雅黑" panose="020B0503020204020204" pitchFamily="34" charset="-122"/>
+                        <a:latin typeface="微软雅黑" charset="0"/>
+                        <a:ea typeface="微软雅黑" charset="0"/>
+                        <a:cs typeface="微软雅黑" charset="0"/>
                       </a:endParaRPr>
                     </a:p>
                   </a:txBody>
-                  <a:tcPr anchor="ctr">
-                    <a:lnL w="9525" cap="flat" cmpd="sng" algn="ctr">
-                      <a:solidFill>
-                        <a:srgbClr val="D8DBE0"/>
-                      </a:solidFill>
-                      <a:prstDash val="solid"/>
-                      <a:round/>
-                      <a:headEnd type="none" w="med" len="med"/>
-                      <a:tailEnd type="none" w="med" len="med"/>
-                    </a:lnL>
-                    <a:lnR w="9525" cap="flat" cmpd="sng" algn="ctr">
-                      <a:solidFill>
-                        <a:srgbClr val="D8DBE0"/>
-                      </a:solidFill>
-                      <a:prstDash val="solid"/>
-                      <a:round/>
-                      <a:headEnd type="none" w="med" len="med"/>
-                      <a:tailEnd type="none" w="med" len="med"/>
-                    </a:lnR>
-                    <a:lnT w="9525" cap="flat" cmpd="sng" algn="ctr">
-                      <a:solidFill>
-                        <a:srgbClr val="D8DBE0"/>
-                      </a:solidFill>
-                      <a:prstDash val="solid"/>
-                      <a:round/>
-                      <a:headEnd type="none" w="med" len="med"/>
-                      <a:tailEnd type="none" w="med" len="med"/>
-                    </a:lnT>
-                    <a:lnB w="9525" cap="flat" cmpd="sng" algn="ctr">
-                      <a:solidFill>
-                        <a:srgbClr val="D8DBE0"/>
-                      </a:solidFill>
-                      <a:prstDash val="solid"/>
-                      <a:round/>
-                      <a:headEnd type="none" w="med" len="med"/>
-                      <a:tailEnd type="none" w="med" len="med"/>
-                    </a:lnB>
-                    <a:solidFill>
-                      <a:srgbClr val="FFFFFF"/>
-                    </a:solidFill>
-                  </a:tcPr>
-                </a:tc>
-              </a:tr>
-              <a:tr h="420624">
-                <a:tc>
-                  <a:txBody>
-                    <a:bodyPr/>
-                    <a:lstStyle/>
-                    <a:p>
-                      <a:pPr marL="0" indent="0" algn="l">
-                        <a:buNone/>
-                      </a:pPr>
-                      <a:r>
-                        <a:rPr lang="en-US" sz="1500" dirty="0">
-                          <a:solidFill>
-                            <a:srgbClr val="1F2329"/>
-                          </a:solidFill>
-                          <a:latin typeface="微软雅黑" panose="020B0503020204020204" pitchFamily="34" charset="-122"/>
-                          <a:ea typeface="微软雅黑" panose="020B0503020204020204" pitchFamily="34" charset="-122"/>
-                          <a:cs typeface="微软雅黑" panose="020B0503020204020204" pitchFamily="34" charset="-120"/>
-                        </a:rPr>
-                        <a:t>算法设计题：基础代码训练（排序输出、数组覆盖…</a:t>
-                      </a:r>
-                      <a:endParaRPr lang="en-US" sz="1500" dirty="0">
-                        <a:latin typeface="微软雅黑" panose="020B0503020204020204" pitchFamily="34" charset="-122"/>
-                        <a:ea typeface="微软雅黑" panose="020B0503020204020204" pitchFamily="34" charset="-122"/>
-                        <a:cs typeface="微软雅黑" panose="020B0503020204020204" pitchFamily="34" charset="-122"/>
-                      </a:endParaRPr>
-                    </a:p>
-                  </a:txBody>
-                  <a:tcPr anchor="ctr">
-                    <a:lnL w="9525" cap="flat" cmpd="sng" algn="ctr">
-                      <a:solidFill>
-                        <a:srgbClr val="D8DBE0"/>
-                      </a:solidFill>
-                      <a:prstDash val="solid"/>
-                      <a:round/>
-                      <a:headEnd type="none" w="med" len="med"/>
-                      <a:tailEnd type="none" w="med" len="med"/>
-                    </a:lnL>
-                    <a:lnR w="9525" cap="flat" cmpd="sng" algn="ctr">
-                      <a:solidFill>
-                        <a:srgbClr val="D8DBE0"/>
-                      </a:solidFill>
-                      <a:prstDash val="solid"/>
-                      <a:round/>
-                      <a:headEnd type="none" w="med" len="med"/>
-                      <a:tailEnd type="none" w="med" len="med"/>
-                    </a:lnR>
-                    <a:lnT w="9525" cap="flat" cmpd="sng" algn="ctr">
-                      <a:solidFill>
-                        <a:srgbClr val="D8DBE0"/>
-                      </a:solidFill>
-                      <a:prstDash val="solid"/>
-                      <a:round/>
-                      <a:headEnd type="none" w="med" len="med"/>
-                      <a:tailEnd type="none" w="med" len="med"/>
-                    </a:lnT>
-                    <a:lnB w="9525" cap="flat" cmpd="sng" algn="ctr">
-                      <a:solidFill>
-                        <a:srgbClr val="D8DBE0"/>
-                      </a:solidFill>
-                      <a:prstDash val="solid"/>
-                      <a:round/>
-                      <a:headEnd type="none" w="med" len="med"/>
-                      <a:tailEnd type="none" w="med" len="med"/>
-                    </a:lnB>
-                    <a:solidFill>
-                      <a:srgbClr val="FFFFFF"/>
-                    </a:solidFill>
-                  </a:tcPr>
-                </a:tc>
-                <a:tc>
-                  <a:txBody>
-                    <a:bodyPr/>
-                    <a:lstStyle/>
-                    <a:p>
-                      <a:pPr marL="0" indent="0" algn="l">
-                        <a:buNone/>
-                      </a:pPr>
-                      <a:r>
-                        <a:rPr lang="en-US" sz="1500" dirty="0">
-                          <a:solidFill>
-                            <a:srgbClr val="1F2329"/>
-                          </a:solidFill>
-                          <a:latin typeface="微软雅黑" panose="020B0503020204020204" pitchFamily="34" charset="-122"/>
-                          <a:ea typeface="微软雅黑" panose="020B0503020204020204" pitchFamily="34" charset="-122"/>
-                          <a:cs typeface="微软雅黑" panose="020B0503020204020204" pitchFamily="34" charset="-120"/>
-                        </a:rPr>
-                        <a:t>算1—5</a:t>
-                      </a:r>
-                      <a:endParaRPr lang="en-US" sz="1500" dirty="0">
-                        <a:latin typeface="微软雅黑" panose="020B0503020204020204" pitchFamily="34" charset="-122"/>
-                        <a:ea typeface="微软雅黑" panose="020B0503020204020204" pitchFamily="34" charset="-122"/>
-                        <a:cs typeface="微软雅黑" panose="020B0503020204020204" pitchFamily="34" charset="-122"/>
-                      </a:endParaRPr>
-                    </a:p>
-                  </a:txBody>
-                  <a:tcPr anchor="ctr">
+                  <a:tcPr marL="91440" marR="91440" marT="45720" marB="45720" anchor="ctr">
                     <a:lnL w="9525" cap="flat" cmpd="sng" algn="ctr">
                       <a:solidFill>
                         <a:srgbClr val="D8DBE0"/>
@@ -8091,7 +8228,7 @@
 
 <file path=ppt/slides/slide8.xml><?xml version="1.0" encoding="utf-8"?>
 <p:sld xmlns:a="http://schemas.openxmlformats.org/drawingml/2006/main" xmlns:r="http://schemas.openxmlformats.org/officeDocument/2006/relationships" xmlns:p="http://schemas.openxmlformats.org/presentationml/2006/main">
-  <p:cSld>
+  <p:cSld name="Slide 8">
     <p:bg>
       <p:bgPr>
         <a:blipFill dpi="0" rotWithShape="1">
@@ -8135,12 +8272,13 @@
             <a:avLst/>
           </a:prstGeom>
           <a:noFill/>
+          <a:ln/>
         </p:spPr>
         <p:txBody>
           <a:bodyPr wrap="square" rtlCol="0" anchor="ctr"/>
           <a:lstStyle/>
           <a:p>
-            <a:pPr marL="0" indent="0" algn="r">
+            <a:pPr algn="r" indent="0" marL="0">
               <a:buNone/>
             </a:pPr>
             <a:r>
@@ -8148,9 +8286,9 @@
                 <a:solidFill>
                   <a:srgbClr val="8A9099"/>
                 </a:solidFill>
-                <a:latin typeface="微软雅黑" panose="020B0503020204020204" pitchFamily="34" charset="-122"/>
-                <a:ea typeface="微软雅黑" panose="020B0503020204020204" pitchFamily="34" charset="-122"/>
-                <a:cs typeface="微软雅黑" panose="020B0503020204020204" pitchFamily="34" charset="-120"/>
+                <a:latin typeface="微软雅黑" pitchFamily="34" charset="0"/>
+                <a:ea typeface="微软雅黑" pitchFamily="34" charset="-122"/>
+                <a:cs typeface="微软雅黑" pitchFamily="34" charset="-120"/>
               </a:rPr>
               <a:t>8 / 8</a:t>
             </a:r>
@@ -8173,12 +8311,13 @@
             <a:avLst/>
           </a:prstGeom>
           <a:noFill/>
+          <a:ln/>
         </p:spPr>
         <p:txBody>
           <a:bodyPr wrap="square" rtlCol="0" anchor="ctr"/>
           <a:lstStyle/>
           <a:p>
-            <a:pPr marL="0" indent="0" algn="l">
+            <a:pPr algn="l" indent="0" marL="0">
               <a:buNone/>
             </a:pPr>
             <a:r>
@@ -8186,9 +8325,9 @@
                 <a:solidFill>
                   <a:srgbClr val="1F4E9C"/>
                 </a:solidFill>
-                <a:latin typeface="微软雅黑" panose="020B0503020204020204" pitchFamily="34" charset="-122"/>
-                <a:ea typeface="微软雅黑" panose="020B0503020204020204" pitchFamily="34" charset="-122"/>
-                <a:cs typeface="微软雅黑" panose="020B0503020204020204" pitchFamily="34" charset="-120"/>
+                <a:latin typeface="微软雅黑" pitchFamily="34" charset="0"/>
+                <a:ea typeface="微软雅黑" pitchFamily="34" charset="-122"/>
+                <a:cs typeface="微软雅黑" pitchFamily="34" charset="-120"/>
               </a:rPr>
               <a:t>使用建议</a:t>
             </a:r>
@@ -8211,12 +8350,13 @@
             <a:avLst/>
           </a:prstGeom>
           <a:noFill/>
+          <a:ln/>
         </p:spPr>
         <p:txBody>
           <a:bodyPr wrap="square" rtlCol="0" anchor="ctr"/>
           <a:lstStyle/>
           <a:p>
-            <a:pPr marL="0" indent="0" algn="l">
+            <a:pPr algn="l" indent="0" marL="0">
               <a:buNone/>
             </a:pPr>
             <a:r>
@@ -8224,9 +8364,9 @@
                 <a:solidFill>
                   <a:srgbClr val="1F2329"/>
                 </a:solidFill>
-                <a:latin typeface="微软雅黑" panose="020B0503020204020204" pitchFamily="34" charset="-122"/>
-                <a:ea typeface="微软雅黑" panose="020B0503020204020204" pitchFamily="34" charset="-122"/>
-                <a:cs typeface="微软雅黑" panose="020B0503020204020204" pitchFamily="34" charset="-120"/>
+                <a:latin typeface="微软雅黑" pitchFamily="34" charset="0"/>
+                <a:ea typeface="微软雅黑" pitchFamily="34" charset="-122"/>
+                <a:cs typeface="微软雅黑" pitchFamily="34" charset="-120"/>
               </a:rPr>
               <a:t>第1章刷题路线</a:t>
             </a:r>
@@ -8249,12 +8389,13 @@
             <a:avLst/>
           </a:prstGeom>
           <a:noFill/>
+          <a:ln/>
         </p:spPr>
         <p:txBody>
           <a:bodyPr wrap="square" rtlCol="0" anchor="t"/>
           <a:lstStyle/>
           <a:p>
-            <a:pPr marL="0" indent="0" algn="l">
+            <a:pPr algn="l" indent="0" marL="0">
               <a:lnSpc>
                 <a:spcPct val="115000"/>
               </a:lnSpc>
@@ -8265,12 +8406,18 @@
                 <a:solidFill>
                   <a:srgbClr val="1F4E9C"/>
                 </a:solidFill>
-                <a:latin typeface="微软雅黑" panose="020B0503020204020204" pitchFamily="34" charset="-122"/>
-                <a:ea typeface="微软雅黑" panose="020B0503020204020204" pitchFamily="34" charset="-122"/>
-                <a:cs typeface="微软雅黑" panose="020B0503020204020204" pitchFamily="34" charset="-120"/>
+                <a:latin typeface="微软雅黑" pitchFamily="34" charset="0"/>
+                <a:ea typeface="微软雅黑" pitchFamily="34" charset="-122"/>
+                <a:cs typeface="微软雅黑" pitchFamily="34" charset="-120"/>
               </a:rPr>
               <a:t>•  </a:t>
             </a:r>
+            <a:pPr algn="l" indent="0" marL="0">
+              <a:lnSpc>
+                <a:spcPct val="115000"/>
+              </a:lnSpc>
+              <a:buNone/>
+            </a:pPr>
             <a:r>
               <a:rPr lang="en-US" sz="1800" dirty="0">
                 <a:solidFill>
@@ -8298,12 +8445,13 @@
             <a:avLst/>
           </a:prstGeom>
           <a:noFill/>
+          <a:ln/>
         </p:spPr>
         <p:txBody>
           <a:bodyPr wrap="square" rtlCol="0" anchor="t"/>
           <a:lstStyle/>
           <a:p>
-            <a:pPr marL="0" indent="0" algn="l">
+            <a:pPr algn="l" indent="0" marL="0">
               <a:lnSpc>
                 <a:spcPct val="115000"/>
               </a:lnSpc>
@@ -8314,12 +8462,18 @@
                 <a:solidFill>
                   <a:srgbClr val="1F4E9C"/>
                 </a:solidFill>
-                <a:latin typeface="微软雅黑" panose="020B0503020204020204" pitchFamily="34" charset="-122"/>
-                <a:ea typeface="微软雅黑" panose="020B0503020204020204" pitchFamily="34" charset="-122"/>
-                <a:cs typeface="微软雅黑" panose="020B0503020204020204" pitchFamily="34" charset="-120"/>
+                <a:latin typeface="微软雅黑" pitchFamily="34" charset="0"/>
+                <a:ea typeface="微软雅黑" pitchFamily="34" charset="-122"/>
+                <a:cs typeface="微软雅黑" pitchFamily="34" charset="-120"/>
               </a:rPr>
               <a:t>•  </a:t>
             </a:r>
+            <a:pPr algn="l" indent="0" marL="0">
+              <a:lnSpc>
+                <a:spcPct val="115000"/>
+              </a:lnSpc>
+              <a:buNone/>
+            </a:pPr>
             <a:r>
               <a:rPr lang="en-US" sz="1800" dirty="0">
                 <a:solidFill>
@@ -8347,12 +8501,13 @@
             <a:avLst/>
           </a:prstGeom>
           <a:noFill/>
+          <a:ln/>
         </p:spPr>
         <p:txBody>
           <a:bodyPr wrap="square" rtlCol="0" anchor="t"/>
           <a:lstStyle/>
           <a:p>
-            <a:pPr marL="0" indent="0" algn="l">
+            <a:pPr algn="l" indent="0" marL="0">
               <a:lnSpc>
                 <a:spcPct val="115000"/>
               </a:lnSpc>
@@ -8363,12 +8518,18 @@
                 <a:solidFill>
                   <a:srgbClr val="1F4E9C"/>
                 </a:solidFill>
-                <a:latin typeface="微软雅黑" panose="020B0503020204020204" pitchFamily="34" charset="-122"/>
-                <a:ea typeface="微软雅黑" panose="020B0503020204020204" pitchFamily="34" charset="-122"/>
-                <a:cs typeface="微软雅黑" panose="020B0503020204020204" pitchFamily="34" charset="-120"/>
+                <a:latin typeface="微软雅黑" pitchFamily="34" charset="0"/>
+                <a:ea typeface="微软雅黑" pitchFamily="34" charset="-122"/>
+                <a:cs typeface="微软雅黑" pitchFamily="34" charset="-120"/>
               </a:rPr>
               <a:t>•  </a:t>
             </a:r>
+            <a:pPr algn="l" indent="0" marL="0">
+              <a:lnSpc>
+                <a:spcPct val="115000"/>
+              </a:lnSpc>
+              <a:buNone/>
+            </a:pPr>
             <a:r>
               <a:rPr lang="en-US" sz="1800" dirty="0">
                 <a:solidFill>
@@ -8396,12 +8557,13 @@
             <a:avLst/>
           </a:prstGeom>
           <a:noFill/>
+          <a:ln/>
         </p:spPr>
         <p:txBody>
           <a:bodyPr wrap="square" rtlCol="0" anchor="t"/>
           <a:lstStyle/>
           <a:p>
-            <a:pPr marL="0" indent="0" algn="l">
+            <a:pPr algn="l" indent="0" marL="0">
               <a:buNone/>
             </a:pPr>
             <a:r>
@@ -8409,9 +8571,9 @@
                 <a:solidFill>
                   <a:srgbClr val="8A9099"/>
                 </a:solidFill>
-                <a:latin typeface="微软雅黑" panose="020B0503020204020204" pitchFamily="34" charset="-122"/>
-                <a:ea typeface="微软雅黑" panose="020B0503020204020204" pitchFamily="34" charset="-122"/>
-                <a:cs typeface="微软雅黑" panose="020B0503020204020204" pitchFamily="34" charset="-120"/>
+                <a:latin typeface="微软雅黑" pitchFamily="34" charset="0"/>
+                <a:ea typeface="微软雅黑" pitchFamily="34" charset="-122"/>
+                <a:cs typeface="微软雅黑" pitchFamily="34" charset="-120"/>
               </a:rPr>
               <a:t>知识点回看：重邮数据结构笔记「绪论（复杂度分析）」对应小节；答疑进页面底部群。</a:t>
             </a:r>
@@ -8470,7 +8632,7 @@
     </a:clrScheme>
     <a:fontScheme name="Office">
       <a:majorFont>
-        <a:latin typeface="Calibri Light"/>
+        <a:latin typeface="Calibri Light" panose="020F0302020204030204"/>
         <a:ea typeface=""/>
         <a:cs typeface=""/>
         <a:font script="Jpan" typeface="游ゴシック Light"/>
@@ -8503,9 +8665,26 @@
         <a:font script="Viet" typeface="Times New Roman"/>
         <a:font script="Uigh" typeface="Microsoft Uighur"/>
         <a:font script="Geor" typeface="Sylfaen"/>
+        <a:font script="Armn" typeface="Arial"/>
+        <a:font script="Bugi" typeface="Leelawadee UI"/>
+        <a:font script="Bopo" typeface="Microsoft JhengHei"/>
+        <a:font script="Java" typeface="Javanese Text"/>
+        <a:font script="Lisu" typeface="Segoe UI"/>
+        <a:font script="Mymr" typeface="Myanmar Text"/>
+        <a:font script="Nkoo" typeface="Ebrima"/>
+        <a:font script="Olck" typeface="Nirmala UI"/>
+        <a:font script="Osma" typeface="Ebrima"/>
+        <a:font script="Phag" typeface="Phagspa"/>
+        <a:font script="Syrn" typeface="Estrangelo Edessa"/>
+        <a:font script="Syrj" typeface="Estrangelo Edessa"/>
+        <a:font script="Syre" typeface="Estrangelo Edessa"/>
+        <a:font script="Sora" typeface="Nirmala UI"/>
+        <a:font script="Tale" typeface="Microsoft Tai Le"/>
+        <a:font script="Talu" typeface="Microsoft New Tai Lue"/>
+        <a:font script="Tfng" typeface="Ebrima"/>
       </a:majorFont>
       <a:minorFont>
-        <a:latin typeface="Calibri"/>
+        <a:latin typeface="Calibri" panose="020F0502020204030204"/>
         <a:ea typeface=""/>
         <a:cs typeface=""/>
         <a:font script="Jpan" typeface="游ゴシック"/>
@@ -8538,6 +8717,23 @@
         <a:font script="Viet" typeface="Arial"/>
         <a:font script="Uigh" typeface="Microsoft Uighur"/>
         <a:font script="Geor" typeface="Sylfaen"/>
+        <a:font script="Armn" typeface="Arial"/>
+        <a:font script="Bugi" typeface="Leelawadee UI"/>
+        <a:font script="Bopo" typeface="Microsoft JhengHei"/>
+        <a:font script="Java" typeface="Javanese Text"/>
+        <a:font script="Lisu" typeface="Segoe UI"/>
+        <a:font script="Mymr" typeface="Myanmar Text"/>
+        <a:font script="Nkoo" typeface="Ebrima"/>
+        <a:font script="Olck" typeface="Nirmala UI"/>
+        <a:font script="Osma" typeface="Ebrima"/>
+        <a:font script="Phag" typeface="Phagspa"/>
+        <a:font script="Syrn" typeface="Estrangelo Edessa"/>
+        <a:font script="Syrj" typeface="Estrangelo Edessa"/>
+        <a:font script="Syre" typeface="Estrangelo Edessa"/>
+        <a:font script="Sora" typeface="Nirmala UI"/>
+        <a:font script="Tale" typeface="Microsoft Tai Le"/>
+        <a:font script="Talu" typeface="Microsoft New Tai Lue"/>
+        <a:font script="Tfng" typeface="Ebrima"/>
       </a:minorFont>
     </a:fontScheme>
     <a:fmtScheme name="Office">
@@ -8678,265 +8874,8 @@
       </a:bgFillStyleLst>
     </a:fmtScheme>
   </a:themeElements>
-  <a:extLst>
-    <a:ext uri="{05A4C25C-085E-4340-85A3-A5531E510DB2}">
-      <thm15:themeFamily xmlns:thm15="http://schemas.microsoft.com/office/thememl/2012/main" name="Office Theme" id="{62F939B6-93AF-4DB8-9C6B-D6C7DFDC589F}" vid="{4A3C46E8-61CC-4603-A589-7422A47A8E4A}"/>
-    </a:ext>
-  </a:extLst>
-</a:theme>
-</file>
-
-<file path=ppt/theme/theme2.xml><?xml version="1.0" encoding="utf-8"?>
-<a:theme xmlns:a="http://schemas.openxmlformats.org/drawingml/2006/main" name="Office Theme">
-  <a:themeElements>
-    <a:clrScheme name="Office">
-      <a:dk1>
-        <a:sysClr val="windowText" lastClr="000000"/>
-      </a:dk1>
-      <a:lt1>
-        <a:sysClr val="window" lastClr="FFFFFF"/>
-      </a:lt1>
-      <a:dk2>
-        <a:srgbClr val="44546A"/>
-      </a:dk2>
-      <a:lt2>
-        <a:srgbClr val="E7E6E6"/>
-      </a:lt2>
-      <a:accent1>
-        <a:srgbClr val="4472C4"/>
-      </a:accent1>
-      <a:accent2>
-        <a:srgbClr val="ED7D31"/>
-      </a:accent2>
-      <a:accent3>
-        <a:srgbClr val="A5A5A5"/>
-      </a:accent3>
-      <a:accent4>
-        <a:srgbClr val="FFC000"/>
-      </a:accent4>
-      <a:accent5>
-        <a:srgbClr val="5B9BD5"/>
-      </a:accent5>
-      <a:accent6>
-        <a:srgbClr val="70AD47"/>
-      </a:accent6>
-      <a:hlink>
-        <a:srgbClr val="0563C1"/>
-      </a:hlink>
-      <a:folHlink>
-        <a:srgbClr val="954F72"/>
-      </a:folHlink>
-    </a:clrScheme>
-    <a:fontScheme name="Office">
-      <a:majorFont>
-        <a:latin typeface="Calibri Light"/>
-        <a:ea typeface=""/>
-        <a:cs typeface=""/>
-        <a:font script="Jpan" typeface="游ゴシック Light"/>
-        <a:font script="Hang" typeface="맑은 고딕"/>
-        <a:font script="Hans" typeface="等线 Light"/>
-        <a:font script="Hant" typeface="新細明體"/>
-        <a:font script="Arab" typeface="Times New Roman"/>
-        <a:font script="Hebr" typeface="Times New Roman"/>
-        <a:font script="Thai" typeface="Angsana New"/>
-        <a:font script="Ethi" typeface="Nyala"/>
-        <a:font script="Beng" typeface="Vrinda"/>
-        <a:font script="Gujr" typeface="Shruti"/>
-        <a:font script="Khmr" typeface="MoolBoran"/>
-        <a:font script="Knda" typeface="Tunga"/>
-        <a:font script="Guru" typeface="Raavi"/>
-        <a:font script="Cans" typeface="Euphemia"/>
-        <a:font script="Cher" typeface="Plantagenet Cherokee"/>
-        <a:font script="Yiii" typeface="Microsoft Yi Baiti"/>
-        <a:font script="Tibt" typeface="Microsoft Himalaya"/>
-        <a:font script="Thaa" typeface="MV Boli"/>
-        <a:font script="Deva" typeface="Mangal"/>
-        <a:font script="Telu" typeface="Gautami"/>
-        <a:font script="Taml" typeface="Latha"/>
-        <a:font script="Syrc" typeface="Estrangelo Edessa"/>
-        <a:font script="Orya" typeface="Kalinga"/>
-        <a:font script="Mlym" typeface="Kartika"/>
-        <a:font script="Laoo" typeface="DokChampa"/>
-        <a:font script="Sinh" typeface="Iskoola Pota"/>
-        <a:font script="Mong" typeface="Mongolian Baiti"/>
-        <a:font script="Viet" typeface="Times New Roman"/>
-        <a:font script="Uigh" typeface="Microsoft Uighur"/>
-        <a:font script="Geor" typeface="Sylfaen"/>
-      </a:majorFont>
-      <a:minorFont>
-        <a:latin typeface="Calibri"/>
-        <a:ea typeface=""/>
-        <a:cs typeface=""/>
-        <a:font script="Jpan" typeface="游ゴシック"/>
-        <a:font script="Hang" typeface="맑은 고딕"/>
-        <a:font script="Hans" typeface="等线"/>
-        <a:font script="Hant" typeface="新細明體"/>
-        <a:font script="Arab" typeface="Arial"/>
-        <a:font script="Hebr" typeface="Arial"/>
-        <a:font script="Thai" typeface="Cordia New"/>
-        <a:font script="Ethi" typeface="Nyala"/>
-        <a:font script="Beng" typeface="Vrinda"/>
-        <a:font script="Gujr" typeface="Shruti"/>
-        <a:font script="Khmr" typeface="DaunPenh"/>
-        <a:font script="Knda" typeface="Tunga"/>
-        <a:font script="Guru" typeface="Raavi"/>
-        <a:font script="Cans" typeface="Euphemia"/>
-        <a:font script="Cher" typeface="Plantagenet Cherokee"/>
-        <a:font script="Yiii" typeface="Microsoft Yi Baiti"/>
-        <a:font script="Tibt" typeface="Microsoft Himalaya"/>
-        <a:font script="Thaa" typeface="MV Boli"/>
-        <a:font script="Deva" typeface="Mangal"/>
-        <a:font script="Telu" typeface="Gautami"/>
-        <a:font script="Taml" typeface="Latha"/>
-        <a:font script="Syrc" typeface="Estrangelo Edessa"/>
-        <a:font script="Orya" typeface="Kalinga"/>
-        <a:font script="Mlym" typeface="Kartika"/>
-        <a:font script="Laoo" typeface="DokChampa"/>
-        <a:font script="Sinh" typeface="Iskoola Pota"/>
-        <a:font script="Mong" typeface="Mongolian Baiti"/>
-        <a:font script="Viet" typeface="Arial"/>
-        <a:font script="Uigh" typeface="Microsoft Uighur"/>
-        <a:font script="Geor" typeface="Sylfaen"/>
-      </a:minorFont>
-    </a:fontScheme>
-    <a:fmtScheme name="Office">
-      <a:fillStyleLst>
-        <a:solidFill>
-          <a:schemeClr val="phClr"/>
-        </a:solidFill>
-        <a:gradFill rotWithShape="1">
-          <a:gsLst>
-            <a:gs pos="0">
-              <a:schemeClr val="phClr">
-                <a:lumMod val="110000"/>
-                <a:satMod val="105000"/>
-                <a:tint val="67000"/>
-              </a:schemeClr>
-            </a:gs>
-            <a:gs pos="50000">
-              <a:schemeClr val="phClr">
-                <a:lumMod val="105000"/>
-                <a:satMod val="103000"/>
-                <a:tint val="73000"/>
-              </a:schemeClr>
-            </a:gs>
-            <a:gs pos="100000">
-              <a:schemeClr val="phClr">
-                <a:lumMod val="105000"/>
-                <a:satMod val="109000"/>
-                <a:tint val="81000"/>
-              </a:schemeClr>
-            </a:gs>
-          </a:gsLst>
-          <a:lin ang="5400000" scaled="0"/>
-        </a:gradFill>
-        <a:gradFill rotWithShape="1">
-          <a:gsLst>
-            <a:gs pos="0">
-              <a:schemeClr val="phClr">
-                <a:satMod val="103000"/>
-                <a:lumMod val="102000"/>
-                <a:tint val="94000"/>
-              </a:schemeClr>
-            </a:gs>
-            <a:gs pos="50000">
-              <a:schemeClr val="phClr">
-                <a:satMod val="110000"/>
-                <a:lumMod val="100000"/>
-                <a:shade val="100000"/>
-              </a:schemeClr>
-            </a:gs>
-            <a:gs pos="100000">
-              <a:schemeClr val="phClr">
-                <a:lumMod val="99000"/>
-                <a:satMod val="120000"/>
-                <a:shade val="78000"/>
-              </a:schemeClr>
-            </a:gs>
-          </a:gsLst>
-          <a:lin ang="5400000" scaled="0"/>
-        </a:gradFill>
-      </a:fillStyleLst>
-      <a:lnStyleLst>
-        <a:ln w="6350" cap="flat" cmpd="sng" algn="ctr">
-          <a:solidFill>
-            <a:schemeClr val="phClr"/>
-          </a:solidFill>
-          <a:prstDash val="solid"/>
-          <a:miter lim="800000"/>
-        </a:ln>
-        <a:ln w="12700" cap="flat" cmpd="sng" algn="ctr">
-          <a:solidFill>
-            <a:schemeClr val="phClr"/>
-          </a:solidFill>
-          <a:prstDash val="solid"/>
-          <a:miter lim="800000"/>
-        </a:ln>
-        <a:ln w="19050" cap="flat" cmpd="sng" algn="ctr">
-          <a:solidFill>
-            <a:schemeClr val="phClr"/>
-          </a:solidFill>
-          <a:prstDash val="solid"/>
-          <a:miter lim="800000"/>
-        </a:ln>
-      </a:lnStyleLst>
-      <a:effectStyleLst>
-        <a:effectStyle>
-          <a:effectLst/>
-        </a:effectStyle>
-        <a:effectStyle>
-          <a:effectLst/>
-        </a:effectStyle>
-        <a:effectStyle>
-          <a:effectLst>
-            <a:outerShdw blurRad="57150" dist="19050" dir="5400000" algn="ctr" rotWithShape="0">
-              <a:srgbClr val="000000">
-                <a:alpha val="63000"/>
-              </a:srgbClr>
-            </a:outerShdw>
-          </a:effectLst>
-        </a:effectStyle>
-      </a:effectStyleLst>
-      <a:bgFillStyleLst>
-        <a:solidFill>
-          <a:schemeClr val="phClr"/>
-        </a:solidFill>
-        <a:solidFill>
-          <a:schemeClr val="phClr">
-            <a:tint val="95000"/>
-            <a:satMod val="170000"/>
-          </a:schemeClr>
-        </a:solidFill>
-        <a:gradFill rotWithShape="1">
-          <a:gsLst>
-            <a:gs pos="0">
-              <a:schemeClr val="phClr">
-                <a:tint val="93000"/>
-                <a:satMod val="150000"/>
-                <a:shade val="98000"/>
-                <a:lumMod val="102000"/>
-              </a:schemeClr>
-            </a:gs>
-            <a:gs pos="50000">
-              <a:schemeClr val="phClr">
-                <a:tint val="98000"/>
-                <a:satMod val="130000"/>
-                <a:shade val="90000"/>
-                <a:lumMod val="103000"/>
-              </a:schemeClr>
-            </a:gs>
-            <a:gs pos="100000">
-              <a:schemeClr val="phClr">
-                <a:shade val="63000"/>
-                <a:satMod val="120000"/>
-              </a:schemeClr>
-            </a:gs>
-          </a:gsLst>
-          <a:lin ang="5400000" scaled="0"/>
-        </a:gradFill>
-      </a:bgFillStyleLst>
-    </a:fmtScheme>
-  </a:themeElements>
+  <a:objectDefaults/>
+  <a:extraClrSchemeLst/>
   <a:extLst>
     <a:ext uri="{05A4C25C-085E-4340-85A3-A5531E510DB2}">
       <thm15:themeFamily xmlns:thm15="http://schemas.microsoft.com/office/thememl/2012/main" name="Office Theme" id="{62F939B6-93AF-4DB8-9C6B-D6C7DFDC589F}" vid="{4A3C46E8-61CC-4603-A589-7422A47A8E4A}"/>
